--- a/Lecture4/IntroProgrammingPart4.pptx
+++ b/Lecture4/IntroProgrammingPart4.pptx
@@ -6841,10 +6841,10 @@
       </p:grpSpPr>
       <p:pic>
         <p:nvPicPr>
-          <p:cNvPr id="6" name="Picture 5">
-            <a:extLst>
-              <a:ext uri="{FF2B5EF4-FFF2-40B4-BE49-F238E27FC236}">
-                <a16:creationId xmlns:a16="http://schemas.microsoft.com/office/drawing/2014/main" id="{852BD599-E5E7-F42C-D523-2B3058DFF8DF}"/>
+          <p:cNvPr id="3" name="Picture 2" descr="graphic shows a cartoon of a cell dividing.">
+            <a:extLst>
+              <a:ext uri="{FF2B5EF4-FFF2-40B4-BE49-F238E27FC236}">
+                <a16:creationId xmlns:a16="http://schemas.microsoft.com/office/drawing/2014/main" id="{C0A380ED-BFAD-5DD2-C3E3-C0B54141E9A1}"/>
               </a:ext>
             </a:extLst>
           </p:cNvPr>
@@ -6855,6 +6855,36 @@
         </p:nvPicPr>
         <p:blipFill>
           <a:blip r:embed="rId2"/>
+          <a:stretch>
+            <a:fillRect/>
+          </a:stretch>
+        </p:blipFill>
+        <p:spPr>
+          <a:xfrm>
+            <a:off x="2209800" y="685879"/>
+            <a:ext cx="7772400" cy="4895248"/>
+          </a:xfrm>
+          <a:prstGeom prst="rect">
+            <a:avLst/>
+          </a:prstGeom>
+        </p:spPr>
+      </p:pic>
+      <p:pic>
+        <p:nvPicPr>
+          <p:cNvPr id="6" name="Picture 5">
+            <a:extLst>
+              <a:ext uri="{FF2B5EF4-FFF2-40B4-BE49-F238E27FC236}">
+                <a16:creationId xmlns:a16="http://schemas.microsoft.com/office/drawing/2014/main" id="{852BD599-E5E7-F42C-D523-2B3058DFF8DF}"/>
+              </a:ext>
+            </a:extLst>
+          </p:cNvPr>
+          <p:cNvPicPr>
+            <a:picLocks noChangeAspect="1"/>
+          </p:cNvPicPr>
+          <p:nvPr/>
+        </p:nvPicPr>
+        <p:blipFill>
+          <a:blip r:embed="rId3"/>
           <a:stretch>
             <a:fillRect/>
           </a:stretch>
@@ -6884,7 +6914,7 @@
           <p:nvPr/>
         </p:nvPicPr>
         <p:blipFill>
-          <a:blip r:embed="rId3"/>
+          <a:blip r:embed="rId4"/>
           <a:srcRect b="63556"/>
           <a:stretch>
             <a:fillRect/>
@@ -6915,7 +6945,7 @@
           <p:nvPr/>
         </p:nvPicPr>
         <p:blipFill>
-          <a:blip r:embed="rId4"/>
+          <a:blip r:embed="rId5"/>
           <a:stretch>
             <a:fillRect/>
           </a:stretch>
@@ -6987,7 +7017,7 @@
         </p:nvSpPr>
         <p:spPr>
           <a:xfrm>
-            <a:off x="3490318" y="3126597"/>
+            <a:off x="-80563" y="6253195"/>
             <a:ext cx="5211363" cy="369332"/>
           </a:xfrm>
           <a:prstGeom prst="rect">
@@ -7003,31 +7033,31 @@
           <a:p>
             <a:r>
               <a:rPr lang="en-US" dirty="0">
-                <a:hlinkClick r:id="rId5"/>
+                <a:hlinkClick r:id="rId6"/>
               </a:rPr>
               <a:t>https://</a:t>
             </a:r>
             <a:r>
               <a:rPr lang="en-US" dirty="0" err="1">
-                <a:hlinkClick r:id="rId5"/>
+                <a:hlinkClick r:id="rId6"/>
               </a:rPr>
               <a:t>www.youtube.com</a:t>
             </a:r>
             <a:r>
               <a:rPr lang="en-US" dirty="0">
-                <a:hlinkClick r:id="rId5"/>
+                <a:hlinkClick r:id="rId6"/>
               </a:rPr>
               <a:t>/</a:t>
             </a:r>
             <a:r>
               <a:rPr lang="en-US" dirty="0" err="1">
-                <a:hlinkClick r:id="rId5"/>
+                <a:hlinkClick r:id="rId6"/>
               </a:rPr>
               <a:t>watch?v</a:t>
             </a:r>
             <a:r>
               <a:rPr lang="en-US" dirty="0">
-                <a:hlinkClick r:id="rId5"/>
+                <a:hlinkClick r:id="rId6"/>
               </a:rPr>
               <a:t>=EQ2ywYhYs5Y</a:t>
             </a:r>
@@ -7049,7 +7079,7 @@
         </p:nvSpPr>
         <p:spPr>
           <a:xfrm>
-            <a:off x="3501635" y="3382267"/>
+            <a:off x="-69246" y="6508865"/>
             <a:ext cx="5188728" cy="369332"/>
           </a:xfrm>
           <a:prstGeom prst="rect">
@@ -7065,7 +7095,7 @@
           <a:p>
             <a:r>
               <a:rPr lang="en-US" dirty="0">
-                <a:hlinkClick r:id="rId6"/>
+                <a:hlinkClick r:id="rId7"/>
               </a:rPr>
               <a:t>https://www.youtube.com/watch?v=9JhVKu4GEA8</a:t>
             </a:r>

--- a/Lecture4/IntroProgrammingPart4.pptx
+++ b/Lecture4/IntroProgrammingPart4.pptx
@@ -1,22 +1,20 @@
 
 <file path=ppt/presentation.xml><?xml version="1.0" encoding="utf-8"?>
-<p:presentation xmlns:a="http://schemas.openxmlformats.org/drawingml/2006/main" xmlns:r="http://schemas.openxmlformats.org/officeDocument/2006/relationships" xmlns:p="http://schemas.openxmlformats.org/presentationml/2006/main" saveSubsetFonts="1">
+<p:presentation xmlns:a="http://schemas.openxmlformats.org/drawingml/2006/main" xmlns:r="http://schemas.openxmlformats.org/officeDocument/2006/relationships" xmlns:p="http://schemas.openxmlformats.org/presentationml/2006/main" saveSubsetFonts="1" autoCompressPictures="0">
   <p:sldMasterIdLst>
-    <p:sldMasterId id="2147483660" r:id="rId1"/>
+    <p:sldMasterId id="2147483648" r:id="rId1"/>
   </p:sldMasterIdLst>
   <p:sldIdLst>
     <p:sldId id="256" r:id="rId2"/>
     <p:sldId id="257" r:id="rId3"/>
-    <p:sldId id="265" r:id="rId4"/>
-    <p:sldId id="258" r:id="rId5"/>
-    <p:sldId id="259" r:id="rId6"/>
-    <p:sldId id="260" r:id="rId7"/>
-    <p:sldId id="262" r:id="rId8"/>
-    <p:sldId id="261" r:id="rId9"/>
-    <p:sldId id="263" r:id="rId10"/>
-    <p:sldId id="266" r:id="rId11"/>
-    <p:sldId id="264" r:id="rId12"/>
-    <p:sldId id="267" r:id="rId13"/>
+    <p:sldId id="258" r:id="rId4"/>
+    <p:sldId id="259" r:id="rId5"/>
+    <p:sldId id="260" r:id="rId6"/>
+    <p:sldId id="262" r:id="rId7"/>
+    <p:sldId id="270" r:id="rId8"/>
+    <p:sldId id="269" r:id="rId9"/>
+    <p:sldId id="268" r:id="rId10"/>
+    <p:sldId id="271" r:id="rId11"/>
   </p:sldIdLst>
   <p:sldSz cx="12192000" cy="6858000"/>
   <p:notesSz cx="6858000" cy="9144000"/>
@@ -123,1372 +121,6 @@
 </p:presentation>
 </file>
 
-<file path=ppt/revisionInfo.xml><?xml version="1.0" encoding="utf-8"?>
-<p1510:revInfo xmlns:a="http://schemas.openxmlformats.org/drawingml/2006/main" xmlns:r="http://schemas.openxmlformats.org/officeDocument/2006/relationships" xmlns:p1510="http://schemas.microsoft.com/office/powerpoint/2015/10/main">
-  <p1510:revLst>
-    <p1510:client id="{CDA48913-D748-6D42-8607-370CBEF7D162}" v="431" dt="2024-06-26T13:30:56.377"/>
-  </p1510:revLst>
-</p1510:revInfo>
-</file>
-
-<file path=ppt/changesInfos/changesInfo1.xml><?xml version="1.0" encoding="utf-8"?>
-<pc:chgInfo xmlns:a="http://schemas.openxmlformats.org/drawingml/2006/main" xmlns:r="http://schemas.openxmlformats.org/officeDocument/2006/relationships" xmlns:ac="http://schemas.microsoft.com/office/drawing/2013/main/command" xmlns:pc="http://schemas.microsoft.com/office/powerpoint/2013/main/command">
-  <pc:docChgLst>
-    <pc:chgData name="Ishihara, Keisuke" userId="a9b9c820-5528-48b9-b7c7-a6ab70df1cbd" providerId="ADAL" clId="{CDA48913-D748-6D42-8607-370CBEF7D162}"/>
-    <pc:docChg chg="undo custSel addSld delSld modSld">
-      <pc:chgData name="Ishihara, Keisuke" userId="a9b9c820-5528-48b9-b7c7-a6ab70df1cbd" providerId="ADAL" clId="{CDA48913-D748-6D42-8607-370CBEF7D162}" dt="2024-06-26T13:30:56.377" v="2123"/>
-      <pc:docMkLst>
-        <pc:docMk/>
-      </pc:docMkLst>
-      <pc:sldChg chg="modSp mod">
-        <pc:chgData name="Ishihara, Keisuke" userId="a9b9c820-5528-48b9-b7c7-a6ab70df1cbd" providerId="ADAL" clId="{CDA48913-D748-6D42-8607-370CBEF7D162}" dt="2024-06-12T18:34:01.123" v="16" actId="20577"/>
-        <pc:sldMkLst>
-          <pc:docMk/>
-          <pc:sldMk cId="109857222" sldId="256"/>
-        </pc:sldMkLst>
-        <pc:spChg chg="mod">
-          <ac:chgData name="Ishihara, Keisuke" userId="a9b9c820-5528-48b9-b7c7-a6ab70df1cbd" providerId="ADAL" clId="{CDA48913-D748-6D42-8607-370CBEF7D162}" dt="2024-06-12T18:34:01.123" v="16" actId="20577"/>
-          <ac:spMkLst>
-            <pc:docMk/>
-            <pc:sldMk cId="109857222" sldId="256"/>
-            <ac:spMk id="3" creationId="{00000000-0000-0000-0000-000000000000}"/>
-          </ac:spMkLst>
-        </pc:spChg>
-      </pc:sldChg>
-      <pc:sldChg chg="addSp modSp mod">
-        <pc:chgData name="Ishihara, Keisuke" userId="a9b9c820-5528-48b9-b7c7-a6ab70df1cbd" providerId="ADAL" clId="{CDA48913-D748-6D42-8607-370CBEF7D162}" dt="2024-06-12T18:46:58.285" v="491" actId="14100"/>
-        <pc:sldMkLst>
-          <pc:docMk/>
-          <pc:sldMk cId="2284061945" sldId="257"/>
-        </pc:sldMkLst>
-        <pc:spChg chg="mod">
-          <ac:chgData name="Ishihara, Keisuke" userId="a9b9c820-5528-48b9-b7c7-a6ab70df1cbd" providerId="ADAL" clId="{CDA48913-D748-6D42-8607-370CBEF7D162}" dt="2024-06-12T18:46:58.285" v="491" actId="14100"/>
-          <ac:spMkLst>
-            <pc:docMk/>
-            <pc:sldMk cId="2284061945" sldId="257"/>
-            <ac:spMk id="3" creationId="{02401BAB-9E6E-9E3A-2E33-F03DF7DD928C}"/>
-          </ac:spMkLst>
-        </pc:spChg>
-        <pc:spChg chg="mod">
-          <ac:chgData name="Ishihara, Keisuke" userId="a9b9c820-5528-48b9-b7c7-a6ab70df1cbd" providerId="ADAL" clId="{CDA48913-D748-6D42-8607-370CBEF7D162}" dt="2024-06-12T18:46:55.285" v="490" actId="1076"/>
-          <ac:spMkLst>
-            <pc:docMk/>
-            <pc:sldMk cId="2284061945" sldId="257"/>
-            <ac:spMk id="4" creationId="{70D9CB0F-BEF1-192F-9232-F54B8F7476A7}"/>
-          </ac:spMkLst>
-        </pc:spChg>
-        <pc:picChg chg="add mod">
-          <ac:chgData name="Ishihara, Keisuke" userId="a9b9c820-5528-48b9-b7c7-a6ab70df1cbd" providerId="ADAL" clId="{CDA48913-D748-6D42-8607-370CBEF7D162}" dt="2024-06-12T18:45:27.480" v="440" actId="14100"/>
-          <ac:picMkLst>
-            <pc:docMk/>
-            <pc:sldMk cId="2284061945" sldId="257"/>
-            <ac:picMk id="1026" creationId="{4DC754B1-9840-4976-B566-1A24B89AE16A}"/>
-          </ac:picMkLst>
-        </pc:picChg>
-        <pc:picChg chg="add mod">
-          <ac:chgData name="Ishihara, Keisuke" userId="a9b9c820-5528-48b9-b7c7-a6ab70df1cbd" providerId="ADAL" clId="{CDA48913-D748-6D42-8607-370CBEF7D162}" dt="2024-06-12T18:46:34.484" v="479" actId="1076"/>
-          <ac:picMkLst>
-            <pc:docMk/>
-            <pc:sldMk cId="2284061945" sldId="257"/>
-            <ac:picMk id="1028" creationId="{EA3D33DA-92A7-6259-28B4-459363650BCE}"/>
-          </ac:picMkLst>
-        </pc:picChg>
-      </pc:sldChg>
-      <pc:sldChg chg="modSp mod">
-        <pc:chgData name="Ishihara, Keisuke" userId="a9b9c820-5528-48b9-b7c7-a6ab70df1cbd" providerId="ADAL" clId="{CDA48913-D748-6D42-8607-370CBEF7D162}" dt="2024-06-26T13:06:13.859" v="1328" actId="20577"/>
-        <pc:sldMkLst>
-          <pc:docMk/>
-          <pc:sldMk cId="1672665746" sldId="258"/>
-        </pc:sldMkLst>
-        <pc:spChg chg="mod">
-          <ac:chgData name="Ishihara, Keisuke" userId="a9b9c820-5528-48b9-b7c7-a6ab70df1cbd" providerId="ADAL" clId="{CDA48913-D748-6D42-8607-370CBEF7D162}" dt="2024-06-26T13:06:13.859" v="1328" actId="20577"/>
-          <ac:spMkLst>
-            <pc:docMk/>
-            <pc:sldMk cId="1672665746" sldId="258"/>
-            <ac:spMk id="2" creationId="{FE1A3280-9C69-D132-900D-5DD89873BE03}"/>
-          </ac:spMkLst>
-        </pc:spChg>
-      </pc:sldChg>
-      <pc:sldChg chg="addSp delSp modSp mod">
-        <pc:chgData name="Ishihara, Keisuke" userId="a9b9c820-5528-48b9-b7c7-a6ab70df1cbd" providerId="ADAL" clId="{CDA48913-D748-6D42-8607-370CBEF7D162}" dt="2024-06-26T13:19:19.687" v="1803" actId="1076"/>
-        <pc:sldMkLst>
-          <pc:docMk/>
-          <pc:sldMk cId="1534062264" sldId="259"/>
-        </pc:sldMkLst>
-        <pc:spChg chg="mod">
-          <ac:chgData name="Ishihara, Keisuke" userId="a9b9c820-5528-48b9-b7c7-a6ab70df1cbd" providerId="ADAL" clId="{CDA48913-D748-6D42-8607-370CBEF7D162}" dt="2024-06-12T18:42:20.390" v="287" actId="404"/>
-          <ac:spMkLst>
-            <pc:docMk/>
-            <pc:sldMk cId="1534062264" sldId="259"/>
-            <ac:spMk id="2" creationId="{0F31E364-4E44-9E31-FE5F-213A7D9D6984}"/>
-          </ac:spMkLst>
-        </pc:spChg>
-        <pc:spChg chg="add del mod">
-          <ac:chgData name="Ishihara, Keisuke" userId="a9b9c820-5528-48b9-b7c7-a6ab70df1cbd" providerId="ADAL" clId="{CDA48913-D748-6D42-8607-370CBEF7D162}" dt="2024-06-26T13:17:55.446" v="1725" actId="164"/>
-          <ac:spMkLst>
-            <pc:docMk/>
-            <pc:sldMk cId="1534062264" sldId="259"/>
-            <ac:spMk id="3" creationId="{BD68D651-8B37-48D1-6CEE-9094910A679A}"/>
-          </ac:spMkLst>
-        </pc:spChg>
-        <pc:spChg chg="add del mod">
-          <ac:chgData name="Ishihara, Keisuke" userId="a9b9c820-5528-48b9-b7c7-a6ab70df1cbd" providerId="ADAL" clId="{CDA48913-D748-6D42-8607-370CBEF7D162}" dt="2024-06-26T13:17:55.446" v="1725" actId="164"/>
-          <ac:spMkLst>
-            <pc:docMk/>
-            <pc:sldMk cId="1534062264" sldId="259"/>
-            <ac:spMk id="4" creationId="{CE102E43-C5DE-A283-5959-DBA04E13D4F8}"/>
-          </ac:spMkLst>
-        </pc:spChg>
-        <pc:spChg chg="add del mod">
-          <ac:chgData name="Ishihara, Keisuke" userId="a9b9c820-5528-48b9-b7c7-a6ab70df1cbd" providerId="ADAL" clId="{CDA48913-D748-6D42-8607-370CBEF7D162}" dt="2024-06-26T13:17:55.446" v="1725" actId="164"/>
-          <ac:spMkLst>
-            <pc:docMk/>
-            <pc:sldMk cId="1534062264" sldId="259"/>
-            <ac:spMk id="5" creationId="{547A107A-3080-8E81-77C4-BBD295F0071C}"/>
-          </ac:spMkLst>
-        </pc:spChg>
-        <pc:spChg chg="add del mod">
-          <ac:chgData name="Ishihara, Keisuke" userId="a9b9c820-5528-48b9-b7c7-a6ab70df1cbd" providerId="ADAL" clId="{CDA48913-D748-6D42-8607-370CBEF7D162}" dt="2024-06-12T18:34:29.992" v="26" actId="478"/>
-          <ac:spMkLst>
-            <pc:docMk/>
-            <pc:sldMk cId="1534062264" sldId="259"/>
-            <ac:spMk id="6" creationId="{68897DD5-939E-9C40-A04C-00EB49CF6444}"/>
-          </ac:spMkLst>
-        </pc:spChg>
-        <pc:spChg chg="add mod">
-          <ac:chgData name="Ishihara, Keisuke" userId="a9b9c820-5528-48b9-b7c7-a6ab70df1cbd" providerId="ADAL" clId="{CDA48913-D748-6D42-8607-370CBEF7D162}" dt="2024-06-26T13:19:19.687" v="1803" actId="1076"/>
-          <ac:spMkLst>
-            <pc:docMk/>
-            <pc:sldMk cId="1534062264" sldId="259"/>
-            <ac:spMk id="6" creationId="{BC161B67-59C9-2C4E-AB1C-39D7A82D157A}"/>
-          </ac:spMkLst>
-        </pc:spChg>
-        <pc:spChg chg="add del mod">
-          <ac:chgData name="Ishihara, Keisuke" userId="a9b9c820-5528-48b9-b7c7-a6ab70df1cbd" providerId="ADAL" clId="{CDA48913-D748-6D42-8607-370CBEF7D162}" dt="2024-06-12T18:34:55.980" v="39" actId="478"/>
-          <ac:spMkLst>
-            <pc:docMk/>
-            <pc:sldMk cId="1534062264" sldId="259"/>
-            <ac:spMk id="7" creationId="{5868CF54-DEF2-4193-2613-3C5F8B229F33}"/>
-          </ac:spMkLst>
-        </pc:spChg>
-        <pc:spChg chg="add mod">
-          <ac:chgData name="Ishihara, Keisuke" userId="a9b9c820-5528-48b9-b7c7-a6ab70df1cbd" providerId="ADAL" clId="{CDA48913-D748-6D42-8607-370CBEF7D162}" dt="2024-06-26T13:19:19.687" v="1803" actId="1076"/>
-          <ac:spMkLst>
-            <pc:docMk/>
-            <pc:sldMk cId="1534062264" sldId="259"/>
-            <ac:spMk id="7" creationId="{DA9DFDB8-CD7F-0588-6D93-42ACD4BC52F1}"/>
-          </ac:spMkLst>
-        </pc:spChg>
-        <pc:spChg chg="add del mod">
-          <ac:chgData name="Ishihara, Keisuke" userId="a9b9c820-5528-48b9-b7c7-a6ab70df1cbd" providerId="ADAL" clId="{CDA48913-D748-6D42-8607-370CBEF7D162}" dt="2024-06-12T18:34:55.980" v="39" actId="478"/>
-          <ac:spMkLst>
-            <pc:docMk/>
-            <pc:sldMk cId="1534062264" sldId="259"/>
-            <ac:spMk id="8" creationId="{FC965C53-54CF-0F1B-45F6-04F7A0A7F905}"/>
-          </ac:spMkLst>
-        </pc:spChg>
-        <pc:spChg chg="add del mod">
-          <ac:chgData name="Ishihara, Keisuke" userId="a9b9c820-5528-48b9-b7c7-a6ab70df1cbd" providerId="ADAL" clId="{CDA48913-D748-6D42-8607-370CBEF7D162}" dt="2024-06-12T18:34:55.980" v="39" actId="478"/>
-          <ac:spMkLst>
-            <pc:docMk/>
-            <pc:sldMk cId="1534062264" sldId="259"/>
-            <ac:spMk id="9" creationId="{16906652-B457-9DBB-4085-377D73002424}"/>
-          </ac:spMkLst>
-        </pc:spChg>
-        <pc:spChg chg="add mod">
-          <ac:chgData name="Ishihara, Keisuke" userId="a9b9c820-5528-48b9-b7c7-a6ab70df1cbd" providerId="ADAL" clId="{CDA48913-D748-6D42-8607-370CBEF7D162}" dt="2024-06-26T13:19:17.556" v="1802" actId="1076"/>
-          <ac:spMkLst>
-            <pc:docMk/>
-            <pc:sldMk cId="1534062264" sldId="259"/>
-            <ac:spMk id="9" creationId="{D4E92674-005A-61CC-0E2C-A3C28E491625}"/>
-          </ac:spMkLst>
-        </pc:spChg>
-        <pc:spChg chg="add del mod">
-          <ac:chgData name="Ishihara, Keisuke" userId="a9b9c820-5528-48b9-b7c7-a6ab70df1cbd" providerId="ADAL" clId="{CDA48913-D748-6D42-8607-370CBEF7D162}" dt="2024-06-12T18:34:55.980" v="39" actId="478"/>
-          <ac:spMkLst>
-            <pc:docMk/>
-            <pc:sldMk cId="1534062264" sldId="259"/>
-            <ac:spMk id="10" creationId="{CBD62E44-C7D8-1FF5-B91C-828D154F82EF}"/>
-          </ac:spMkLst>
-        </pc:spChg>
-        <pc:spChg chg="add del mod">
-          <ac:chgData name="Ishihara, Keisuke" userId="a9b9c820-5528-48b9-b7c7-a6ab70df1cbd" providerId="ADAL" clId="{CDA48913-D748-6D42-8607-370CBEF7D162}" dt="2024-06-12T18:34:44.547" v="34"/>
-          <ac:spMkLst>
-            <pc:docMk/>
-            <pc:sldMk cId="1534062264" sldId="259"/>
-            <ac:spMk id="11" creationId="{765DE214-6852-05BD-5EE2-822528822D96}"/>
-          </ac:spMkLst>
-        </pc:spChg>
-        <pc:spChg chg="add del mod">
-          <ac:chgData name="Ishihara, Keisuke" userId="a9b9c820-5528-48b9-b7c7-a6ab70df1cbd" providerId="ADAL" clId="{CDA48913-D748-6D42-8607-370CBEF7D162}" dt="2024-06-26T13:17:55.446" v="1725" actId="164"/>
-          <ac:spMkLst>
-            <pc:docMk/>
-            <pc:sldMk cId="1534062264" sldId="259"/>
-            <ac:spMk id="12" creationId="{BAE35A56-5CD9-2945-369A-A0581FB43075}"/>
-          </ac:spMkLst>
-        </pc:spChg>
-        <pc:spChg chg="add del mod">
-          <ac:chgData name="Ishihara, Keisuke" userId="a9b9c820-5528-48b9-b7c7-a6ab70df1cbd" providerId="ADAL" clId="{CDA48913-D748-6D42-8607-370CBEF7D162}" dt="2024-06-26T13:17:55.446" v="1725" actId="164"/>
-          <ac:spMkLst>
-            <pc:docMk/>
-            <pc:sldMk cId="1534062264" sldId="259"/>
-            <ac:spMk id="13" creationId="{B65508C8-91BC-02C4-54CB-FC06F10291E8}"/>
-          </ac:spMkLst>
-        </pc:spChg>
-        <pc:spChg chg="add del mod">
-          <ac:chgData name="Ishihara, Keisuke" userId="a9b9c820-5528-48b9-b7c7-a6ab70df1cbd" providerId="ADAL" clId="{CDA48913-D748-6D42-8607-370CBEF7D162}" dt="2024-06-26T13:17:55.446" v="1725" actId="164"/>
-          <ac:spMkLst>
-            <pc:docMk/>
-            <pc:sldMk cId="1534062264" sldId="259"/>
-            <ac:spMk id="14" creationId="{71D7647A-DD2B-18CA-0BE7-1AED4A2A1924}"/>
-          </ac:spMkLst>
-        </pc:spChg>
-        <pc:spChg chg="add del mod">
-          <ac:chgData name="Ishihara, Keisuke" userId="a9b9c820-5528-48b9-b7c7-a6ab70df1cbd" providerId="ADAL" clId="{CDA48913-D748-6D42-8607-370CBEF7D162}" dt="2024-06-26T13:17:55.446" v="1725" actId="164"/>
-          <ac:spMkLst>
-            <pc:docMk/>
-            <pc:sldMk cId="1534062264" sldId="259"/>
-            <ac:spMk id="15" creationId="{3792579E-3EBB-1356-7EBF-DA0665F98BD1}"/>
-          </ac:spMkLst>
-        </pc:spChg>
-        <pc:spChg chg="add del mod">
-          <ac:chgData name="Ishihara, Keisuke" userId="a9b9c820-5528-48b9-b7c7-a6ab70df1cbd" providerId="ADAL" clId="{CDA48913-D748-6D42-8607-370CBEF7D162}" dt="2024-06-12T18:36:03.222" v="70" actId="478"/>
-          <ac:spMkLst>
-            <pc:docMk/>
-            <pc:sldMk cId="1534062264" sldId="259"/>
-            <ac:spMk id="16" creationId="{78D0D22A-42ED-684E-1FDB-5F85B50DBC8F}"/>
-          </ac:spMkLst>
-        </pc:spChg>
-        <pc:spChg chg="add del mod">
-          <ac:chgData name="Ishihara, Keisuke" userId="a9b9c820-5528-48b9-b7c7-a6ab70df1cbd" providerId="ADAL" clId="{CDA48913-D748-6D42-8607-370CBEF7D162}" dt="2024-06-12T18:38:11.073" v="144" actId="478"/>
-          <ac:spMkLst>
-            <pc:docMk/>
-            <pc:sldMk cId="1534062264" sldId="259"/>
-            <ac:spMk id="18" creationId="{802B8473-8B85-C8B9-F35A-939BDEDDCB16}"/>
-          </ac:spMkLst>
-        </pc:spChg>
-        <pc:spChg chg="add del mod">
-          <ac:chgData name="Ishihara, Keisuke" userId="a9b9c820-5528-48b9-b7c7-a6ab70df1cbd" providerId="ADAL" clId="{CDA48913-D748-6D42-8607-370CBEF7D162}" dt="2024-06-26T13:17:55.446" v="1725" actId="164"/>
-          <ac:spMkLst>
-            <pc:docMk/>
-            <pc:sldMk cId="1534062264" sldId="259"/>
-            <ac:spMk id="19" creationId="{BBCECC15-BDB0-CFDC-ACD6-72431924F172}"/>
-          </ac:spMkLst>
-        </pc:spChg>
-        <pc:spChg chg="add del mod">
-          <ac:chgData name="Ishihara, Keisuke" userId="a9b9c820-5528-48b9-b7c7-a6ab70df1cbd" providerId="ADAL" clId="{CDA48913-D748-6D42-8607-370CBEF7D162}" dt="2024-06-26T13:17:55.446" v="1725" actId="164"/>
-          <ac:spMkLst>
-            <pc:docMk/>
-            <pc:sldMk cId="1534062264" sldId="259"/>
-            <ac:spMk id="20" creationId="{7B8366CA-4E15-54AA-3B51-6B166A9108BF}"/>
-          </ac:spMkLst>
-        </pc:spChg>
-        <pc:spChg chg="add del mod">
-          <ac:chgData name="Ishihara, Keisuke" userId="a9b9c820-5528-48b9-b7c7-a6ab70df1cbd" providerId="ADAL" clId="{CDA48913-D748-6D42-8607-370CBEF7D162}" dt="2024-06-26T13:17:55.446" v="1725" actId="164"/>
-          <ac:spMkLst>
-            <pc:docMk/>
-            <pc:sldMk cId="1534062264" sldId="259"/>
-            <ac:spMk id="21" creationId="{55F5DE41-06A4-9255-6356-013BCA1FDBD8}"/>
-          </ac:spMkLst>
-        </pc:spChg>
-        <pc:spChg chg="add del mod">
-          <ac:chgData name="Ishihara, Keisuke" userId="a9b9c820-5528-48b9-b7c7-a6ab70df1cbd" providerId="ADAL" clId="{CDA48913-D748-6D42-8607-370CBEF7D162}" dt="2024-06-26T13:17:55.446" v="1725" actId="164"/>
-          <ac:spMkLst>
-            <pc:docMk/>
-            <pc:sldMk cId="1534062264" sldId="259"/>
-            <ac:spMk id="22" creationId="{27969F50-265F-B7C9-260F-ABFAF03F30BC}"/>
-          </ac:spMkLst>
-        </pc:spChg>
-        <pc:spChg chg="add del mod">
-          <ac:chgData name="Ishihara, Keisuke" userId="a9b9c820-5528-48b9-b7c7-a6ab70df1cbd" providerId="ADAL" clId="{CDA48913-D748-6D42-8607-370CBEF7D162}" dt="2024-06-12T18:38:28.753" v="155"/>
-          <ac:spMkLst>
-            <pc:docMk/>
-            <pc:sldMk cId="1534062264" sldId="259"/>
-            <ac:spMk id="23" creationId="{BE00068F-F7D3-426D-7C7E-AE6737FEA455}"/>
-          </ac:spMkLst>
-        </pc:spChg>
-        <pc:spChg chg="add del mod">
-          <ac:chgData name="Ishihara, Keisuke" userId="a9b9c820-5528-48b9-b7c7-a6ab70df1cbd" providerId="ADAL" clId="{CDA48913-D748-6D42-8607-370CBEF7D162}" dt="2024-06-12T18:38:27.524" v="153"/>
-          <ac:spMkLst>
-            <pc:docMk/>
-            <pc:sldMk cId="1534062264" sldId="259"/>
-            <ac:spMk id="24" creationId="{5667F352-0AE1-DD68-B976-3DAB1C5DBEEB}"/>
-          </ac:spMkLst>
-        </pc:spChg>
-        <pc:spChg chg="add del mod">
-          <ac:chgData name="Ishihara, Keisuke" userId="a9b9c820-5528-48b9-b7c7-a6ab70df1cbd" providerId="ADAL" clId="{CDA48913-D748-6D42-8607-370CBEF7D162}" dt="2024-06-12T18:38:28.754" v="157"/>
-          <ac:spMkLst>
-            <pc:docMk/>
-            <pc:sldMk cId="1534062264" sldId="259"/>
-            <ac:spMk id="25" creationId="{22AB22A6-8FF3-0307-ED18-2E2C1BD4A08E}"/>
-          </ac:spMkLst>
-        </pc:spChg>
-        <pc:spChg chg="add del mod">
-          <ac:chgData name="Ishihara, Keisuke" userId="a9b9c820-5528-48b9-b7c7-a6ab70df1cbd" providerId="ADAL" clId="{CDA48913-D748-6D42-8607-370CBEF7D162}" dt="2024-06-26T13:17:55.446" v="1725" actId="164"/>
-          <ac:spMkLst>
-            <pc:docMk/>
-            <pc:sldMk cId="1534062264" sldId="259"/>
-            <ac:spMk id="26" creationId="{D38AEA8C-081A-956D-52CC-D71CCE3B7C8D}"/>
-          </ac:spMkLst>
-        </pc:spChg>
-        <pc:spChg chg="add del mod">
-          <ac:chgData name="Ishihara, Keisuke" userId="a9b9c820-5528-48b9-b7c7-a6ab70df1cbd" providerId="ADAL" clId="{CDA48913-D748-6D42-8607-370CBEF7D162}" dt="2024-06-26T13:17:55.446" v="1725" actId="164"/>
-          <ac:spMkLst>
-            <pc:docMk/>
-            <pc:sldMk cId="1534062264" sldId="259"/>
-            <ac:spMk id="27" creationId="{14275FAC-0482-B895-028F-A0969DEB4B19}"/>
-          </ac:spMkLst>
-        </pc:spChg>
-        <pc:spChg chg="add del mod">
-          <ac:chgData name="Ishihara, Keisuke" userId="a9b9c820-5528-48b9-b7c7-a6ab70df1cbd" providerId="ADAL" clId="{CDA48913-D748-6D42-8607-370CBEF7D162}" dt="2024-06-12T18:39:08.153" v="166" actId="478"/>
-          <ac:spMkLst>
-            <pc:docMk/>
-            <pc:sldMk cId="1534062264" sldId="259"/>
-            <ac:spMk id="28" creationId="{B5036DF8-84D6-8B21-2DA3-C8A7CFEF7D99}"/>
-          </ac:spMkLst>
-        </pc:spChg>
-        <pc:spChg chg="add del mod">
-          <ac:chgData name="Ishihara, Keisuke" userId="a9b9c820-5528-48b9-b7c7-a6ab70df1cbd" providerId="ADAL" clId="{CDA48913-D748-6D42-8607-370CBEF7D162}" dt="2024-06-26T13:17:55.446" v="1725" actId="164"/>
-          <ac:spMkLst>
-            <pc:docMk/>
-            <pc:sldMk cId="1534062264" sldId="259"/>
-            <ac:spMk id="29" creationId="{F5837C1D-2128-158D-C6C2-DA552775E8A2}"/>
-          </ac:spMkLst>
-        </pc:spChg>
-        <pc:spChg chg="add del mod">
-          <ac:chgData name="Ishihara, Keisuke" userId="a9b9c820-5528-48b9-b7c7-a6ab70df1cbd" providerId="ADAL" clId="{CDA48913-D748-6D42-8607-370CBEF7D162}" dt="2024-06-12T18:39:08.153" v="166" actId="478"/>
-          <ac:spMkLst>
-            <pc:docMk/>
-            <pc:sldMk cId="1534062264" sldId="259"/>
-            <ac:spMk id="30" creationId="{99A5064D-6A02-E3FE-0B96-180942B51045}"/>
-          </ac:spMkLst>
-        </pc:spChg>
-        <pc:spChg chg="add del mod">
-          <ac:chgData name="Ishihara, Keisuke" userId="a9b9c820-5528-48b9-b7c7-a6ab70df1cbd" providerId="ADAL" clId="{CDA48913-D748-6D42-8607-370CBEF7D162}" dt="2024-06-26T13:17:55.446" v="1725" actId="164"/>
-          <ac:spMkLst>
-            <pc:docMk/>
-            <pc:sldMk cId="1534062264" sldId="259"/>
-            <ac:spMk id="31" creationId="{4BE49D8A-79DA-E0CC-C41C-BEF1277F10F2}"/>
-          </ac:spMkLst>
-        </pc:spChg>
-        <pc:spChg chg="add del mod">
-          <ac:chgData name="Ishihara, Keisuke" userId="a9b9c820-5528-48b9-b7c7-a6ab70df1cbd" providerId="ADAL" clId="{CDA48913-D748-6D42-8607-370CBEF7D162}" dt="2024-06-12T18:39:08.153" v="166" actId="478"/>
-          <ac:spMkLst>
-            <pc:docMk/>
-            <pc:sldMk cId="1534062264" sldId="259"/>
-            <ac:spMk id="32" creationId="{045AFC4F-F5A7-6694-C343-D9D0C553C07E}"/>
-          </ac:spMkLst>
-        </pc:spChg>
-        <pc:grpChg chg="add mod">
-          <ac:chgData name="Ishihara, Keisuke" userId="a9b9c820-5528-48b9-b7c7-a6ab70df1cbd" providerId="ADAL" clId="{CDA48913-D748-6D42-8607-370CBEF7D162}" dt="2024-06-26T13:18:04.258" v="1728" actId="1076"/>
-          <ac:grpSpMkLst>
-            <pc:docMk/>
-            <pc:sldMk cId="1534062264" sldId="259"/>
-            <ac:grpSpMk id="8" creationId="{2F2224D0-8D54-4DC7-C794-DF96D85B5908}"/>
-          </ac:grpSpMkLst>
-        </pc:grpChg>
-        <pc:graphicFrameChg chg="add mod modGraphic">
-          <ac:chgData name="Ishihara, Keisuke" userId="a9b9c820-5528-48b9-b7c7-a6ab70df1cbd" providerId="ADAL" clId="{CDA48913-D748-6D42-8607-370CBEF7D162}" dt="2024-06-26T13:18:00.429" v="1727" actId="14100"/>
-          <ac:graphicFrameMkLst>
-            <pc:docMk/>
-            <pc:sldMk cId="1534062264" sldId="259"/>
-            <ac:graphicFrameMk id="17" creationId="{1DA52050-01B7-11EF-EAC2-BC079E37B522}"/>
-          </ac:graphicFrameMkLst>
-        </pc:graphicFrameChg>
-        <pc:cxnChg chg="add mod">
-          <ac:chgData name="Ishihara, Keisuke" userId="a9b9c820-5528-48b9-b7c7-a6ab70df1cbd" providerId="ADAL" clId="{CDA48913-D748-6D42-8607-370CBEF7D162}" dt="2024-06-26T13:17:55.446" v="1725" actId="164"/>
-          <ac:cxnSpMkLst>
-            <pc:docMk/>
-            <pc:sldMk cId="1534062264" sldId="259"/>
-            <ac:cxnSpMk id="34" creationId="{4A490B17-93E1-75A5-F788-D21D003D4AE4}"/>
-          </ac:cxnSpMkLst>
-        </pc:cxnChg>
-        <pc:cxnChg chg="add mod">
-          <ac:chgData name="Ishihara, Keisuke" userId="a9b9c820-5528-48b9-b7c7-a6ab70df1cbd" providerId="ADAL" clId="{CDA48913-D748-6D42-8607-370CBEF7D162}" dt="2024-06-26T13:17:55.446" v="1725" actId="164"/>
-          <ac:cxnSpMkLst>
-            <pc:docMk/>
-            <pc:sldMk cId="1534062264" sldId="259"/>
-            <ac:cxnSpMk id="35" creationId="{86FEEB90-BF0C-699A-F0BC-870895F08519}"/>
-          </ac:cxnSpMkLst>
-        </pc:cxnChg>
-        <pc:cxnChg chg="add mod">
-          <ac:chgData name="Ishihara, Keisuke" userId="a9b9c820-5528-48b9-b7c7-a6ab70df1cbd" providerId="ADAL" clId="{CDA48913-D748-6D42-8607-370CBEF7D162}" dt="2024-06-26T13:17:55.446" v="1725" actId="164"/>
-          <ac:cxnSpMkLst>
-            <pc:docMk/>
-            <pc:sldMk cId="1534062264" sldId="259"/>
-            <ac:cxnSpMk id="36" creationId="{9AB6A016-15FF-42AC-5AB6-96E5BDD7B48A}"/>
-          </ac:cxnSpMkLst>
-        </pc:cxnChg>
-        <pc:cxnChg chg="add mod">
-          <ac:chgData name="Ishihara, Keisuke" userId="a9b9c820-5528-48b9-b7c7-a6ab70df1cbd" providerId="ADAL" clId="{CDA48913-D748-6D42-8607-370CBEF7D162}" dt="2024-06-26T13:17:55.446" v="1725" actId="164"/>
-          <ac:cxnSpMkLst>
-            <pc:docMk/>
-            <pc:sldMk cId="1534062264" sldId="259"/>
-            <ac:cxnSpMk id="38" creationId="{2532E906-8E9E-B3F9-31E0-53B617C66591}"/>
-          </ac:cxnSpMkLst>
-        </pc:cxnChg>
-        <pc:cxnChg chg="add mod">
-          <ac:chgData name="Ishihara, Keisuke" userId="a9b9c820-5528-48b9-b7c7-a6ab70df1cbd" providerId="ADAL" clId="{CDA48913-D748-6D42-8607-370CBEF7D162}" dt="2024-06-26T13:17:55.446" v="1725" actId="164"/>
-          <ac:cxnSpMkLst>
-            <pc:docMk/>
-            <pc:sldMk cId="1534062264" sldId="259"/>
-            <ac:cxnSpMk id="39" creationId="{CDD4E960-A36F-F5AB-143B-3275EA06BEFB}"/>
-          </ac:cxnSpMkLst>
-        </pc:cxnChg>
-        <pc:cxnChg chg="add mod">
-          <ac:chgData name="Ishihara, Keisuke" userId="a9b9c820-5528-48b9-b7c7-a6ab70df1cbd" providerId="ADAL" clId="{CDA48913-D748-6D42-8607-370CBEF7D162}" dt="2024-06-26T13:17:55.446" v="1725" actId="164"/>
-          <ac:cxnSpMkLst>
-            <pc:docMk/>
-            <pc:sldMk cId="1534062264" sldId="259"/>
-            <ac:cxnSpMk id="40" creationId="{0C53AC2D-3BA6-8BAD-034E-E9409C4E4CC7}"/>
-          </ac:cxnSpMkLst>
-        </pc:cxnChg>
-        <pc:cxnChg chg="add mod">
-          <ac:chgData name="Ishihara, Keisuke" userId="a9b9c820-5528-48b9-b7c7-a6ab70df1cbd" providerId="ADAL" clId="{CDA48913-D748-6D42-8607-370CBEF7D162}" dt="2024-06-26T13:17:55.446" v="1725" actId="164"/>
-          <ac:cxnSpMkLst>
-            <pc:docMk/>
-            <pc:sldMk cId="1534062264" sldId="259"/>
-            <ac:cxnSpMk id="41" creationId="{C6049FCF-8DC4-C1AF-AB62-C9B4B73A23B9}"/>
-          </ac:cxnSpMkLst>
-        </pc:cxnChg>
-        <pc:cxnChg chg="add mod">
-          <ac:chgData name="Ishihara, Keisuke" userId="a9b9c820-5528-48b9-b7c7-a6ab70df1cbd" providerId="ADAL" clId="{CDA48913-D748-6D42-8607-370CBEF7D162}" dt="2024-06-26T13:17:55.446" v="1725" actId="164"/>
-          <ac:cxnSpMkLst>
-            <pc:docMk/>
-            <pc:sldMk cId="1534062264" sldId="259"/>
-            <ac:cxnSpMk id="42" creationId="{E3518684-731F-BF69-E9E9-9317998C93A4}"/>
-          </ac:cxnSpMkLst>
-        </pc:cxnChg>
-        <pc:cxnChg chg="add mod">
-          <ac:chgData name="Ishihara, Keisuke" userId="a9b9c820-5528-48b9-b7c7-a6ab70df1cbd" providerId="ADAL" clId="{CDA48913-D748-6D42-8607-370CBEF7D162}" dt="2024-06-26T13:17:55.446" v="1725" actId="164"/>
-          <ac:cxnSpMkLst>
-            <pc:docMk/>
-            <pc:sldMk cId="1534062264" sldId="259"/>
-            <ac:cxnSpMk id="45" creationId="{902EC4AB-8310-FDE6-1E15-8B49570F9311}"/>
-          </ac:cxnSpMkLst>
-        </pc:cxnChg>
-        <pc:cxnChg chg="add mod">
-          <ac:chgData name="Ishihara, Keisuke" userId="a9b9c820-5528-48b9-b7c7-a6ab70df1cbd" providerId="ADAL" clId="{CDA48913-D748-6D42-8607-370CBEF7D162}" dt="2024-06-26T13:17:55.446" v="1725" actId="164"/>
-          <ac:cxnSpMkLst>
-            <pc:docMk/>
-            <pc:sldMk cId="1534062264" sldId="259"/>
-            <ac:cxnSpMk id="46" creationId="{9C615FE7-DF59-AE6B-5B69-54818289B4FA}"/>
-          </ac:cxnSpMkLst>
-        </pc:cxnChg>
-        <pc:cxnChg chg="add mod">
-          <ac:chgData name="Ishihara, Keisuke" userId="a9b9c820-5528-48b9-b7c7-a6ab70df1cbd" providerId="ADAL" clId="{CDA48913-D748-6D42-8607-370CBEF7D162}" dt="2024-06-26T13:17:55.446" v="1725" actId="164"/>
-          <ac:cxnSpMkLst>
-            <pc:docMk/>
-            <pc:sldMk cId="1534062264" sldId="259"/>
-            <ac:cxnSpMk id="47" creationId="{31815A00-86C9-8397-BEAE-2E8A83421A2C}"/>
-          </ac:cxnSpMkLst>
-        </pc:cxnChg>
-        <pc:cxnChg chg="add mod">
-          <ac:chgData name="Ishihara, Keisuke" userId="a9b9c820-5528-48b9-b7c7-a6ab70df1cbd" providerId="ADAL" clId="{CDA48913-D748-6D42-8607-370CBEF7D162}" dt="2024-06-26T13:17:55.446" v="1725" actId="164"/>
-          <ac:cxnSpMkLst>
-            <pc:docMk/>
-            <pc:sldMk cId="1534062264" sldId="259"/>
-            <ac:cxnSpMk id="48" creationId="{F595DBBC-FAD1-37B6-4C7C-39B856585C69}"/>
-          </ac:cxnSpMkLst>
-        </pc:cxnChg>
-        <pc:cxnChg chg="add mod">
-          <ac:chgData name="Ishihara, Keisuke" userId="a9b9c820-5528-48b9-b7c7-a6ab70df1cbd" providerId="ADAL" clId="{CDA48913-D748-6D42-8607-370CBEF7D162}" dt="2024-06-26T13:17:55.446" v="1725" actId="164"/>
-          <ac:cxnSpMkLst>
-            <pc:docMk/>
-            <pc:sldMk cId="1534062264" sldId="259"/>
-            <ac:cxnSpMk id="49" creationId="{42377FA2-F4BE-BB15-E76F-40712B560D2C}"/>
-          </ac:cxnSpMkLst>
-        </pc:cxnChg>
-        <pc:cxnChg chg="add mod">
-          <ac:chgData name="Ishihara, Keisuke" userId="a9b9c820-5528-48b9-b7c7-a6ab70df1cbd" providerId="ADAL" clId="{CDA48913-D748-6D42-8607-370CBEF7D162}" dt="2024-06-26T13:17:55.446" v="1725" actId="164"/>
-          <ac:cxnSpMkLst>
-            <pc:docMk/>
-            <pc:sldMk cId="1534062264" sldId="259"/>
-            <ac:cxnSpMk id="50" creationId="{163152FA-A9D7-389A-1F53-458F208DC0E2}"/>
-          </ac:cxnSpMkLst>
-        </pc:cxnChg>
-      </pc:sldChg>
-      <pc:sldChg chg="addSp delSp modSp new mod">
-        <pc:chgData name="Ishihara, Keisuke" userId="a9b9c820-5528-48b9-b7c7-a6ab70df1cbd" providerId="ADAL" clId="{CDA48913-D748-6D42-8607-370CBEF7D162}" dt="2024-06-12T18:43:57.653" v="422" actId="14100"/>
-        <pc:sldMkLst>
-          <pc:docMk/>
-          <pc:sldMk cId="48471727" sldId="260"/>
-        </pc:sldMkLst>
-        <pc:spChg chg="mod">
-          <ac:chgData name="Ishihara, Keisuke" userId="a9b9c820-5528-48b9-b7c7-a6ab70df1cbd" providerId="ADAL" clId="{CDA48913-D748-6D42-8607-370CBEF7D162}" dt="2024-06-12T18:43:57.653" v="422" actId="14100"/>
-          <ac:spMkLst>
-            <pc:docMk/>
-            <pc:sldMk cId="48471727" sldId="260"/>
-            <ac:spMk id="2" creationId="{052061DB-BC45-E25C-A798-4FA005192E21}"/>
-          </ac:spMkLst>
-        </pc:spChg>
-        <pc:spChg chg="del mod">
-          <ac:chgData name="Ishihara, Keisuke" userId="a9b9c820-5528-48b9-b7c7-a6ab70df1cbd" providerId="ADAL" clId="{CDA48913-D748-6D42-8607-370CBEF7D162}" dt="2024-06-12T18:42:51.388" v="313" actId="478"/>
-          <ac:spMkLst>
-            <pc:docMk/>
-            <pc:sldMk cId="48471727" sldId="260"/>
-            <ac:spMk id="3" creationId="{0FC0944A-DFE2-B323-E346-D567F14CA5EA}"/>
-          </ac:spMkLst>
-        </pc:spChg>
-        <pc:spChg chg="add del mod">
-          <ac:chgData name="Ishihara, Keisuke" userId="a9b9c820-5528-48b9-b7c7-a6ab70df1cbd" providerId="ADAL" clId="{CDA48913-D748-6D42-8607-370CBEF7D162}" dt="2024-06-12T18:42:55.147" v="315" actId="478"/>
-          <ac:spMkLst>
-            <pc:docMk/>
-            <pc:sldMk cId="48471727" sldId="260"/>
-            <ac:spMk id="5" creationId="{FCF1E81C-AFD7-E6A5-8437-5D2ED8527AA7}"/>
-          </ac:spMkLst>
-        </pc:spChg>
-      </pc:sldChg>
-      <pc:sldChg chg="addSp delSp modSp new mod setBg">
-        <pc:chgData name="Ishihara, Keisuke" userId="a9b9c820-5528-48b9-b7c7-a6ab70df1cbd" providerId="ADAL" clId="{CDA48913-D748-6D42-8607-370CBEF7D162}" dt="2024-06-26T12:31:30.948" v="1326" actId="1076"/>
-        <pc:sldMkLst>
-          <pc:docMk/>
-          <pc:sldMk cId="2780557047" sldId="261"/>
-        </pc:sldMkLst>
-        <pc:spChg chg="add mod">
-          <ac:chgData name="Ishihara, Keisuke" userId="a9b9c820-5528-48b9-b7c7-a6ab70df1cbd" providerId="ADAL" clId="{CDA48913-D748-6D42-8607-370CBEF7D162}" dt="2024-06-26T12:31:30.948" v="1326" actId="1076"/>
-          <ac:spMkLst>
-            <pc:docMk/>
-            <pc:sldMk cId="2780557047" sldId="261"/>
-            <ac:spMk id="2" creationId="{C8846B36-4FE8-971F-8F88-B3711EBED9DB}"/>
-          </ac:spMkLst>
-        </pc:spChg>
-        <pc:spChg chg="del">
-          <ac:chgData name="Ishihara, Keisuke" userId="a9b9c820-5528-48b9-b7c7-a6ab70df1cbd" providerId="ADAL" clId="{CDA48913-D748-6D42-8607-370CBEF7D162}" dt="2024-06-12T18:58:00.146" v="873" actId="478"/>
-          <ac:spMkLst>
-            <pc:docMk/>
-            <pc:sldMk cId="2780557047" sldId="261"/>
-            <ac:spMk id="2" creationId="{CDDFC878-71E5-B928-5611-FDAFE2F9C9DE}"/>
-          </ac:spMkLst>
-        </pc:spChg>
-        <pc:spChg chg="del">
-          <ac:chgData name="Ishihara, Keisuke" userId="a9b9c820-5528-48b9-b7c7-a6ab70df1cbd" providerId="ADAL" clId="{CDA48913-D748-6D42-8607-370CBEF7D162}" dt="2024-06-12T18:58:00.146" v="873" actId="478"/>
-          <ac:spMkLst>
-            <pc:docMk/>
-            <pc:sldMk cId="2780557047" sldId="261"/>
-            <ac:spMk id="3" creationId="{F58260E1-C938-3014-DF3D-600E558C8BA0}"/>
-          </ac:spMkLst>
-        </pc:spChg>
-        <pc:spChg chg="add del">
-          <ac:chgData name="Ishihara, Keisuke" userId="a9b9c820-5528-48b9-b7c7-a6ab70df1cbd" providerId="ADAL" clId="{CDA48913-D748-6D42-8607-370CBEF7D162}" dt="2024-06-12T18:58:53.911" v="879" actId="478"/>
-          <ac:spMkLst>
-            <pc:docMk/>
-            <pc:sldMk cId="2780557047" sldId="261"/>
-            <ac:spMk id="5" creationId="{2E7FFCF9-93E7-49C6-1B1D-0C4611D74726}"/>
-          </ac:spMkLst>
-        </pc:spChg>
-        <pc:spChg chg="add mod ord">
-          <ac:chgData name="Ishihara, Keisuke" userId="a9b9c820-5528-48b9-b7c7-a6ab70df1cbd" providerId="ADAL" clId="{CDA48913-D748-6D42-8607-370CBEF7D162}" dt="2024-06-12T19:01:03.149" v="1004" actId="1076"/>
-          <ac:spMkLst>
-            <pc:docMk/>
-            <pc:sldMk cId="2780557047" sldId="261"/>
-            <ac:spMk id="6" creationId="{7B04CCC1-EFC3-496F-B07D-8843ABECBFA2}"/>
-          </ac:spMkLst>
-        </pc:spChg>
-        <pc:spChg chg="add">
-          <ac:chgData name="Ishihara, Keisuke" userId="a9b9c820-5528-48b9-b7c7-a6ab70df1cbd" providerId="ADAL" clId="{CDA48913-D748-6D42-8607-370CBEF7D162}" dt="2024-06-12T19:00:40.429" v="990" actId="26606"/>
-          <ac:spMkLst>
-            <pc:docMk/>
-            <pc:sldMk cId="2780557047" sldId="261"/>
-            <ac:spMk id="3083" creationId="{A7AE9375-4664-4DB2-922D-2782A6E439AC}"/>
-          </ac:spMkLst>
-        </pc:spChg>
-        <pc:spChg chg="add">
-          <ac:chgData name="Ishihara, Keisuke" userId="a9b9c820-5528-48b9-b7c7-a6ab70df1cbd" providerId="ADAL" clId="{CDA48913-D748-6D42-8607-370CBEF7D162}" dt="2024-06-12T19:00:40.429" v="990" actId="26606"/>
-          <ac:spMkLst>
-            <pc:docMk/>
-            <pc:sldMk cId="2780557047" sldId="261"/>
-            <ac:spMk id="3087" creationId="{C87417AF-190E-4D6E-AFA6-7D3E84B0B430}"/>
-          </ac:spMkLst>
-        </pc:spChg>
-        <pc:spChg chg="add">
-          <ac:chgData name="Ishihara, Keisuke" userId="a9b9c820-5528-48b9-b7c7-a6ab70df1cbd" providerId="ADAL" clId="{CDA48913-D748-6D42-8607-370CBEF7D162}" dt="2024-06-12T19:00:40.429" v="990" actId="26606"/>
-          <ac:spMkLst>
-            <pc:docMk/>
-            <pc:sldMk cId="2780557047" sldId="261"/>
-            <ac:spMk id="3089" creationId="{80B30ED8-273E-4C07-8568-2FE5CC5C483D}"/>
-          </ac:spMkLst>
-        </pc:spChg>
-        <pc:picChg chg="add del mod">
-          <ac:chgData name="Ishihara, Keisuke" userId="a9b9c820-5528-48b9-b7c7-a6ab70df1cbd" providerId="ADAL" clId="{CDA48913-D748-6D42-8607-370CBEF7D162}" dt="2024-06-12T18:59:49.505" v="884" actId="478"/>
-          <ac:picMkLst>
-            <pc:docMk/>
-            <pc:sldMk cId="2780557047" sldId="261"/>
-            <ac:picMk id="3074" creationId="{62933384-CD8D-AEED-0952-13B463813B12}"/>
-          </ac:picMkLst>
-        </pc:picChg>
-        <pc:picChg chg="add mod">
-          <ac:chgData name="Ishihara, Keisuke" userId="a9b9c820-5528-48b9-b7c7-a6ab70df1cbd" providerId="ADAL" clId="{CDA48913-D748-6D42-8607-370CBEF7D162}" dt="2024-06-12T19:00:40.429" v="990" actId="26606"/>
-          <ac:picMkLst>
-            <pc:docMk/>
-            <pc:sldMk cId="2780557047" sldId="261"/>
-            <ac:picMk id="3076" creationId="{60BCACAA-AA96-37FE-7FCF-AA297BD8818A}"/>
-          </ac:picMkLst>
-        </pc:picChg>
-        <pc:picChg chg="add mod">
-          <ac:chgData name="Ishihara, Keisuke" userId="a9b9c820-5528-48b9-b7c7-a6ab70df1cbd" providerId="ADAL" clId="{CDA48913-D748-6D42-8607-370CBEF7D162}" dt="2024-06-12T19:00:40.429" v="990" actId="26606"/>
-          <ac:picMkLst>
-            <pc:docMk/>
-            <pc:sldMk cId="2780557047" sldId="261"/>
-            <ac:picMk id="3078" creationId="{11F4B439-3C47-5729-36C8-9EA50F41713C}"/>
-          </ac:picMkLst>
-        </pc:picChg>
-        <pc:cxnChg chg="add">
-          <ac:chgData name="Ishihara, Keisuke" userId="a9b9c820-5528-48b9-b7c7-a6ab70df1cbd" providerId="ADAL" clId="{CDA48913-D748-6D42-8607-370CBEF7D162}" dt="2024-06-12T19:00:40.429" v="990" actId="26606"/>
-          <ac:cxnSpMkLst>
-            <pc:docMk/>
-            <pc:sldMk cId="2780557047" sldId="261"/>
-            <ac:cxnSpMk id="3085" creationId="{EE504C98-6397-41C1-A8D8-2D9C4ED307E0}"/>
-          </ac:cxnSpMkLst>
-        </pc:cxnChg>
-      </pc:sldChg>
-      <pc:sldChg chg="addSp delSp modSp new mod modAnim">
-        <pc:chgData name="Ishihara, Keisuke" userId="a9b9c820-5528-48b9-b7c7-a6ab70df1cbd" providerId="ADAL" clId="{CDA48913-D748-6D42-8607-370CBEF7D162}" dt="2024-06-13T01:44:18.749" v="1010" actId="20577"/>
-        <pc:sldMkLst>
-          <pc:docMk/>
-          <pc:sldMk cId="1473104448" sldId="262"/>
-        </pc:sldMkLst>
-        <pc:spChg chg="mod">
-          <ac:chgData name="Ishihara, Keisuke" userId="a9b9c820-5528-48b9-b7c7-a6ab70df1cbd" providerId="ADAL" clId="{CDA48913-D748-6D42-8607-370CBEF7D162}" dt="2024-06-12T18:50:08.843" v="620" actId="20577"/>
-          <ac:spMkLst>
-            <pc:docMk/>
-            <pc:sldMk cId="1473104448" sldId="262"/>
-            <ac:spMk id="2" creationId="{03900A7A-8FFB-95ED-CF35-17EAB029BF72}"/>
-          </ac:spMkLst>
-        </pc:spChg>
-        <pc:spChg chg="del mod">
-          <ac:chgData name="Ishihara, Keisuke" userId="a9b9c820-5528-48b9-b7c7-a6ab70df1cbd" providerId="ADAL" clId="{CDA48913-D748-6D42-8607-370CBEF7D162}" dt="2024-06-12T18:50:03.864" v="616" actId="478"/>
-          <ac:spMkLst>
-            <pc:docMk/>
-            <pc:sldMk cId="1473104448" sldId="262"/>
-            <ac:spMk id="3" creationId="{B81BB602-70A2-F48F-4437-02105D678171}"/>
-          </ac:spMkLst>
-        </pc:spChg>
-        <pc:spChg chg="add del mod">
-          <ac:chgData name="Ishihara, Keisuke" userId="a9b9c820-5528-48b9-b7c7-a6ab70df1cbd" providerId="ADAL" clId="{CDA48913-D748-6D42-8607-370CBEF7D162}" dt="2024-06-12T18:50:05.725" v="617" actId="478"/>
-          <ac:spMkLst>
-            <pc:docMk/>
-            <pc:sldMk cId="1473104448" sldId="262"/>
-            <ac:spMk id="5" creationId="{D97D6405-6C19-5C67-E193-63F99D8F5C6E}"/>
-          </ac:spMkLst>
-        </pc:spChg>
-        <pc:spChg chg="add del">
-          <ac:chgData name="Ishihara, Keisuke" userId="a9b9c820-5528-48b9-b7c7-a6ab70df1cbd" providerId="ADAL" clId="{CDA48913-D748-6D42-8607-370CBEF7D162}" dt="2024-06-12T18:50:12.388" v="622" actId="478"/>
-          <ac:spMkLst>
-            <pc:docMk/>
-            <pc:sldMk cId="1473104448" sldId="262"/>
-            <ac:spMk id="7" creationId="{08620CCE-CF42-83F5-4E99-68553F023EAC}"/>
-          </ac:spMkLst>
-        </pc:spChg>
-        <pc:spChg chg="add mod">
-          <ac:chgData name="Ishihara, Keisuke" userId="a9b9c820-5528-48b9-b7c7-a6ab70df1cbd" providerId="ADAL" clId="{CDA48913-D748-6D42-8607-370CBEF7D162}" dt="2024-06-12T18:52:59.662" v="643" actId="1076"/>
-          <ac:spMkLst>
-            <pc:docMk/>
-            <pc:sldMk cId="1473104448" sldId="262"/>
-            <ac:spMk id="9" creationId="{A87ABBB3-2EAB-6A80-C6D2-0D9FD64E8052}"/>
-          </ac:spMkLst>
-        </pc:spChg>
-        <pc:spChg chg="add mod">
-          <ac:chgData name="Ishihara, Keisuke" userId="a9b9c820-5528-48b9-b7c7-a6ab70df1cbd" providerId="ADAL" clId="{CDA48913-D748-6D42-8607-370CBEF7D162}" dt="2024-06-13T01:44:18.749" v="1010" actId="20577"/>
-          <ac:spMkLst>
-            <pc:docMk/>
-            <pc:sldMk cId="1473104448" sldId="262"/>
-            <ac:spMk id="10" creationId="{1B46672E-46D1-3433-2894-DEDAFFFD65B7}"/>
-          </ac:spMkLst>
-        </pc:spChg>
-        <pc:spChg chg="add mod">
-          <ac:chgData name="Ishihara, Keisuke" userId="a9b9c820-5528-48b9-b7c7-a6ab70df1cbd" providerId="ADAL" clId="{CDA48913-D748-6D42-8607-370CBEF7D162}" dt="2024-06-12T18:54:33.925" v="690" actId="14100"/>
-          <ac:spMkLst>
-            <pc:docMk/>
-            <pc:sldMk cId="1473104448" sldId="262"/>
-            <ac:spMk id="11" creationId="{413A654A-5DEE-054D-F0C4-BA63F9C81E77}"/>
-          </ac:spMkLst>
-        </pc:spChg>
-        <pc:spChg chg="add mod">
-          <ac:chgData name="Ishihara, Keisuke" userId="a9b9c820-5528-48b9-b7c7-a6ab70df1cbd" providerId="ADAL" clId="{CDA48913-D748-6D42-8607-370CBEF7D162}" dt="2024-06-12T18:55:41.266" v="869" actId="1076"/>
-          <ac:spMkLst>
-            <pc:docMk/>
-            <pc:sldMk cId="1473104448" sldId="262"/>
-            <ac:spMk id="12" creationId="{5E27FE1B-51B9-26EB-FF8F-358C97F6202A}"/>
-          </ac:spMkLst>
-        </pc:spChg>
-        <pc:picChg chg="add mod">
-          <ac:chgData name="Ishihara, Keisuke" userId="a9b9c820-5528-48b9-b7c7-a6ab70df1cbd" providerId="ADAL" clId="{CDA48913-D748-6D42-8607-370CBEF7D162}" dt="2024-06-12T18:53:03.160" v="645" actId="1076"/>
-          <ac:picMkLst>
-            <pc:docMk/>
-            <pc:sldMk cId="1473104448" sldId="262"/>
-            <ac:picMk id="2050" creationId="{EA0CF2C0-6A4B-D14A-59E8-4D465698B0B6}"/>
-          </ac:picMkLst>
-        </pc:picChg>
-      </pc:sldChg>
-      <pc:sldChg chg="addSp delSp modSp new mod modAnim">
-        <pc:chgData name="Ishihara, Keisuke" userId="a9b9c820-5528-48b9-b7c7-a6ab70df1cbd" providerId="ADAL" clId="{CDA48913-D748-6D42-8607-370CBEF7D162}" dt="2024-06-26T13:24:17.943" v="1958"/>
-        <pc:sldMkLst>
-          <pc:docMk/>
-          <pc:sldMk cId="3685043916" sldId="263"/>
-        </pc:sldMkLst>
-        <pc:spChg chg="del">
-          <ac:chgData name="Ishihara, Keisuke" userId="a9b9c820-5528-48b9-b7c7-a6ab70df1cbd" providerId="ADAL" clId="{CDA48913-D748-6D42-8607-370CBEF7D162}" dt="2024-06-26T12:28:11.924" v="1204" actId="478"/>
-          <ac:spMkLst>
-            <pc:docMk/>
-            <pc:sldMk cId="3685043916" sldId="263"/>
-            <ac:spMk id="2" creationId="{771C349B-4D86-DB4D-95C9-03CD212EABDD}"/>
-          </ac:spMkLst>
-        </pc:spChg>
-        <pc:spChg chg="del">
-          <ac:chgData name="Ishihara, Keisuke" userId="a9b9c820-5528-48b9-b7c7-a6ab70df1cbd" providerId="ADAL" clId="{CDA48913-D748-6D42-8607-370CBEF7D162}" dt="2024-06-26T12:28:08.479" v="1203" actId="478"/>
-          <ac:spMkLst>
-            <pc:docMk/>
-            <pc:sldMk cId="3685043916" sldId="263"/>
-            <ac:spMk id="3" creationId="{BE285AB4-57D9-753B-7480-E870E1ABC97C}"/>
-          </ac:spMkLst>
-        </pc:spChg>
-        <pc:spChg chg="add del mod">
-          <ac:chgData name="Ishihara, Keisuke" userId="a9b9c820-5528-48b9-b7c7-a6ab70df1cbd" providerId="ADAL" clId="{CDA48913-D748-6D42-8607-370CBEF7D162}" dt="2024-06-26T13:09:33.085" v="1350" actId="478"/>
-          <ac:spMkLst>
-            <pc:docMk/>
-            <pc:sldMk cId="3685043916" sldId="263"/>
-            <ac:spMk id="8" creationId="{F3504CC0-CF1F-9336-9D80-20DC9F7A1B95}"/>
-          </ac:spMkLst>
-        </pc:spChg>
-        <pc:spChg chg="add mod">
-          <ac:chgData name="Ishihara, Keisuke" userId="a9b9c820-5528-48b9-b7c7-a6ab70df1cbd" providerId="ADAL" clId="{CDA48913-D748-6D42-8607-370CBEF7D162}" dt="2024-06-26T13:19:54.340" v="1807" actId="14100"/>
-          <ac:spMkLst>
-            <pc:docMk/>
-            <pc:sldMk cId="3685043916" sldId="263"/>
-            <ac:spMk id="9" creationId="{C0805BDD-20B7-2F6D-8EB2-C54DF25DB667}"/>
-          </ac:spMkLst>
-        </pc:spChg>
-        <pc:spChg chg="add del mod">
-          <ac:chgData name="Ishihara, Keisuke" userId="a9b9c820-5528-48b9-b7c7-a6ab70df1cbd" providerId="ADAL" clId="{CDA48913-D748-6D42-8607-370CBEF7D162}" dt="2024-06-26T13:21:51.204" v="1850" actId="478"/>
-          <ac:spMkLst>
-            <pc:docMk/>
-            <pc:sldMk cId="3685043916" sldId="263"/>
-            <ac:spMk id="10" creationId="{86969F1B-8E5E-D6D9-201D-C0D12B068752}"/>
-          </ac:spMkLst>
-        </pc:spChg>
-        <pc:spChg chg="add mod topLvl">
-          <ac:chgData name="Ishihara, Keisuke" userId="a9b9c820-5528-48b9-b7c7-a6ab70df1cbd" providerId="ADAL" clId="{CDA48913-D748-6D42-8607-370CBEF7D162}" dt="2024-06-26T13:20:16.167" v="1812" actId="1076"/>
-          <ac:spMkLst>
-            <pc:docMk/>
-            <pc:sldMk cId="3685043916" sldId="263"/>
-            <ac:spMk id="11" creationId="{DF3C6143-CCD2-D3BE-7DD1-6AA41FF393D1}"/>
-          </ac:spMkLst>
-        </pc:spChg>
-        <pc:spChg chg="add del mod">
-          <ac:chgData name="Ishihara, Keisuke" userId="a9b9c820-5528-48b9-b7c7-a6ab70df1cbd" providerId="ADAL" clId="{CDA48913-D748-6D42-8607-370CBEF7D162}" dt="2024-06-26T13:13:12.565" v="1527" actId="478"/>
-          <ac:spMkLst>
-            <pc:docMk/>
-            <pc:sldMk cId="3685043916" sldId="263"/>
-            <ac:spMk id="12" creationId="{9A37A1D2-FE8B-C72B-ACA8-9028787BD8CB}"/>
-          </ac:spMkLst>
-        </pc:spChg>
-        <pc:spChg chg="add mod topLvl">
-          <ac:chgData name="Ishihara, Keisuke" userId="a9b9c820-5528-48b9-b7c7-a6ab70df1cbd" providerId="ADAL" clId="{CDA48913-D748-6D42-8607-370CBEF7D162}" dt="2024-06-26T13:20:16.167" v="1812" actId="1076"/>
-          <ac:spMkLst>
-            <pc:docMk/>
-            <pc:sldMk cId="3685043916" sldId="263"/>
-            <ac:spMk id="13" creationId="{554B10DC-B6E5-27C8-E03F-DF22F8F46A4A}"/>
-          </ac:spMkLst>
-        </pc:spChg>
-        <pc:spChg chg="add del mod topLvl">
-          <ac:chgData name="Ishihara, Keisuke" userId="a9b9c820-5528-48b9-b7c7-a6ab70df1cbd" providerId="ADAL" clId="{CDA48913-D748-6D42-8607-370CBEF7D162}" dt="2024-06-26T13:21:56.109" v="1851" actId="478"/>
-          <ac:spMkLst>
-            <pc:docMk/>
-            <pc:sldMk cId="3685043916" sldId="263"/>
-            <ac:spMk id="14" creationId="{AF500C16-B97C-47DE-457D-AA8AD939ED04}"/>
-          </ac:spMkLst>
-        </pc:spChg>
-        <pc:spChg chg="add del mod topLvl">
-          <ac:chgData name="Ishihara, Keisuke" userId="a9b9c820-5528-48b9-b7c7-a6ab70df1cbd" providerId="ADAL" clId="{CDA48913-D748-6D42-8607-370CBEF7D162}" dt="2024-06-26T13:21:56.109" v="1851" actId="478"/>
-          <ac:spMkLst>
-            <pc:docMk/>
-            <pc:sldMk cId="3685043916" sldId="263"/>
-            <ac:spMk id="15" creationId="{65E2CB8C-5F8F-CA93-F645-ABBFACC2BC17}"/>
-          </ac:spMkLst>
-        </pc:spChg>
-        <pc:spChg chg="add mod topLvl">
-          <ac:chgData name="Ishihara, Keisuke" userId="a9b9c820-5528-48b9-b7c7-a6ab70df1cbd" providerId="ADAL" clId="{CDA48913-D748-6D42-8607-370CBEF7D162}" dt="2024-06-26T13:20:16.167" v="1812" actId="1076"/>
-          <ac:spMkLst>
-            <pc:docMk/>
-            <pc:sldMk cId="3685043916" sldId="263"/>
-            <ac:spMk id="16" creationId="{54E66330-13DE-BBAC-0A6C-1963A6447FBC}"/>
-          </ac:spMkLst>
-        </pc:spChg>
-        <pc:spChg chg="add mod topLvl">
-          <ac:chgData name="Ishihara, Keisuke" userId="a9b9c820-5528-48b9-b7c7-a6ab70df1cbd" providerId="ADAL" clId="{CDA48913-D748-6D42-8607-370CBEF7D162}" dt="2024-06-26T13:20:16.167" v="1812" actId="1076"/>
-          <ac:spMkLst>
-            <pc:docMk/>
-            <pc:sldMk cId="3685043916" sldId="263"/>
-            <ac:spMk id="17" creationId="{A2F7E5E7-0F21-6B8A-AD71-06BA9F8FC83C}"/>
-          </ac:spMkLst>
-        </pc:spChg>
-        <pc:spChg chg="add del mod topLvl">
-          <ac:chgData name="Ishihara, Keisuke" userId="a9b9c820-5528-48b9-b7c7-a6ab70df1cbd" providerId="ADAL" clId="{CDA48913-D748-6D42-8607-370CBEF7D162}" dt="2024-06-26T13:21:56.109" v="1851" actId="478"/>
-          <ac:spMkLst>
-            <pc:docMk/>
-            <pc:sldMk cId="3685043916" sldId="263"/>
-            <ac:spMk id="18" creationId="{95B9902C-715E-B2EA-1C21-71D6EB6150D7}"/>
-          </ac:spMkLst>
-        </pc:spChg>
-        <pc:spChg chg="add del mod topLvl">
-          <ac:chgData name="Ishihara, Keisuke" userId="a9b9c820-5528-48b9-b7c7-a6ab70df1cbd" providerId="ADAL" clId="{CDA48913-D748-6D42-8607-370CBEF7D162}" dt="2024-06-26T13:21:56.109" v="1851" actId="478"/>
-          <ac:spMkLst>
-            <pc:docMk/>
-            <pc:sldMk cId="3685043916" sldId="263"/>
-            <ac:spMk id="19" creationId="{70C007C7-17B9-B644-E900-ACBD2DE9E23F}"/>
-          </ac:spMkLst>
-        </pc:spChg>
-        <pc:spChg chg="add del mod">
-          <ac:chgData name="Ishihara, Keisuke" userId="a9b9c820-5528-48b9-b7c7-a6ab70df1cbd" providerId="ADAL" clId="{CDA48913-D748-6D42-8607-370CBEF7D162}" dt="2024-06-26T13:15:28.835" v="1616" actId="478"/>
-          <ac:spMkLst>
-            <pc:docMk/>
-            <pc:sldMk cId="3685043916" sldId="263"/>
-            <ac:spMk id="21" creationId="{D9672115-7BCC-3E65-D579-B3789FEC4C9D}"/>
-          </ac:spMkLst>
-        </pc:spChg>
-        <pc:spChg chg="add mod">
-          <ac:chgData name="Ishihara, Keisuke" userId="a9b9c820-5528-48b9-b7c7-a6ab70df1cbd" providerId="ADAL" clId="{CDA48913-D748-6D42-8607-370CBEF7D162}" dt="2024-06-26T13:19:51.189" v="1806" actId="404"/>
-          <ac:spMkLst>
-            <pc:docMk/>
-            <pc:sldMk cId="3685043916" sldId="263"/>
-            <ac:spMk id="22" creationId="{9999D3B9-3B4F-5E7A-C7EF-9663CF9412E6}"/>
-          </ac:spMkLst>
-        </pc:spChg>
-        <pc:spChg chg="add del mod">
-          <ac:chgData name="Ishihara, Keisuke" userId="a9b9c820-5528-48b9-b7c7-a6ab70df1cbd" providerId="ADAL" clId="{CDA48913-D748-6D42-8607-370CBEF7D162}" dt="2024-06-26T13:21:51.204" v="1850" actId="478"/>
-          <ac:spMkLst>
-            <pc:docMk/>
-            <pc:sldMk cId="3685043916" sldId="263"/>
-            <ac:spMk id="23" creationId="{FCC2FF63-5C0E-F7DE-25D9-359C8CEE05C9}"/>
-          </ac:spMkLst>
-        </pc:spChg>
-        <pc:spChg chg="add del mod">
-          <ac:chgData name="Ishihara, Keisuke" userId="a9b9c820-5528-48b9-b7c7-a6ab70df1cbd" providerId="ADAL" clId="{CDA48913-D748-6D42-8607-370CBEF7D162}" dt="2024-06-26T13:22:44.666" v="1930" actId="21"/>
-          <ac:spMkLst>
-            <pc:docMk/>
-            <pc:sldMk cId="3685043916" sldId="263"/>
-            <ac:spMk id="24" creationId="{44761F10-2810-1E1F-033B-B3423178B69A}"/>
-          </ac:spMkLst>
-        </pc:spChg>
-        <pc:spChg chg="add mod">
-          <ac:chgData name="Ishihara, Keisuke" userId="a9b9c820-5528-48b9-b7c7-a6ab70df1cbd" providerId="ADAL" clId="{CDA48913-D748-6D42-8607-370CBEF7D162}" dt="2024-06-26T13:20:56.869" v="1829" actId="1076"/>
-          <ac:spMkLst>
-            <pc:docMk/>
-            <pc:sldMk cId="3685043916" sldId="263"/>
-            <ac:spMk id="25" creationId="{6830B1AE-F0DE-CEC9-5DA3-411CCFA766CF}"/>
-          </ac:spMkLst>
-        </pc:spChg>
-        <pc:spChg chg="add mod">
-          <ac:chgData name="Ishihara, Keisuke" userId="a9b9c820-5528-48b9-b7c7-a6ab70df1cbd" providerId="ADAL" clId="{CDA48913-D748-6D42-8607-370CBEF7D162}" dt="2024-06-26T13:21:02.660" v="1836" actId="20577"/>
-          <ac:spMkLst>
-            <pc:docMk/>
-            <pc:sldMk cId="3685043916" sldId="263"/>
-            <ac:spMk id="26" creationId="{04A43354-5EB5-D7F4-7B51-290A6809A55B}"/>
-          </ac:spMkLst>
-        </pc:spChg>
-        <pc:spChg chg="add del mod">
-          <ac:chgData name="Ishihara, Keisuke" userId="a9b9c820-5528-48b9-b7c7-a6ab70df1cbd" providerId="ADAL" clId="{CDA48913-D748-6D42-8607-370CBEF7D162}" dt="2024-06-26T13:21:51.204" v="1850" actId="478"/>
-          <ac:spMkLst>
-            <pc:docMk/>
-            <pc:sldMk cId="3685043916" sldId="263"/>
-            <ac:spMk id="27" creationId="{F1FBFA94-B1EB-E461-7294-4A9F931C9E06}"/>
-          </ac:spMkLst>
-        </pc:spChg>
-        <pc:spChg chg="add del mod">
-          <ac:chgData name="Ishihara, Keisuke" userId="a9b9c820-5528-48b9-b7c7-a6ab70df1cbd" providerId="ADAL" clId="{CDA48913-D748-6D42-8607-370CBEF7D162}" dt="2024-06-26T13:21:51.204" v="1850" actId="478"/>
-          <ac:spMkLst>
-            <pc:docMk/>
-            <pc:sldMk cId="3685043916" sldId="263"/>
-            <ac:spMk id="28" creationId="{F0E9EC61-B563-A6B3-B8BD-AE14E4420DA7}"/>
-          </ac:spMkLst>
-        </pc:spChg>
-        <pc:spChg chg="add del mod">
-          <ac:chgData name="Ishihara, Keisuke" userId="a9b9c820-5528-48b9-b7c7-a6ab70df1cbd" providerId="ADAL" clId="{CDA48913-D748-6D42-8607-370CBEF7D162}" dt="2024-06-26T13:22:44.666" v="1930" actId="21"/>
-          <ac:spMkLst>
-            <pc:docMk/>
-            <pc:sldMk cId="3685043916" sldId="263"/>
-            <ac:spMk id="30" creationId="{E1F274EF-C05A-802E-7C87-F5F155C1FEBD}"/>
-          </ac:spMkLst>
-        </pc:spChg>
-        <pc:spChg chg="add mod">
-          <ac:chgData name="Ishihara, Keisuke" userId="a9b9c820-5528-48b9-b7c7-a6ab70df1cbd" providerId="ADAL" clId="{CDA48913-D748-6D42-8607-370CBEF7D162}" dt="2024-06-26T13:24:07.323" v="1956" actId="1076"/>
-          <ac:spMkLst>
-            <pc:docMk/>
-            <pc:sldMk cId="3685043916" sldId="263"/>
-            <ac:spMk id="31" creationId="{36408CC1-37D8-E4BB-5394-29CC08842FDC}"/>
-          </ac:spMkLst>
-        </pc:spChg>
-        <pc:spChg chg="add mod">
-          <ac:chgData name="Ishihara, Keisuke" userId="a9b9c820-5528-48b9-b7c7-a6ab70df1cbd" providerId="ADAL" clId="{CDA48913-D748-6D42-8607-370CBEF7D162}" dt="2024-06-26T13:24:04.718" v="1955" actId="554"/>
-          <ac:spMkLst>
-            <pc:docMk/>
-            <pc:sldMk cId="3685043916" sldId="263"/>
-            <ac:spMk id="32" creationId="{2CE9730B-E938-E2F0-4FC0-120E6C6CC470}"/>
-          </ac:spMkLst>
-        </pc:spChg>
-        <pc:spChg chg="add mod">
-          <ac:chgData name="Ishihara, Keisuke" userId="a9b9c820-5528-48b9-b7c7-a6ab70df1cbd" providerId="ADAL" clId="{CDA48913-D748-6D42-8607-370CBEF7D162}" dt="2024-06-26T13:23:57.565" v="1953" actId="1076"/>
-          <ac:spMkLst>
-            <pc:docMk/>
-            <pc:sldMk cId="3685043916" sldId="263"/>
-            <ac:spMk id="33" creationId="{1A23D81A-9175-D815-E3BE-70EF75DD8239}"/>
-          </ac:spMkLst>
-        </pc:spChg>
-        <pc:grpChg chg="add del mod">
-          <ac:chgData name="Ishihara, Keisuke" userId="a9b9c820-5528-48b9-b7c7-a6ab70df1cbd" providerId="ADAL" clId="{CDA48913-D748-6D42-8607-370CBEF7D162}" dt="2024-06-26T13:20:05.130" v="1810" actId="165"/>
-          <ac:grpSpMkLst>
-            <pc:docMk/>
-            <pc:sldMk cId="3685043916" sldId="263"/>
-            <ac:grpSpMk id="20" creationId="{5A33AD7A-9720-51D9-AFB8-BACF887E905E}"/>
-          </ac:grpSpMkLst>
-        </pc:grpChg>
-        <pc:picChg chg="add del mod">
-          <ac:chgData name="Ishihara, Keisuke" userId="a9b9c820-5528-48b9-b7c7-a6ab70df1cbd" providerId="ADAL" clId="{CDA48913-D748-6D42-8607-370CBEF7D162}" dt="2024-06-26T12:28:25.623" v="1209" actId="478"/>
-          <ac:picMkLst>
-            <pc:docMk/>
-            <pc:sldMk cId="3685043916" sldId="263"/>
-            <ac:picMk id="4" creationId="{678DA5BD-EFCC-B6E3-B5C9-4C5FB4D489A8}"/>
-          </ac:picMkLst>
-        </pc:picChg>
-        <pc:picChg chg="add del mod">
-          <ac:chgData name="Ishihara, Keisuke" userId="a9b9c820-5528-48b9-b7c7-a6ab70df1cbd" providerId="ADAL" clId="{CDA48913-D748-6D42-8607-370CBEF7D162}" dt="2024-06-26T12:28:23.848" v="1208" actId="478"/>
-          <ac:picMkLst>
-            <pc:docMk/>
-            <pc:sldMk cId="3685043916" sldId="263"/>
-            <ac:picMk id="5" creationId="{63468A29-B40C-CE37-3EEA-75A5968822DC}"/>
-          </ac:picMkLst>
-        </pc:picChg>
-        <pc:picChg chg="add del mod">
-          <ac:chgData name="Ishihara, Keisuke" userId="a9b9c820-5528-48b9-b7c7-a6ab70df1cbd" providerId="ADAL" clId="{CDA48913-D748-6D42-8607-370CBEF7D162}" dt="2024-06-26T13:07:51.441" v="1331" actId="478"/>
-          <ac:picMkLst>
-            <pc:docMk/>
-            <pc:sldMk cId="3685043916" sldId="263"/>
-            <ac:picMk id="7" creationId="{D5BED78D-56CC-DF16-1D1A-BF6D2D6E22F0}"/>
-          </ac:picMkLst>
-        </pc:picChg>
-      </pc:sldChg>
-      <pc:sldChg chg="modSp add mod">
-        <pc:chgData name="Ishihara, Keisuke" userId="a9b9c820-5528-48b9-b7c7-a6ab70df1cbd" providerId="ADAL" clId="{CDA48913-D748-6D42-8607-370CBEF7D162}" dt="2024-06-25T17:30:17.217" v="1073" actId="20577"/>
-        <pc:sldMkLst>
-          <pc:docMk/>
-          <pc:sldMk cId="3659151056" sldId="264"/>
-        </pc:sldMkLst>
-        <pc:spChg chg="mod">
-          <ac:chgData name="Ishihara, Keisuke" userId="a9b9c820-5528-48b9-b7c7-a6ab70df1cbd" providerId="ADAL" clId="{CDA48913-D748-6D42-8607-370CBEF7D162}" dt="2024-06-25T17:30:17.217" v="1073" actId="20577"/>
-          <ac:spMkLst>
-            <pc:docMk/>
-            <pc:sldMk cId="3659151056" sldId="264"/>
-            <ac:spMk id="2" creationId="{052061DB-BC45-E25C-A798-4FA005192E21}"/>
-          </ac:spMkLst>
-        </pc:spChg>
-      </pc:sldChg>
-      <pc:sldChg chg="addSp delSp modSp new mod modAnim">
-        <pc:chgData name="Ishihara, Keisuke" userId="a9b9c820-5528-48b9-b7c7-a6ab70df1cbd" providerId="ADAL" clId="{CDA48913-D748-6D42-8607-370CBEF7D162}" dt="2024-06-25T21:31:27.012" v="1199" actId="1076"/>
-        <pc:sldMkLst>
-          <pc:docMk/>
-          <pc:sldMk cId="517770189" sldId="265"/>
-        </pc:sldMkLst>
-        <pc:spChg chg="del">
-          <ac:chgData name="Ishihara, Keisuke" userId="a9b9c820-5528-48b9-b7c7-a6ab70df1cbd" providerId="ADAL" clId="{CDA48913-D748-6D42-8607-370CBEF7D162}" dt="2024-06-25T21:30:45.269" v="1137" actId="478"/>
-          <ac:spMkLst>
-            <pc:docMk/>
-            <pc:sldMk cId="517770189" sldId="265"/>
-            <ac:spMk id="2" creationId="{27615D65-0D2D-76FE-A292-957F1EE28FE4}"/>
-          </ac:spMkLst>
-        </pc:spChg>
-        <pc:spChg chg="del">
-          <ac:chgData name="Ishihara, Keisuke" userId="a9b9c820-5528-48b9-b7c7-a6ab70df1cbd" providerId="ADAL" clId="{CDA48913-D748-6D42-8607-370CBEF7D162}" dt="2024-06-25T21:27:05.834" v="1075" actId="478"/>
-          <ac:spMkLst>
-            <pc:docMk/>
-            <pc:sldMk cId="517770189" sldId="265"/>
-            <ac:spMk id="3" creationId="{A88A0428-A443-6A65-D11B-2D6DA317743E}"/>
-          </ac:spMkLst>
-        </pc:spChg>
-        <pc:spChg chg="add mod">
-          <ac:chgData name="Ishihara, Keisuke" userId="a9b9c820-5528-48b9-b7c7-a6ab70df1cbd" providerId="ADAL" clId="{CDA48913-D748-6D42-8607-370CBEF7D162}" dt="2024-06-25T21:28:32.477" v="1094" actId="1076"/>
-          <ac:spMkLst>
-            <pc:docMk/>
-            <pc:sldMk cId="517770189" sldId="265"/>
-            <ac:spMk id="5" creationId="{6D77F1FC-67C4-EF53-CEFD-1E6A88E68553}"/>
-          </ac:spMkLst>
-        </pc:spChg>
-        <pc:spChg chg="add del mod">
-          <ac:chgData name="Ishihara, Keisuke" userId="a9b9c820-5528-48b9-b7c7-a6ab70df1cbd" providerId="ADAL" clId="{CDA48913-D748-6D42-8607-370CBEF7D162}" dt="2024-06-25T21:29:47.130" v="1109" actId="478"/>
-          <ac:spMkLst>
-            <pc:docMk/>
-            <pc:sldMk cId="517770189" sldId="265"/>
-            <ac:spMk id="6" creationId="{52641478-DF0C-B69F-8A9C-D4916BB0BE04}"/>
-          </ac:spMkLst>
-        </pc:spChg>
-        <pc:spChg chg="add mod">
-          <ac:chgData name="Ishihara, Keisuke" userId="a9b9c820-5528-48b9-b7c7-a6ab70df1cbd" providerId="ADAL" clId="{CDA48913-D748-6D42-8607-370CBEF7D162}" dt="2024-06-25T21:30:53.159" v="1138" actId="1076"/>
-          <ac:spMkLst>
-            <pc:docMk/>
-            <pc:sldMk cId="517770189" sldId="265"/>
-            <ac:spMk id="7" creationId="{376621A0-E4F7-1041-E8CF-827D7A9F17C6}"/>
-          </ac:spMkLst>
-        </pc:spChg>
-        <pc:spChg chg="add mod">
-          <ac:chgData name="Ishihara, Keisuke" userId="a9b9c820-5528-48b9-b7c7-a6ab70df1cbd" providerId="ADAL" clId="{CDA48913-D748-6D42-8607-370CBEF7D162}" dt="2024-06-25T21:30:53.159" v="1138" actId="1076"/>
-          <ac:spMkLst>
-            <pc:docMk/>
-            <pc:sldMk cId="517770189" sldId="265"/>
-            <ac:spMk id="8" creationId="{DFB9B672-4BE8-E8BF-B9A6-C73B48720F91}"/>
-          </ac:spMkLst>
-        </pc:spChg>
-        <pc:spChg chg="add mod">
-          <ac:chgData name="Ishihara, Keisuke" userId="a9b9c820-5528-48b9-b7c7-a6ab70df1cbd" providerId="ADAL" clId="{CDA48913-D748-6D42-8607-370CBEF7D162}" dt="2024-06-25T21:31:27.012" v="1199" actId="1076"/>
-          <ac:spMkLst>
-            <pc:docMk/>
-            <pc:sldMk cId="517770189" sldId="265"/>
-            <ac:spMk id="9" creationId="{39D3D929-0BCA-6AA2-02A1-F1FE698E8032}"/>
-          </ac:spMkLst>
-        </pc:spChg>
-        <pc:picChg chg="add mod">
-          <ac:chgData name="Ishihara, Keisuke" userId="a9b9c820-5528-48b9-b7c7-a6ab70df1cbd" providerId="ADAL" clId="{CDA48913-D748-6D42-8607-370CBEF7D162}" dt="2024-06-25T21:30:53.159" v="1138" actId="1076"/>
-          <ac:picMkLst>
-            <pc:docMk/>
-            <pc:sldMk cId="517770189" sldId="265"/>
-            <ac:picMk id="1026" creationId="{42A11DEB-4488-E572-B26A-84C1C57B0FB8}"/>
-          </ac:picMkLst>
-        </pc:picChg>
-      </pc:sldChg>
-      <pc:sldChg chg="addSp delSp modSp add mod">
-        <pc:chgData name="Ishihara, Keisuke" userId="a9b9c820-5528-48b9-b7c7-a6ab70df1cbd" providerId="ADAL" clId="{CDA48913-D748-6D42-8607-370CBEF7D162}" dt="2024-06-26T13:22:48.680" v="1932"/>
-        <pc:sldMkLst>
-          <pc:docMk/>
-          <pc:sldMk cId="185672550" sldId="266"/>
-        </pc:sldMkLst>
-        <pc:spChg chg="add mod">
-          <ac:chgData name="Ishihara, Keisuke" userId="a9b9c820-5528-48b9-b7c7-a6ab70df1cbd" providerId="ADAL" clId="{CDA48913-D748-6D42-8607-370CBEF7D162}" dt="2024-06-26T13:22:34.038" v="1925"/>
-          <ac:spMkLst>
-            <pc:docMk/>
-            <pc:sldMk cId="185672550" sldId="266"/>
-            <ac:spMk id="2" creationId="{D9B04FE4-2528-6C2F-19F7-2D01A6C4855B}"/>
-          </ac:spMkLst>
-        </pc:spChg>
-        <pc:spChg chg="add del mod">
-          <ac:chgData name="Ishihara, Keisuke" userId="a9b9c820-5528-48b9-b7c7-a6ab70df1cbd" providerId="ADAL" clId="{CDA48913-D748-6D42-8607-370CBEF7D162}" dt="2024-06-26T13:22:38.863" v="1928" actId="478"/>
-          <ac:spMkLst>
-            <pc:docMk/>
-            <pc:sldMk cId="185672550" sldId="266"/>
-            <ac:spMk id="4" creationId="{AA3BFB1A-5C1B-1060-AA57-A754B619D909}"/>
-          </ac:spMkLst>
-        </pc:spChg>
-        <pc:spChg chg="add del mod">
-          <ac:chgData name="Ishihara, Keisuke" userId="a9b9c820-5528-48b9-b7c7-a6ab70df1cbd" providerId="ADAL" clId="{CDA48913-D748-6D42-8607-370CBEF7D162}" dt="2024-06-26T13:22:48.255" v="1931" actId="478"/>
-          <ac:spMkLst>
-            <pc:docMk/>
-            <pc:sldMk cId="185672550" sldId="266"/>
-            <ac:spMk id="5" creationId="{82EE740E-CC42-1DA6-04F3-FC16ACF322E5}"/>
-          </ac:spMkLst>
-        </pc:spChg>
-        <pc:spChg chg="add mod">
-          <ac:chgData name="Ishihara, Keisuke" userId="a9b9c820-5528-48b9-b7c7-a6ab70df1cbd" providerId="ADAL" clId="{CDA48913-D748-6D42-8607-370CBEF7D162}" dt="2024-06-26T13:22:48.680" v="1932"/>
-          <ac:spMkLst>
-            <pc:docMk/>
-            <pc:sldMk cId="185672550" sldId="266"/>
-            <ac:spMk id="6" creationId="{92FE2944-C956-978C-3EC2-5F802151FD4D}"/>
-          </ac:spMkLst>
-        </pc:spChg>
-        <pc:spChg chg="del">
-          <ac:chgData name="Ishihara, Keisuke" userId="a9b9c820-5528-48b9-b7c7-a6ab70df1cbd" providerId="ADAL" clId="{CDA48913-D748-6D42-8607-370CBEF7D162}" dt="2024-06-26T13:22:36.349" v="1926" actId="478"/>
-          <ac:spMkLst>
-            <pc:docMk/>
-            <pc:sldMk cId="185672550" sldId="266"/>
-            <ac:spMk id="24" creationId="{44761F10-2810-1E1F-033B-B3423178B69A}"/>
-          </ac:spMkLst>
-        </pc:spChg>
-      </pc:sldChg>
-      <pc:sldChg chg="addSp delSp modSp new mod delAnim modAnim">
-        <pc:chgData name="Ishihara, Keisuke" userId="a9b9c820-5528-48b9-b7c7-a6ab70df1cbd" providerId="ADAL" clId="{CDA48913-D748-6D42-8607-370CBEF7D162}" dt="2024-06-26T13:30:56.377" v="2123"/>
-        <pc:sldMkLst>
-          <pc:docMk/>
-          <pc:sldMk cId="2405548140" sldId="267"/>
-        </pc:sldMkLst>
-        <pc:spChg chg="mod">
-          <ac:chgData name="Ishihara, Keisuke" userId="a9b9c820-5528-48b9-b7c7-a6ab70df1cbd" providerId="ADAL" clId="{CDA48913-D748-6D42-8607-370CBEF7D162}" dt="2024-06-26T13:30:04.490" v="2122" actId="404"/>
-          <ac:spMkLst>
-            <pc:docMk/>
-            <pc:sldMk cId="2405548140" sldId="267"/>
-            <ac:spMk id="2" creationId="{C64522BA-38EF-CC24-9435-1A82F05FFCFA}"/>
-          </ac:spMkLst>
-        </pc:spChg>
-        <pc:spChg chg="del">
-          <ac:chgData name="Ishihara, Keisuke" userId="a9b9c820-5528-48b9-b7c7-a6ab70df1cbd" providerId="ADAL" clId="{CDA48913-D748-6D42-8607-370CBEF7D162}" dt="2024-06-26T13:24:51.072" v="1960" actId="478"/>
-          <ac:spMkLst>
-            <pc:docMk/>
-            <pc:sldMk cId="2405548140" sldId="267"/>
-            <ac:spMk id="3" creationId="{94498D75-3608-D534-F68D-CD030E2DB95E}"/>
-          </ac:spMkLst>
-        </pc:spChg>
-        <pc:spChg chg="add del mod">
-          <ac:chgData name="Ishihara, Keisuke" userId="a9b9c820-5528-48b9-b7c7-a6ab70df1cbd" providerId="ADAL" clId="{CDA48913-D748-6D42-8607-370CBEF7D162}" dt="2024-06-26T13:25:03.808" v="1965" actId="478"/>
-          <ac:spMkLst>
-            <pc:docMk/>
-            <pc:sldMk cId="2405548140" sldId="267"/>
-            <ac:spMk id="5" creationId="{1E89EF2C-4F43-0DC2-C0FF-6969A54E360D}"/>
-          </ac:spMkLst>
-        </pc:spChg>
-        <pc:spChg chg="add mod">
-          <ac:chgData name="Ishihara, Keisuke" userId="a9b9c820-5528-48b9-b7c7-a6ab70df1cbd" providerId="ADAL" clId="{CDA48913-D748-6D42-8607-370CBEF7D162}" dt="2024-06-26T13:28:12.057" v="2062" actId="14100"/>
-          <ac:spMkLst>
-            <pc:docMk/>
-            <pc:sldMk cId="2405548140" sldId="267"/>
-            <ac:spMk id="7" creationId="{FD174E58-8587-C289-2552-0C59781825D6}"/>
-          </ac:spMkLst>
-        </pc:spChg>
-        <pc:spChg chg="add mod">
-          <ac:chgData name="Ishihara, Keisuke" userId="a9b9c820-5528-48b9-b7c7-a6ab70df1cbd" providerId="ADAL" clId="{CDA48913-D748-6D42-8607-370CBEF7D162}" dt="2024-06-26T13:27:59.847" v="2056" actId="1076"/>
-          <ac:spMkLst>
-            <pc:docMk/>
-            <pc:sldMk cId="2405548140" sldId="267"/>
-            <ac:spMk id="8" creationId="{6A500637-61D6-7D3B-4B23-8BC17B4E81CE}"/>
-          </ac:spMkLst>
-        </pc:spChg>
-        <pc:spChg chg="add del mod">
-          <ac:chgData name="Ishihara, Keisuke" userId="a9b9c820-5528-48b9-b7c7-a6ab70df1cbd" providerId="ADAL" clId="{CDA48913-D748-6D42-8607-370CBEF7D162}" dt="2024-06-26T13:29:23.290" v="2086" actId="478"/>
-          <ac:spMkLst>
-            <pc:docMk/>
-            <pc:sldMk cId="2405548140" sldId="267"/>
-            <ac:spMk id="9" creationId="{90724E65-7234-0B74-A11D-77D521318F8A}"/>
-          </ac:spMkLst>
-        </pc:spChg>
-        <pc:spChg chg="add mod">
-          <ac:chgData name="Ishihara, Keisuke" userId="a9b9c820-5528-48b9-b7c7-a6ab70df1cbd" providerId="ADAL" clId="{CDA48913-D748-6D42-8607-370CBEF7D162}" dt="2024-06-26T13:29:29.391" v="2089" actId="1076"/>
-          <ac:spMkLst>
-            <pc:docMk/>
-            <pc:sldMk cId="2405548140" sldId="267"/>
-            <ac:spMk id="10" creationId="{26C813B5-E8B9-49CD-9328-BF5F5746A3FA}"/>
-          </ac:spMkLst>
-        </pc:spChg>
-        <pc:spChg chg="add mod">
-          <ac:chgData name="Ishihara, Keisuke" userId="a9b9c820-5528-48b9-b7c7-a6ab70df1cbd" providerId="ADAL" clId="{CDA48913-D748-6D42-8607-370CBEF7D162}" dt="2024-06-26T13:29:38.242" v="2093" actId="1076"/>
-          <ac:spMkLst>
-            <pc:docMk/>
-            <pc:sldMk cId="2405548140" sldId="267"/>
-            <ac:spMk id="14" creationId="{C12A502D-9D4F-5E8C-0F4F-2A8A5E2638BB}"/>
-          </ac:spMkLst>
-        </pc:spChg>
-        <pc:spChg chg="add del mod">
-          <ac:chgData name="Ishihara, Keisuke" userId="a9b9c820-5528-48b9-b7c7-a6ab70df1cbd" providerId="ADAL" clId="{CDA48913-D748-6D42-8607-370CBEF7D162}" dt="2024-06-26T13:29:25.547" v="2088" actId="478"/>
-          <ac:spMkLst>
-            <pc:docMk/>
-            <pc:sldMk cId="2405548140" sldId="267"/>
-            <ac:spMk id="15" creationId="{AC83B0CC-4F8C-6CF8-19A8-348ED694447D}"/>
-          </ac:spMkLst>
-        </pc:spChg>
-        <pc:picChg chg="add del mod">
-          <ac:chgData name="Ishihara, Keisuke" userId="a9b9c820-5528-48b9-b7c7-a6ab70df1cbd" providerId="ADAL" clId="{CDA48913-D748-6D42-8607-370CBEF7D162}" dt="2024-06-26T13:29:23.808" v="2087" actId="478"/>
-          <ac:picMkLst>
-            <pc:docMk/>
-            <pc:sldMk cId="2405548140" sldId="267"/>
-            <ac:picMk id="11" creationId="{4AC11965-F2D3-B191-0F69-5A9F60B6289D}"/>
-          </ac:picMkLst>
-        </pc:picChg>
-        <pc:picChg chg="add mod">
-          <ac:chgData name="Ishihara, Keisuke" userId="a9b9c820-5528-48b9-b7c7-a6ab70df1cbd" providerId="ADAL" clId="{CDA48913-D748-6D42-8607-370CBEF7D162}" dt="2024-06-26T13:29:30.965" v="2090" actId="1076"/>
-          <ac:picMkLst>
-            <pc:docMk/>
-            <pc:sldMk cId="2405548140" sldId="267"/>
-            <ac:picMk id="12" creationId="{C983A59C-4185-294E-B543-8FAA14441060}"/>
-          </ac:picMkLst>
-        </pc:picChg>
-        <pc:picChg chg="add mod">
-          <ac:chgData name="Ishihara, Keisuke" userId="a9b9c820-5528-48b9-b7c7-a6ab70df1cbd" providerId="ADAL" clId="{CDA48913-D748-6D42-8607-370CBEF7D162}" dt="2024-06-26T13:29:32.090" v="2091" actId="1076"/>
-          <ac:picMkLst>
-            <pc:docMk/>
-            <pc:sldMk cId="2405548140" sldId="267"/>
-            <ac:picMk id="13" creationId="{A4F4B4F3-B953-8664-161D-6598673FE5C4}"/>
-          </ac:picMkLst>
-        </pc:picChg>
-        <pc:picChg chg="add mod">
-          <ac:chgData name="Ishihara, Keisuke" userId="a9b9c820-5528-48b9-b7c7-a6ab70df1cbd" providerId="ADAL" clId="{CDA48913-D748-6D42-8607-370CBEF7D162}" dt="2024-06-26T13:27:24.864" v="2030" actId="1076"/>
-          <ac:picMkLst>
-            <pc:docMk/>
-            <pc:sldMk cId="2405548140" sldId="267"/>
-            <ac:picMk id="1026" creationId="{90F5572B-141B-AB38-41A9-0938555C94BA}"/>
-          </ac:picMkLst>
-        </pc:picChg>
-        <pc:picChg chg="add mod">
-          <ac:chgData name="Ishihara, Keisuke" userId="a9b9c820-5528-48b9-b7c7-a6ab70df1cbd" providerId="ADAL" clId="{CDA48913-D748-6D42-8607-370CBEF7D162}" dt="2024-06-26T13:27:58.218" v="2055" actId="1076"/>
-          <ac:picMkLst>
-            <pc:docMk/>
-            <pc:sldMk cId="2405548140" sldId="267"/>
-            <ac:picMk id="1028" creationId="{BFDA6355-139A-5EEE-7F26-C11B2AE23FA0}"/>
-          </ac:picMkLst>
-        </pc:picChg>
-      </pc:sldChg>
-      <pc:sldChg chg="new del">
-        <pc:chgData name="Ishihara, Keisuke" userId="a9b9c820-5528-48b9-b7c7-a6ab70df1cbd" providerId="ADAL" clId="{CDA48913-D748-6D42-8607-370CBEF7D162}" dt="2024-06-26T13:29:48.461" v="2094" actId="2696"/>
-        <pc:sldMkLst>
-          <pc:docMk/>
-          <pc:sldMk cId="978784116" sldId="268"/>
-        </pc:sldMkLst>
-      </pc:sldChg>
-    </pc:docChg>
-  </pc:docChgLst>
-  <pc:docChgLst>
-    <pc:chgData name="Ishihara, Keisuke" userId="S::ishihara@pitt.edu::a9b9c820-5528-48b9-b7c7-a6ab70df1cbd" providerId="AD" clId="Web-{BC8595C3-ADEB-59EB-E51C-25BB33A6AEEF}"/>
-    <pc:docChg chg="addSld modSld">
-      <pc:chgData name="Ishihara, Keisuke" userId="S::ishihara@pitt.edu::a9b9c820-5528-48b9-b7c7-a6ab70df1cbd" providerId="AD" clId="Web-{BC8595C3-ADEB-59EB-E51C-25BB33A6AEEF}" dt="2024-06-12T18:33:29.473" v="285"/>
-      <pc:docMkLst>
-        <pc:docMk/>
-      </pc:docMkLst>
-      <pc:sldChg chg="modSp">
-        <pc:chgData name="Ishihara, Keisuke" userId="S::ishihara@pitt.edu::a9b9c820-5528-48b9-b7c7-a6ab70df1cbd" providerId="AD" clId="Web-{BC8595C3-ADEB-59EB-E51C-25BB33A6AEEF}" dt="2024-06-12T18:20:34.508" v="51" actId="20577"/>
-        <pc:sldMkLst>
-          <pc:docMk/>
-          <pc:sldMk cId="109857222" sldId="256"/>
-        </pc:sldMkLst>
-        <pc:spChg chg="mod">
-          <ac:chgData name="Ishihara, Keisuke" userId="S::ishihara@pitt.edu::a9b9c820-5528-48b9-b7c7-a6ab70df1cbd" providerId="AD" clId="Web-{BC8595C3-ADEB-59EB-E51C-25BB33A6AEEF}" dt="2024-06-12T18:20:34.508" v="51" actId="20577"/>
-          <ac:spMkLst>
-            <pc:docMk/>
-            <pc:sldMk cId="109857222" sldId="256"/>
-            <ac:spMk id="2" creationId="{00000000-0000-0000-0000-000000000000}"/>
-          </ac:spMkLst>
-        </pc:spChg>
-      </pc:sldChg>
-      <pc:sldChg chg="addSp delSp modSp new">
-        <pc:chgData name="Ishihara, Keisuke" userId="S::ishihara@pitt.edu::a9b9c820-5528-48b9-b7c7-a6ab70df1cbd" providerId="AD" clId="Web-{BC8595C3-ADEB-59EB-E51C-25BB33A6AEEF}" dt="2024-06-12T18:25:13.158" v="190" actId="20577"/>
-        <pc:sldMkLst>
-          <pc:docMk/>
-          <pc:sldMk cId="2284061945" sldId="257"/>
-        </pc:sldMkLst>
-        <pc:spChg chg="mod">
-          <ac:chgData name="Ishihara, Keisuke" userId="S::ishihara@pitt.edu::a9b9c820-5528-48b9-b7c7-a6ab70df1cbd" providerId="AD" clId="Web-{BC8595C3-ADEB-59EB-E51C-25BB33A6AEEF}" dt="2024-06-12T18:21:37.572" v="84" actId="20577"/>
-          <ac:spMkLst>
-            <pc:docMk/>
-            <pc:sldMk cId="2284061945" sldId="257"/>
-            <ac:spMk id="2" creationId="{1286E69A-762F-70D2-E627-A5B61FEF0024}"/>
-          </ac:spMkLst>
-        </pc:spChg>
-        <pc:spChg chg="mod">
-          <ac:chgData name="Ishihara, Keisuke" userId="S::ishihara@pitt.edu::a9b9c820-5528-48b9-b7c7-a6ab70df1cbd" providerId="AD" clId="Web-{BC8595C3-ADEB-59EB-E51C-25BB33A6AEEF}" dt="2024-06-12T18:25:13.158" v="190" actId="20577"/>
-          <ac:spMkLst>
-            <pc:docMk/>
-            <pc:sldMk cId="2284061945" sldId="257"/>
-            <ac:spMk id="3" creationId="{02401BAB-9E6E-9E3A-2E33-F03DF7DD928C}"/>
-          </ac:spMkLst>
-        </pc:spChg>
-        <pc:spChg chg="add mod">
-          <ac:chgData name="Ishihara, Keisuke" userId="S::ishihara@pitt.edu::a9b9c820-5528-48b9-b7c7-a6ab70df1cbd" providerId="AD" clId="Web-{BC8595C3-ADEB-59EB-E51C-25BB33A6AEEF}" dt="2024-06-12T18:22:07.620" v="93" actId="1076"/>
-          <ac:spMkLst>
-            <pc:docMk/>
-            <pc:sldMk cId="2284061945" sldId="257"/>
-            <ac:spMk id="4" creationId="{70D9CB0F-BEF1-192F-9232-F54B8F7476A7}"/>
-          </ac:spMkLst>
-        </pc:spChg>
-        <pc:spChg chg="add del">
-          <ac:chgData name="Ishihara, Keisuke" userId="S::ishihara@pitt.edu::a9b9c820-5528-48b9-b7c7-a6ab70df1cbd" providerId="AD" clId="Web-{BC8595C3-ADEB-59EB-E51C-25BB33A6AEEF}" dt="2024-06-12T18:22:20.043" v="95"/>
-          <ac:spMkLst>
-            <pc:docMk/>
-            <pc:sldMk cId="2284061945" sldId="257"/>
-            <ac:spMk id="5" creationId="{2CC5DF77-D6FD-38B4-6271-8F915A876EDC}"/>
-          </ac:spMkLst>
-        </pc:spChg>
-      </pc:sldChg>
-      <pc:sldChg chg="addSp delSp modSp new mod setBg">
-        <pc:chgData name="Ishihara, Keisuke" userId="S::ishihara@pitt.edu::a9b9c820-5528-48b9-b7c7-a6ab70df1cbd" providerId="AD" clId="Web-{BC8595C3-ADEB-59EB-E51C-25BB33A6AEEF}" dt="2024-06-12T18:32:25.392" v="278" actId="1076"/>
-        <pc:sldMkLst>
-          <pc:docMk/>
-          <pc:sldMk cId="1672665746" sldId="258"/>
-        </pc:sldMkLst>
-        <pc:spChg chg="mod ord">
-          <ac:chgData name="Ishihara, Keisuke" userId="S::ishihara@pitt.edu::a9b9c820-5528-48b9-b7c7-a6ab70df1cbd" providerId="AD" clId="Web-{BC8595C3-ADEB-59EB-E51C-25BB33A6AEEF}" dt="2024-06-12T18:32:25.392" v="278" actId="1076"/>
-          <ac:spMkLst>
-            <pc:docMk/>
-            <pc:sldMk cId="1672665746" sldId="258"/>
-            <ac:spMk id="2" creationId="{FE1A3280-9C69-D132-900D-5DD89873BE03}"/>
-          </ac:spMkLst>
-        </pc:spChg>
-        <pc:spChg chg="del">
-          <ac:chgData name="Ishihara, Keisuke" userId="S::ishihara@pitt.edu::a9b9c820-5528-48b9-b7c7-a6ab70df1cbd" providerId="AD" clId="Web-{BC8595C3-ADEB-59EB-E51C-25BB33A6AEEF}" dt="2024-06-12T18:29:24.948" v="223"/>
-          <ac:spMkLst>
-            <pc:docMk/>
-            <pc:sldMk cId="1672665746" sldId="258"/>
-            <ac:spMk id="3" creationId="{90CF94EC-FC11-DDCA-6F82-2B5FA54D249E}"/>
-          </ac:spMkLst>
-        </pc:spChg>
-        <pc:spChg chg="add">
-          <ac:chgData name="Ishihara, Keisuke" userId="S::ishihara@pitt.edu::a9b9c820-5528-48b9-b7c7-a6ab70df1cbd" providerId="AD" clId="Web-{BC8595C3-ADEB-59EB-E51C-25BB33A6AEEF}" dt="2024-06-12T18:30:25.122" v="225"/>
-          <ac:spMkLst>
-            <pc:docMk/>
-            <pc:sldMk cId="1672665746" sldId="258"/>
-            <ac:spMk id="9" creationId="{0671A8AE-40A1-4631-A6B8-581AFF065482}"/>
-          </ac:spMkLst>
-        </pc:spChg>
-        <pc:spChg chg="add">
-          <ac:chgData name="Ishihara, Keisuke" userId="S::ishihara@pitt.edu::a9b9c820-5528-48b9-b7c7-a6ab70df1cbd" providerId="AD" clId="Web-{BC8595C3-ADEB-59EB-E51C-25BB33A6AEEF}" dt="2024-06-12T18:30:25.122" v="225"/>
-          <ac:spMkLst>
-            <pc:docMk/>
-            <pc:sldMk cId="1672665746" sldId="258"/>
-            <ac:spMk id="11" creationId="{AB58EF07-17C2-48CF-ABB0-EEF1F17CB8F0}"/>
-          </ac:spMkLst>
-        </pc:spChg>
-        <pc:spChg chg="add">
-          <ac:chgData name="Ishihara, Keisuke" userId="S::ishihara@pitt.edu::a9b9c820-5528-48b9-b7c7-a6ab70df1cbd" providerId="AD" clId="Web-{BC8595C3-ADEB-59EB-E51C-25BB33A6AEEF}" dt="2024-06-12T18:30:25.122" v="225"/>
-          <ac:spMkLst>
-            <pc:docMk/>
-            <pc:sldMk cId="1672665746" sldId="258"/>
-            <ac:spMk id="13" creationId="{AF2F604E-43BE-4DC3-B983-E071523364F8}"/>
-          </ac:spMkLst>
-        </pc:spChg>
-        <pc:spChg chg="add">
-          <ac:chgData name="Ishihara, Keisuke" userId="S::ishihara@pitt.edu::a9b9c820-5528-48b9-b7c7-a6ab70df1cbd" providerId="AD" clId="Web-{BC8595C3-ADEB-59EB-E51C-25BB33A6AEEF}" dt="2024-06-12T18:30:25.122" v="225"/>
-          <ac:spMkLst>
-            <pc:docMk/>
-            <pc:sldMk cId="1672665746" sldId="258"/>
-            <ac:spMk id="15" creationId="{08C9B587-E65E-4B52-B37C-ABEBB6E87928}"/>
-          </ac:spMkLst>
-        </pc:spChg>
-        <pc:picChg chg="add mod">
-          <ac:chgData name="Ishihara, Keisuke" userId="S::ishihara@pitt.edu::a9b9c820-5528-48b9-b7c7-a6ab70df1cbd" providerId="AD" clId="Web-{BC8595C3-ADEB-59EB-E51C-25BB33A6AEEF}" dt="2024-06-12T18:31:33.984" v="241" actId="1076"/>
-          <ac:picMkLst>
-            <pc:docMk/>
-            <pc:sldMk cId="1672665746" sldId="258"/>
-            <ac:picMk id="4" creationId="{410AB5A0-3C08-E5B8-A5D2-C9CAF22FDB69}"/>
-          </ac:picMkLst>
-        </pc:picChg>
-      </pc:sldChg>
-      <pc:sldChg chg="addSp delSp modSp new">
-        <pc:chgData name="Ishihara, Keisuke" userId="S::ishihara@pitt.edu::a9b9c820-5528-48b9-b7c7-a6ab70df1cbd" providerId="AD" clId="Web-{BC8595C3-ADEB-59EB-E51C-25BB33A6AEEF}" dt="2024-06-12T18:33:29.473" v="285"/>
-        <pc:sldMkLst>
-          <pc:docMk/>
-          <pc:sldMk cId="1534062264" sldId="259"/>
-        </pc:sldMkLst>
-        <pc:spChg chg="del">
-          <ac:chgData name="Ishihara, Keisuke" userId="S::ishihara@pitt.edu::a9b9c820-5528-48b9-b7c7-a6ab70df1cbd" providerId="AD" clId="Web-{BC8595C3-ADEB-59EB-E51C-25BB33A6AEEF}" dt="2024-06-12T18:32:35.721" v="280"/>
-          <ac:spMkLst>
-            <pc:docMk/>
-            <pc:sldMk cId="1534062264" sldId="259"/>
-            <ac:spMk id="3" creationId="{CD23142F-F7A8-52B3-EC64-D1497D48359D}"/>
-          </ac:spMkLst>
-        </pc:spChg>
-        <pc:spChg chg="add del mod">
-          <ac:chgData name="Ishihara, Keisuke" userId="S::ishihara@pitt.edu::a9b9c820-5528-48b9-b7c7-a6ab70df1cbd" providerId="AD" clId="Web-{BC8595C3-ADEB-59EB-E51C-25BB33A6AEEF}" dt="2024-06-12T18:33:06.566" v="283"/>
-          <ac:spMkLst>
-            <pc:docMk/>
-            <pc:sldMk cId="1534062264" sldId="259"/>
-            <ac:spMk id="4" creationId="{6A2A51D6-09C2-DBC4-84B9-E48373BA7D7C}"/>
-          </ac:spMkLst>
-        </pc:spChg>
-        <pc:spChg chg="add mod">
-          <ac:chgData name="Ishihara, Keisuke" userId="S::ishihara@pitt.edu::a9b9c820-5528-48b9-b7c7-a6ab70df1cbd" providerId="AD" clId="Web-{BC8595C3-ADEB-59EB-E51C-25BB33A6AEEF}" dt="2024-06-12T18:33:29.473" v="285"/>
-          <ac:spMkLst>
-            <pc:docMk/>
-            <pc:sldMk cId="1534062264" sldId="259"/>
-            <ac:spMk id="5" creationId="{547A107A-3080-8E81-77C4-BBD295F0071C}"/>
-          </ac:spMkLst>
-        </pc:spChg>
-      </pc:sldChg>
-    </pc:docChg>
-  </pc:docChgLst>
-</pc:chgInfo>
-</file>
-
 <file path=ppt/slideLayouts/slideLayout1.xml><?xml version="1.0" encoding="utf-8"?>
 <p:sldLayout xmlns:a="http://schemas.openxmlformats.org/drawingml/2006/main" xmlns:r="http://schemas.openxmlformats.org/officeDocument/2006/relationships" xmlns:p="http://schemas.openxmlformats.org/presentationml/2006/main" type="title" preserve="1">
   <p:cSld name="Title Slide">
@@ -1508,7 +140,13 @@
       </p:grpSpPr>
       <p:sp>
         <p:nvSpPr>
-          <p:cNvPr id="2" name="Title 1"/>
+          <p:cNvPr id="2" name="Title 1">
+            <a:extLst>
+              <a:ext uri="{FF2B5EF4-FFF2-40B4-BE49-F238E27FC236}">
+                <a16:creationId xmlns:a16="http://schemas.microsoft.com/office/drawing/2014/main" id="{CE7D3828-80FC-FAD3-EB4C-2DBFEF62B0ED}"/>
+              </a:ext>
+            </a:extLst>
+          </p:cNvPr>
           <p:cNvSpPr>
             <a:spLocks noGrp="1"/>
           </p:cNvSpPr>
@@ -1534,13 +172,18 @@
               <a:rPr lang="en-US"/>
               <a:t>Click to edit Master title style</a:t>
             </a:r>
-            <a:endParaRPr lang="en-US" dirty="0"/>
-          </a:p>
-        </p:txBody>
-      </p:sp>
-      <p:sp>
-        <p:nvSpPr>
-          <p:cNvPr id="3" name="Subtitle 2"/>
+          </a:p>
+        </p:txBody>
+      </p:sp>
+      <p:sp>
+        <p:nvSpPr>
+          <p:cNvPr id="3" name="Subtitle 2">
+            <a:extLst>
+              <a:ext uri="{FF2B5EF4-FFF2-40B4-BE49-F238E27FC236}">
+                <a16:creationId xmlns:a16="http://schemas.microsoft.com/office/drawing/2014/main" id="{216058F8-E20C-F2B0-9D73-992AEB24F0F7}"/>
+              </a:ext>
+            </a:extLst>
+          </p:cNvPr>
           <p:cNvSpPr>
             <a:spLocks noGrp="1"/>
           </p:cNvSpPr>
@@ -1599,13 +242,18 @@
               <a:rPr lang="en-US"/>
               <a:t>Click to edit Master subtitle style</a:t>
             </a:r>
-            <a:endParaRPr lang="en-US" dirty="0"/>
-          </a:p>
-        </p:txBody>
-      </p:sp>
-      <p:sp>
-        <p:nvSpPr>
-          <p:cNvPr id="4" name="Date Placeholder 3"/>
+          </a:p>
+        </p:txBody>
+      </p:sp>
+      <p:sp>
+        <p:nvSpPr>
+          <p:cNvPr id="4" name="Date Placeholder 3">
+            <a:extLst>
+              <a:ext uri="{FF2B5EF4-FFF2-40B4-BE49-F238E27FC236}">
+                <a16:creationId xmlns:a16="http://schemas.microsoft.com/office/drawing/2014/main" id="{A7CC33A8-AD8A-B534-0CC5-3553087B1F11}"/>
+              </a:ext>
+            </a:extLst>
+          </p:cNvPr>
           <p:cNvSpPr>
             <a:spLocks noGrp="1"/>
           </p:cNvSpPr>
@@ -1618,9 +266,9 @@
           <a:bodyPr/>
           <a:lstStyle/>
           <a:p>
-            <a:fld id="{846CE7D5-CF57-46EF-B807-FDD0502418D4}" type="datetimeFigureOut">
+            <a:fld id="{4B95EF0B-55D9-2B4C-901E-7633B195A9DA}" type="datetimeFigureOut">
               <a:rPr lang="en-US" smtClean="0"/>
-              <a:t>6/26/24</a:t>
+              <a:t>6/24/26</a:t>
             </a:fld>
             <a:endParaRPr lang="en-US"/>
           </a:p>
@@ -1628,7 +276,13 @@
       </p:sp>
       <p:sp>
         <p:nvSpPr>
-          <p:cNvPr id="5" name="Footer Placeholder 4"/>
+          <p:cNvPr id="5" name="Footer Placeholder 4">
+            <a:extLst>
+              <a:ext uri="{FF2B5EF4-FFF2-40B4-BE49-F238E27FC236}">
+                <a16:creationId xmlns:a16="http://schemas.microsoft.com/office/drawing/2014/main" id="{EE1E4CFF-4954-9DDA-D473-6DBF400A6FA2}"/>
+              </a:ext>
+            </a:extLst>
+          </p:cNvPr>
           <p:cNvSpPr>
             <a:spLocks noGrp="1"/>
           </p:cNvSpPr>
@@ -1647,7 +301,13 @@
       </p:sp>
       <p:sp>
         <p:nvSpPr>
-          <p:cNvPr id="6" name="Slide Number Placeholder 5"/>
+          <p:cNvPr id="6" name="Slide Number Placeholder 5">
+            <a:extLst>
+              <a:ext uri="{FF2B5EF4-FFF2-40B4-BE49-F238E27FC236}">
+                <a16:creationId xmlns:a16="http://schemas.microsoft.com/office/drawing/2014/main" id="{E568DCF4-1067-383A-4AD0-493187306F90}"/>
+              </a:ext>
+            </a:extLst>
+          </p:cNvPr>
           <p:cNvSpPr>
             <a:spLocks noGrp="1"/>
           </p:cNvSpPr>
@@ -1660,7 +320,7 @@
           <a:bodyPr/>
           <a:lstStyle/>
           <a:p>
-            <a:fld id="{330EA680-D336-4FF7-8B7A-9848BB0A1C32}" type="slidenum">
+            <a:fld id="{48AF8FE1-0F10-154F-BA00-CFE3A1619C85}" type="slidenum">
               <a:rPr lang="en-US" smtClean="0"/>
               <a:t>‹#›</a:t>
             </a:fld>
@@ -1671,7 +331,7 @@
     </p:spTree>
     <p:extLst>
       <p:ext uri="{BB962C8B-B14F-4D97-AF65-F5344CB8AC3E}">
-        <p14:creationId xmlns:p14="http://schemas.microsoft.com/office/powerpoint/2010/main" val="2385387890"/>
+        <p14:creationId xmlns:p14="http://schemas.microsoft.com/office/powerpoint/2010/main" val="1833726725"/>
       </p:ext>
     </p:extLst>
   </p:cSld>
@@ -1700,7 +360,13 @@
       </p:grpSpPr>
       <p:sp>
         <p:nvSpPr>
-          <p:cNvPr id="2" name="Title 1"/>
+          <p:cNvPr id="2" name="Title 1">
+            <a:extLst>
+              <a:ext uri="{FF2B5EF4-FFF2-40B4-BE49-F238E27FC236}">
+                <a16:creationId xmlns:a16="http://schemas.microsoft.com/office/drawing/2014/main" id="{1FC81A3B-E7AA-01BC-6AE1-D1620C27F880}"/>
+              </a:ext>
+            </a:extLst>
+          </p:cNvPr>
           <p:cNvSpPr>
             <a:spLocks noGrp="1"/>
           </p:cNvSpPr>
@@ -1717,13 +383,18 @@
               <a:rPr lang="en-US"/>
               <a:t>Click to edit Master title style</a:t>
             </a:r>
-            <a:endParaRPr lang="en-US" dirty="0"/>
-          </a:p>
-        </p:txBody>
-      </p:sp>
-      <p:sp>
-        <p:nvSpPr>
-          <p:cNvPr id="3" name="Vertical Text Placeholder 2"/>
+          </a:p>
+        </p:txBody>
+      </p:sp>
+      <p:sp>
+        <p:nvSpPr>
+          <p:cNvPr id="3" name="Vertical Text Placeholder 2">
+            <a:extLst>
+              <a:ext uri="{FF2B5EF4-FFF2-40B4-BE49-F238E27FC236}">
+                <a16:creationId xmlns:a16="http://schemas.microsoft.com/office/drawing/2014/main" id="{C477B71A-8181-6774-9E1E-518F9780807A}"/>
+              </a:ext>
+            </a:extLst>
+          </p:cNvPr>
           <p:cNvSpPr>
             <a:spLocks noGrp="1"/>
           </p:cNvSpPr>
@@ -1769,13 +440,18 @@
               <a:rPr lang="en-US"/>
               <a:t>Fifth level</a:t>
             </a:r>
-            <a:endParaRPr lang="en-US" dirty="0"/>
-          </a:p>
-        </p:txBody>
-      </p:sp>
-      <p:sp>
-        <p:nvSpPr>
-          <p:cNvPr id="4" name="Date Placeholder 3"/>
+          </a:p>
+        </p:txBody>
+      </p:sp>
+      <p:sp>
+        <p:nvSpPr>
+          <p:cNvPr id="4" name="Date Placeholder 3">
+            <a:extLst>
+              <a:ext uri="{FF2B5EF4-FFF2-40B4-BE49-F238E27FC236}">
+                <a16:creationId xmlns:a16="http://schemas.microsoft.com/office/drawing/2014/main" id="{F22A4B11-1AC2-2B42-215A-B46E54CB7161}"/>
+              </a:ext>
+            </a:extLst>
+          </p:cNvPr>
           <p:cNvSpPr>
             <a:spLocks noGrp="1"/>
           </p:cNvSpPr>
@@ -1788,9 +464,9 @@
           <a:bodyPr/>
           <a:lstStyle/>
           <a:p>
-            <a:fld id="{846CE7D5-CF57-46EF-B807-FDD0502418D4}" type="datetimeFigureOut">
+            <a:fld id="{4B95EF0B-55D9-2B4C-901E-7633B195A9DA}" type="datetimeFigureOut">
               <a:rPr lang="en-US" smtClean="0"/>
-              <a:t>6/26/24</a:t>
+              <a:t>6/24/26</a:t>
             </a:fld>
             <a:endParaRPr lang="en-US"/>
           </a:p>
@@ -1798,7 +474,13 @@
       </p:sp>
       <p:sp>
         <p:nvSpPr>
-          <p:cNvPr id="5" name="Footer Placeholder 4"/>
+          <p:cNvPr id="5" name="Footer Placeholder 4">
+            <a:extLst>
+              <a:ext uri="{FF2B5EF4-FFF2-40B4-BE49-F238E27FC236}">
+                <a16:creationId xmlns:a16="http://schemas.microsoft.com/office/drawing/2014/main" id="{EFAED7CD-8100-AA1F-2A61-9890F56FAC2E}"/>
+              </a:ext>
+            </a:extLst>
+          </p:cNvPr>
           <p:cNvSpPr>
             <a:spLocks noGrp="1"/>
           </p:cNvSpPr>
@@ -1817,7 +499,13 @@
       </p:sp>
       <p:sp>
         <p:nvSpPr>
-          <p:cNvPr id="6" name="Slide Number Placeholder 5"/>
+          <p:cNvPr id="6" name="Slide Number Placeholder 5">
+            <a:extLst>
+              <a:ext uri="{FF2B5EF4-FFF2-40B4-BE49-F238E27FC236}">
+                <a16:creationId xmlns:a16="http://schemas.microsoft.com/office/drawing/2014/main" id="{B5EFD5C7-30C1-B44B-F7DD-A3EC23B15839}"/>
+              </a:ext>
+            </a:extLst>
+          </p:cNvPr>
           <p:cNvSpPr>
             <a:spLocks noGrp="1"/>
           </p:cNvSpPr>
@@ -1830,7 +518,7 @@
           <a:bodyPr/>
           <a:lstStyle/>
           <a:p>
-            <a:fld id="{330EA680-D336-4FF7-8B7A-9848BB0A1C32}" type="slidenum">
+            <a:fld id="{48AF8FE1-0F10-154F-BA00-CFE3A1619C85}" type="slidenum">
               <a:rPr lang="en-US" smtClean="0"/>
               <a:t>‹#›</a:t>
             </a:fld>
@@ -1841,7 +529,7 @@
     </p:spTree>
     <p:extLst>
       <p:ext uri="{BB962C8B-B14F-4D97-AF65-F5344CB8AC3E}">
-        <p14:creationId xmlns:p14="http://schemas.microsoft.com/office/powerpoint/2010/main" val="2202905451"/>
+        <p14:creationId xmlns:p14="http://schemas.microsoft.com/office/powerpoint/2010/main" val="1050661123"/>
       </p:ext>
     </p:extLst>
   </p:cSld>
@@ -1870,7 +558,13 @@
       </p:grpSpPr>
       <p:sp>
         <p:nvSpPr>
-          <p:cNvPr id="2" name="Vertical Title 1"/>
+          <p:cNvPr id="2" name="Vertical Title 1">
+            <a:extLst>
+              <a:ext uri="{FF2B5EF4-FFF2-40B4-BE49-F238E27FC236}">
+                <a16:creationId xmlns:a16="http://schemas.microsoft.com/office/drawing/2014/main" id="{F4A0F2EA-F32D-E291-7CF9-8DFEA3F9547E}"/>
+              </a:ext>
+            </a:extLst>
+          </p:cNvPr>
           <p:cNvSpPr>
             <a:spLocks noGrp="1"/>
           </p:cNvSpPr>
@@ -1892,13 +586,18 @@
               <a:rPr lang="en-US"/>
               <a:t>Click to edit Master title style</a:t>
             </a:r>
-            <a:endParaRPr lang="en-US" dirty="0"/>
-          </a:p>
-        </p:txBody>
-      </p:sp>
-      <p:sp>
-        <p:nvSpPr>
-          <p:cNvPr id="3" name="Vertical Text Placeholder 2"/>
+          </a:p>
+        </p:txBody>
+      </p:sp>
+      <p:sp>
+        <p:nvSpPr>
+          <p:cNvPr id="3" name="Vertical Text Placeholder 2">
+            <a:extLst>
+              <a:ext uri="{FF2B5EF4-FFF2-40B4-BE49-F238E27FC236}">
+                <a16:creationId xmlns:a16="http://schemas.microsoft.com/office/drawing/2014/main" id="{2112BDFB-F83E-D281-3DA3-D5F319545AB1}"/>
+              </a:ext>
+            </a:extLst>
+          </p:cNvPr>
           <p:cNvSpPr>
             <a:spLocks noGrp="1"/>
           </p:cNvSpPr>
@@ -1949,13 +648,18 @@
               <a:rPr lang="en-US"/>
               <a:t>Fifth level</a:t>
             </a:r>
-            <a:endParaRPr lang="en-US" dirty="0"/>
-          </a:p>
-        </p:txBody>
-      </p:sp>
-      <p:sp>
-        <p:nvSpPr>
-          <p:cNvPr id="4" name="Date Placeholder 3"/>
+          </a:p>
+        </p:txBody>
+      </p:sp>
+      <p:sp>
+        <p:nvSpPr>
+          <p:cNvPr id="4" name="Date Placeholder 3">
+            <a:extLst>
+              <a:ext uri="{FF2B5EF4-FFF2-40B4-BE49-F238E27FC236}">
+                <a16:creationId xmlns:a16="http://schemas.microsoft.com/office/drawing/2014/main" id="{A28A9A89-4983-8286-2625-763351382A53}"/>
+              </a:ext>
+            </a:extLst>
+          </p:cNvPr>
           <p:cNvSpPr>
             <a:spLocks noGrp="1"/>
           </p:cNvSpPr>
@@ -1968,9 +672,9 @@
           <a:bodyPr/>
           <a:lstStyle/>
           <a:p>
-            <a:fld id="{846CE7D5-CF57-46EF-B807-FDD0502418D4}" type="datetimeFigureOut">
+            <a:fld id="{4B95EF0B-55D9-2B4C-901E-7633B195A9DA}" type="datetimeFigureOut">
               <a:rPr lang="en-US" smtClean="0"/>
-              <a:t>6/26/24</a:t>
+              <a:t>6/24/26</a:t>
             </a:fld>
             <a:endParaRPr lang="en-US"/>
           </a:p>
@@ -1978,7 +682,13 @@
       </p:sp>
       <p:sp>
         <p:nvSpPr>
-          <p:cNvPr id="5" name="Footer Placeholder 4"/>
+          <p:cNvPr id="5" name="Footer Placeholder 4">
+            <a:extLst>
+              <a:ext uri="{FF2B5EF4-FFF2-40B4-BE49-F238E27FC236}">
+                <a16:creationId xmlns:a16="http://schemas.microsoft.com/office/drawing/2014/main" id="{34446D6D-17B8-7E8D-9124-7C2803933C4E}"/>
+              </a:ext>
+            </a:extLst>
+          </p:cNvPr>
           <p:cNvSpPr>
             <a:spLocks noGrp="1"/>
           </p:cNvSpPr>
@@ -1997,7 +707,13 @@
       </p:sp>
       <p:sp>
         <p:nvSpPr>
-          <p:cNvPr id="6" name="Slide Number Placeholder 5"/>
+          <p:cNvPr id="6" name="Slide Number Placeholder 5">
+            <a:extLst>
+              <a:ext uri="{FF2B5EF4-FFF2-40B4-BE49-F238E27FC236}">
+                <a16:creationId xmlns:a16="http://schemas.microsoft.com/office/drawing/2014/main" id="{1BE6B2D9-5B2A-14D8-2195-BC49A8CC36CD}"/>
+              </a:ext>
+            </a:extLst>
+          </p:cNvPr>
           <p:cNvSpPr>
             <a:spLocks noGrp="1"/>
           </p:cNvSpPr>
@@ -2010,7 +726,7 @@
           <a:bodyPr/>
           <a:lstStyle/>
           <a:p>
-            <a:fld id="{330EA680-D336-4FF7-8B7A-9848BB0A1C32}" type="slidenum">
+            <a:fld id="{48AF8FE1-0F10-154F-BA00-CFE3A1619C85}" type="slidenum">
               <a:rPr lang="en-US" smtClean="0"/>
               <a:t>‹#›</a:t>
             </a:fld>
@@ -2021,7 +737,7 @@
     </p:spTree>
     <p:extLst>
       <p:ext uri="{BB962C8B-B14F-4D97-AF65-F5344CB8AC3E}">
-        <p14:creationId xmlns:p14="http://schemas.microsoft.com/office/powerpoint/2010/main" val="3479445657"/>
+        <p14:creationId xmlns:p14="http://schemas.microsoft.com/office/powerpoint/2010/main" val="35406185"/>
       </p:ext>
     </p:extLst>
   </p:cSld>
@@ -2050,7 +766,13 @@
       </p:grpSpPr>
       <p:sp>
         <p:nvSpPr>
-          <p:cNvPr id="2" name="Title 1"/>
+          <p:cNvPr id="2" name="Title 1">
+            <a:extLst>
+              <a:ext uri="{FF2B5EF4-FFF2-40B4-BE49-F238E27FC236}">
+                <a16:creationId xmlns:a16="http://schemas.microsoft.com/office/drawing/2014/main" id="{3763AB0A-FB10-8814-9B78-E6B25617663A}"/>
+              </a:ext>
+            </a:extLst>
+          </p:cNvPr>
           <p:cNvSpPr>
             <a:spLocks noGrp="1"/>
           </p:cNvSpPr>
@@ -2067,13 +789,18 @@
               <a:rPr lang="en-US"/>
               <a:t>Click to edit Master title style</a:t>
             </a:r>
-            <a:endParaRPr lang="en-US" dirty="0"/>
-          </a:p>
-        </p:txBody>
-      </p:sp>
-      <p:sp>
-        <p:nvSpPr>
-          <p:cNvPr id="3" name="Content Placeholder 2"/>
+          </a:p>
+        </p:txBody>
+      </p:sp>
+      <p:sp>
+        <p:nvSpPr>
+          <p:cNvPr id="3" name="Content Placeholder 2">
+            <a:extLst>
+              <a:ext uri="{FF2B5EF4-FFF2-40B4-BE49-F238E27FC236}">
+                <a16:creationId xmlns:a16="http://schemas.microsoft.com/office/drawing/2014/main" id="{084340FE-4CF3-84E5-E340-02B6E9DE22C0}"/>
+              </a:ext>
+            </a:extLst>
+          </p:cNvPr>
           <p:cNvSpPr>
             <a:spLocks noGrp="1"/>
           </p:cNvSpPr>
@@ -2119,13 +846,18 @@
               <a:rPr lang="en-US"/>
               <a:t>Fifth level</a:t>
             </a:r>
-            <a:endParaRPr lang="en-US" dirty="0"/>
-          </a:p>
-        </p:txBody>
-      </p:sp>
-      <p:sp>
-        <p:nvSpPr>
-          <p:cNvPr id="4" name="Date Placeholder 3"/>
+          </a:p>
+        </p:txBody>
+      </p:sp>
+      <p:sp>
+        <p:nvSpPr>
+          <p:cNvPr id="4" name="Date Placeholder 3">
+            <a:extLst>
+              <a:ext uri="{FF2B5EF4-FFF2-40B4-BE49-F238E27FC236}">
+                <a16:creationId xmlns:a16="http://schemas.microsoft.com/office/drawing/2014/main" id="{E010F1A5-4244-4DD1-3C72-2E0F6A758203}"/>
+              </a:ext>
+            </a:extLst>
+          </p:cNvPr>
           <p:cNvSpPr>
             <a:spLocks noGrp="1"/>
           </p:cNvSpPr>
@@ -2138,9 +870,9 @@
           <a:bodyPr/>
           <a:lstStyle/>
           <a:p>
-            <a:fld id="{846CE7D5-CF57-46EF-B807-FDD0502418D4}" type="datetimeFigureOut">
+            <a:fld id="{4B95EF0B-55D9-2B4C-901E-7633B195A9DA}" type="datetimeFigureOut">
               <a:rPr lang="en-US" smtClean="0"/>
-              <a:t>6/26/24</a:t>
+              <a:t>6/24/26</a:t>
             </a:fld>
             <a:endParaRPr lang="en-US"/>
           </a:p>
@@ -2148,7 +880,13 @@
       </p:sp>
       <p:sp>
         <p:nvSpPr>
-          <p:cNvPr id="5" name="Footer Placeholder 4"/>
+          <p:cNvPr id="5" name="Footer Placeholder 4">
+            <a:extLst>
+              <a:ext uri="{FF2B5EF4-FFF2-40B4-BE49-F238E27FC236}">
+                <a16:creationId xmlns:a16="http://schemas.microsoft.com/office/drawing/2014/main" id="{0E4B8EBB-EFBF-AA34-D684-E77A85EAB59F}"/>
+              </a:ext>
+            </a:extLst>
+          </p:cNvPr>
           <p:cNvSpPr>
             <a:spLocks noGrp="1"/>
           </p:cNvSpPr>
@@ -2167,7 +905,13 @@
       </p:sp>
       <p:sp>
         <p:nvSpPr>
-          <p:cNvPr id="6" name="Slide Number Placeholder 5"/>
+          <p:cNvPr id="6" name="Slide Number Placeholder 5">
+            <a:extLst>
+              <a:ext uri="{FF2B5EF4-FFF2-40B4-BE49-F238E27FC236}">
+                <a16:creationId xmlns:a16="http://schemas.microsoft.com/office/drawing/2014/main" id="{F0964489-9A03-1F06-7F9B-290691B03FEA}"/>
+              </a:ext>
+            </a:extLst>
+          </p:cNvPr>
           <p:cNvSpPr>
             <a:spLocks noGrp="1"/>
           </p:cNvSpPr>
@@ -2180,7 +924,7 @@
           <a:bodyPr/>
           <a:lstStyle/>
           <a:p>
-            <a:fld id="{330EA680-D336-4FF7-8B7A-9848BB0A1C32}" type="slidenum">
+            <a:fld id="{48AF8FE1-0F10-154F-BA00-CFE3A1619C85}" type="slidenum">
               <a:rPr lang="en-US" smtClean="0"/>
               <a:t>‹#›</a:t>
             </a:fld>
@@ -2191,7 +935,7 @@
     </p:spTree>
     <p:extLst>
       <p:ext uri="{BB962C8B-B14F-4D97-AF65-F5344CB8AC3E}">
-        <p14:creationId xmlns:p14="http://schemas.microsoft.com/office/powerpoint/2010/main" val="949138452"/>
+        <p14:creationId xmlns:p14="http://schemas.microsoft.com/office/powerpoint/2010/main" val="4078822954"/>
       </p:ext>
     </p:extLst>
   </p:cSld>
@@ -2220,7 +964,13 @@
       </p:grpSpPr>
       <p:sp>
         <p:nvSpPr>
-          <p:cNvPr id="2" name="Title 1"/>
+          <p:cNvPr id="2" name="Title 1">
+            <a:extLst>
+              <a:ext uri="{FF2B5EF4-FFF2-40B4-BE49-F238E27FC236}">
+                <a16:creationId xmlns:a16="http://schemas.microsoft.com/office/drawing/2014/main" id="{C72C472D-6EFB-B437-8932-76536F512A7D}"/>
+              </a:ext>
+            </a:extLst>
+          </p:cNvPr>
           <p:cNvSpPr>
             <a:spLocks noGrp="1"/>
           </p:cNvSpPr>
@@ -2246,13 +996,18 @@
               <a:rPr lang="en-US"/>
               <a:t>Click to edit Master title style</a:t>
             </a:r>
-            <a:endParaRPr lang="en-US" dirty="0"/>
-          </a:p>
-        </p:txBody>
-      </p:sp>
-      <p:sp>
-        <p:nvSpPr>
-          <p:cNvPr id="3" name="Text Placeholder 2"/>
+          </a:p>
+        </p:txBody>
+      </p:sp>
+      <p:sp>
+        <p:nvSpPr>
+          <p:cNvPr id="3" name="Text Placeholder 2">
+            <a:extLst>
+              <a:ext uri="{FF2B5EF4-FFF2-40B4-BE49-F238E27FC236}">
+                <a16:creationId xmlns:a16="http://schemas.microsoft.com/office/drawing/2014/main" id="{C34082D9-0658-15A7-5DC2-535D12BD9CAE}"/>
+              </a:ext>
+            </a:extLst>
+          </p:cNvPr>
           <p:cNvSpPr>
             <a:spLocks noGrp="1"/>
           </p:cNvSpPr>
@@ -2371,7 +1126,13 @@
       </p:sp>
       <p:sp>
         <p:nvSpPr>
-          <p:cNvPr id="4" name="Date Placeholder 3"/>
+          <p:cNvPr id="4" name="Date Placeholder 3">
+            <a:extLst>
+              <a:ext uri="{FF2B5EF4-FFF2-40B4-BE49-F238E27FC236}">
+                <a16:creationId xmlns:a16="http://schemas.microsoft.com/office/drawing/2014/main" id="{8587BE81-C39D-EFA0-708D-BE88E8A142DE}"/>
+              </a:ext>
+            </a:extLst>
+          </p:cNvPr>
           <p:cNvSpPr>
             <a:spLocks noGrp="1"/>
           </p:cNvSpPr>
@@ -2384,9 +1145,9 @@
           <a:bodyPr/>
           <a:lstStyle/>
           <a:p>
-            <a:fld id="{846CE7D5-CF57-46EF-B807-FDD0502418D4}" type="datetimeFigureOut">
+            <a:fld id="{4B95EF0B-55D9-2B4C-901E-7633B195A9DA}" type="datetimeFigureOut">
               <a:rPr lang="en-US" smtClean="0"/>
-              <a:t>6/26/24</a:t>
+              <a:t>6/24/26</a:t>
             </a:fld>
             <a:endParaRPr lang="en-US"/>
           </a:p>
@@ -2394,7 +1155,13 @@
       </p:sp>
       <p:sp>
         <p:nvSpPr>
-          <p:cNvPr id="5" name="Footer Placeholder 4"/>
+          <p:cNvPr id="5" name="Footer Placeholder 4">
+            <a:extLst>
+              <a:ext uri="{FF2B5EF4-FFF2-40B4-BE49-F238E27FC236}">
+                <a16:creationId xmlns:a16="http://schemas.microsoft.com/office/drawing/2014/main" id="{8356ED8F-66B7-B158-6A33-117D612A6CA1}"/>
+              </a:ext>
+            </a:extLst>
+          </p:cNvPr>
           <p:cNvSpPr>
             <a:spLocks noGrp="1"/>
           </p:cNvSpPr>
@@ -2413,7 +1180,13 @@
       </p:sp>
       <p:sp>
         <p:nvSpPr>
-          <p:cNvPr id="6" name="Slide Number Placeholder 5"/>
+          <p:cNvPr id="6" name="Slide Number Placeholder 5">
+            <a:extLst>
+              <a:ext uri="{FF2B5EF4-FFF2-40B4-BE49-F238E27FC236}">
+                <a16:creationId xmlns:a16="http://schemas.microsoft.com/office/drawing/2014/main" id="{E9293665-DE9D-7977-49E8-E767CC569BB3}"/>
+              </a:ext>
+            </a:extLst>
+          </p:cNvPr>
           <p:cNvSpPr>
             <a:spLocks noGrp="1"/>
           </p:cNvSpPr>
@@ -2426,7 +1199,7 @@
           <a:bodyPr/>
           <a:lstStyle/>
           <a:p>
-            <a:fld id="{330EA680-D336-4FF7-8B7A-9848BB0A1C32}" type="slidenum">
+            <a:fld id="{48AF8FE1-0F10-154F-BA00-CFE3A1619C85}" type="slidenum">
               <a:rPr lang="en-US" smtClean="0"/>
               <a:t>‹#›</a:t>
             </a:fld>
@@ -2437,7 +1210,7 @@
     </p:spTree>
     <p:extLst>
       <p:ext uri="{BB962C8B-B14F-4D97-AF65-F5344CB8AC3E}">
-        <p14:creationId xmlns:p14="http://schemas.microsoft.com/office/powerpoint/2010/main" val="2591524520"/>
+        <p14:creationId xmlns:p14="http://schemas.microsoft.com/office/powerpoint/2010/main" val="1519640976"/>
       </p:ext>
     </p:extLst>
   </p:cSld>
@@ -2466,7 +1239,13 @@
       </p:grpSpPr>
       <p:sp>
         <p:nvSpPr>
-          <p:cNvPr id="2" name="Title 1"/>
+          <p:cNvPr id="2" name="Title 1">
+            <a:extLst>
+              <a:ext uri="{FF2B5EF4-FFF2-40B4-BE49-F238E27FC236}">
+                <a16:creationId xmlns:a16="http://schemas.microsoft.com/office/drawing/2014/main" id="{495CE517-F1EA-9BAF-28E0-C70C898F449A}"/>
+              </a:ext>
+            </a:extLst>
+          </p:cNvPr>
           <p:cNvSpPr>
             <a:spLocks noGrp="1"/>
           </p:cNvSpPr>
@@ -2483,13 +1262,18 @@
               <a:rPr lang="en-US"/>
               <a:t>Click to edit Master title style</a:t>
             </a:r>
-            <a:endParaRPr lang="en-US" dirty="0"/>
-          </a:p>
-        </p:txBody>
-      </p:sp>
-      <p:sp>
-        <p:nvSpPr>
-          <p:cNvPr id="3" name="Content Placeholder 2"/>
+          </a:p>
+        </p:txBody>
+      </p:sp>
+      <p:sp>
+        <p:nvSpPr>
+          <p:cNvPr id="3" name="Content Placeholder 2">
+            <a:extLst>
+              <a:ext uri="{FF2B5EF4-FFF2-40B4-BE49-F238E27FC236}">
+                <a16:creationId xmlns:a16="http://schemas.microsoft.com/office/drawing/2014/main" id="{59EE5DBF-E72A-02D1-3660-FC94727D51C8}"/>
+              </a:ext>
+            </a:extLst>
+          </p:cNvPr>
           <p:cNvSpPr>
             <a:spLocks noGrp="1"/>
           </p:cNvSpPr>
@@ -2540,13 +1324,18 @@
               <a:rPr lang="en-US"/>
               <a:t>Fifth level</a:t>
             </a:r>
-            <a:endParaRPr lang="en-US" dirty="0"/>
-          </a:p>
-        </p:txBody>
-      </p:sp>
-      <p:sp>
-        <p:nvSpPr>
-          <p:cNvPr id="4" name="Content Placeholder 3"/>
+          </a:p>
+        </p:txBody>
+      </p:sp>
+      <p:sp>
+        <p:nvSpPr>
+          <p:cNvPr id="4" name="Content Placeholder 3">
+            <a:extLst>
+              <a:ext uri="{FF2B5EF4-FFF2-40B4-BE49-F238E27FC236}">
+                <a16:creationId xmlns:a16="http://schemas.microsoft.com/office/drawing/2014/main" id="{DF622723-3FC3-44A0-1583-1ECE9EF60B0C}"/>
+              </a:ext>
+            </a:extLst>
+          </p:cNvPr>
           <p:cNvSpPr>
             <a:spLocks noGrp="1"/>
           </p:cNvSpPr>
@@ -2597,13 +1386,18 @@
               <a:rPr lang="en-US"/>
               <a:t>Fifth level</a:t>
             </a:r>
-            <a:endParaRPr lang="en-US" dirty="0"/>
-          </a:p>
-        </p:txBody>
-      </p:sp>
-      <p:sp>
-        <p:nvSpPr>
-          <p:cNvPr id="5" name="Date Placeholder 4"/>
+          </a:p>
+        </p:txBody>
+      </p:sp>
+      <p:sp>
+        <p:nvSpPr>
+          <p:cNvPr id="5" name="Date Placeholder 4">
+            <a:extLst>
+              <a:ext uri="{FF2B5EF4-FFF2-40B4-BE49-F238E27FC236}">
+                <a16:creationId xmlns:a16="http://schemas.microsoft.com/office/drawing/2014/main" id="{BA5F79A4-A84E-854F-2A65-9BB0AC5A88C2}"/>
+              </a:ext>
+            </a:extLst>
+          </p:cNvPr>
           <p:cNvSpPr>
             <a:spLocks noGrp="1"/>
           </p:cNvSpPr>
@@ -2616,9 +1410,9 @@
           <a:bodyPr/>
           <a:lstStyle/>
           <a:p>
-            <a:fld id="{846CE7D5-CF57-46EF-B807-FDD0502418D4}" type="datetimeFigureOut">
+            <a:fld id="{4B95EF0B-55D9-2B4C-901E-7633B195A9DA}" type="datetimeFigureOut">
               <a:rPr lang="en-US" smtClean="0"/>
-              <a:t>6/26/24</a:t>
+              <a:t>6/24/26</a:t>
             </a:fld>
             <a:endParaRPr lang="en-US"/>
           </a:p>
@@ -2626,7 +1420,13 @@
       </p:sp>
       <p:sp>
         <p:nvSpPr>
-          <p:cNvPr id="6" name="Footer Placeholder 5"/>
+          <p:cNvPr id="6" name="Footer Placeholder 5">
+            <a:extLst>
+              <a:ext uri="{FF2B5EF4-FFF2-40B4-BE49-F238E27FC236}">
+                <a16:creationId xmlns:a16="http://schemas.microsoft.com/office/drawing/2014/main" id="{C7BB1C8D-406B-3418-A1AF-84C6530165AF}"/>
+              </a:ext>
+            </a:extLst>
+          </p:cNvPr>
           <p:cNvSpPr>
             <a:spLocks noGrp="1"/>
           </p:cNvSpPr>
@@ -2645,7 +1445,13 @@
       </p:sp>
       <p:sp>
         <p:nvSpPr>
-          <p:cNvPr id="7" name="Slide Number Placeholder 6"/>
+          <p:cNvPr id="7" name="Slide Number Placeholder 6">
+            <a:extLst>
+              <a:ext uri="{FF2B5EF4-FFF2-40B4-BE49-F238E27FC236}">
+                <a16:creationId xmlns:a16="http://schemas.microsoft.com/office/drawing/2014/main" id="{3E068259-F4A0-5901-B09E-0C2C6B58130B}"/>
+              </a:ext>
+            </a:extLst>
+          </p:cNvPr>
           <p:cNvSpPr>
             <a:spLocks noGrp="1"/>
           </p:cNvSpPr>
@@ -2658,7 +1464,7 @@
           <a:bodyPr/>
           <a:lstStyle/>
           <a:p>
-            <a:fld id="{330EA680-D336-4FF7-8B7A-9848BB0A1C32}" type="slidenum">
+            <a:fld id="{48AF8FE1-0F10-154F-BA00-CFE3A1619C85}" type="slidenum">
               <a:rPr lang="en-US" smtClean="0"/>
               <a:t>‹#›</a:t>
             </a:fld>
@@ -2669,7 +1475,7 @@
     </p:spTree>
     <p:extLst>
       <p:ext uri="{BB962C8B-B14F-4D97-AF65-F5344CB8AC3E}">
-        <p14:creationId xmlns:p14="http://schemas.microsoft.com/office/powerpoint/2010/main" val="1203092039"/>
+        <p14:creationId xmlns:p14="http://schemas.microsoft.com/office/powerpoint/2010/main" val="2231578666"/>
       </p:ext>
     </p:extLst>
   </p:cSld>
@@ -2698,7 +1504,13 @@
       </p:grpSpPr>
       <p:sp>
         <p:nvSpPr>
-          <p:cNvPr id="2" name="Title 1"/>
+          <p:cNvPr id="2" name="Title 1">
+            <a:extLst>
+              <a:ext uri="{FF2B5EF4-FFF2-40B4-BE49-F238E27FC236}">
+                <a16:creationId xmlns:a16="http://schemas.microsoft.com/office/drawing/2014/main" id="{10C013CB-2F97-6014-BCCE-842515A0CA03}"/>
+              </a:ext>
+            </a:extLst>
+          </p:cNvPr>
           <p:cNvSpPr>
             <a:spLocks noGrp="1"/>
           </p:cNvSpPr>
@@ -2720,13 +1532,18 @@
               <a:rPr lang="en-US"/>
               <a:t>Click to edit Master title style</a:t>
             </a:r>
-            <a:endParaRPr lang="en-US" dirty="0"/>
-          </a:p>
-        </p:txBody>
-      </p:sp>
-      <p:sp>
-        <p:nvSpPr>
-          <p:cNvPr id="3" name="Text Placeholder 2"/>
+          </a:p>
+        </p:txBody>
+      </p:sp>
+      <p:sp>
+        <p:nvSpPr>
+          <p:cNvPr id="3" name="Text Placeholder 2">
+            <a:extLst>
+              <a:ext uri="{FF2B5EF4-FFF2-40B4-BE49-F238E27FC236}">
+                <a16:creationId xmlns:a16="http://schemas.microsoft.com/office/drawing/2014/main" id="{C19AF8DE-859E-D6C9-1ECB-5B3B42A36D94}"/>
+              </a:ext>
+            </a:extLst>
+          </p:cNvPr>
           <p:cNvSpPr>
             <a:spLocks noGrp="1"/>
           </p:cNvSpPr>
@@ -2791,7 +1608,13 @@
       </p:sp>
       <p:sp>
         <p:nvSpPr>
-          <p:cNvPr id="4" name="Content Placeholder 3"/>
+          <p:cNvPr id="4" name="Content Placeholder 3">
+            <a:extLst>
+              <a:ext uri="{FF2B5EF4-FFF2-40B4-BE49-F238E27FC236}">
+                <a16:creationId xmlns:a16="http://schemas.microsoft.com/office/drawing/2014/main" id="{4D450D0C-718C-0162-D2C0-894F56393F1B}"/>
+              </a:ext>
+            </a:extLst>
+          </p:cNvPr>
           <p:cNvSpPr>
             <a:spLocks noGrp="1"/>
           </p:cNvSpPr>
@@ -2842,13 +1665,18 @@
               <a:rPr lang="en-US"/>
               <a:t>Fifth level</a:t>
             </a:r>
-            <a:endParaRPr lang="en-US" dirty="0"/>
-          </a:p>
-        </p:txBody>
-      </p:sp>
-      <p:sp>
-        <p:nvSpPr>
-          <p:cNvPr id="5" name="Text Placeholder 4"/>
+          </a:p>
+        </p:txBody>
+      </p:sp>
+      <p:sp>
+        <p:nvSpPr>
+          <p:cNvPr id="5" name="Text Placeholder 4">
+            <a:extLst>
+              <a:ext uri="{FF2B5EF4-FFF2-40B4-BE49-F238E27FC236}">
+                <a16:creationId xmlns:a16="http://schemas.microsoft.com/office/drawing/2014/main" id="{664BEEEE-19F5-BD53-5465-70434BD49C75}"/>
+              </a:ext>
+            </a:extLst>
+          </p:cNvPr>
           <p:cNvSpPr>
             <a:spLocks noGrp="1"/>
           </p:cNvSpPr>
@@ -2913,7 +1741,13 @@
       </p:sp>
       <p:sp>
         <p:nvSpPr>
-          <p:cNvPr id="6" name="Content Placeholder 5"/>
+          <p:cNvPr id="6" name="Content Placeholder 5">
+            <a:extLst>
+              <a:ext uri="{FF2B5EF4-FFF2-40B4-BE49-F238E27FC236}">
+                <a16:creationId xmlns:a16="http://schemas.microsoft.com/office/drawing/2014/main" id="{8B9565F1-AC31-0858-BE8C-56E367EFA1C8}"/>
+              </a:ext>
+            </a:extLst>
+          </p:cNvPr>
           <p:cNvSpPr>
             <a:spLocks noGrp="1"/>
           </p:cNvSpPr>
@@ -2964,13 +1798,18 @@
               <a:rPr lang="en-US"/>
               <a:t>Fifth level</a:t>
             </a:r>
-            <a:endParaRPr lang="en-US" dirty="0"/>
-          </a:p>
-        </p:txBody>
-      </p:sp>
-      <p:sp>
-        <p:nvSpPr>
-          <p:cNvPr id="7" name="Date Placeholder 6"/>
+          </a:p>
+        </p:txBody>
+      </p:sp>
+      <p:sp>
+        <p:nvSpPr>
+          <p:cNvPr id="7" name="Date Placeholder 6">
+            <a:extLst>
+              <a:ext uri="{FF2B5EF4-FFF2-40B4-BE49-F238E27FC236}">
+                <a16:creationId xmlns:a16="http://schemas.microsoft.com/office/drawing/2014/main" id="{0458B251-93C0-5AE2-A7F5-47F582A72AE9}"/>
+              </a:ext>
+            </a:extLst>
+          </p:cNvPr>
           <p:cNvSpPr>
             <a:spLocks noGrp="1"/>
           </p:cNvSpPr>
@@ -2983,9 +1822,9 @@
           <a:bodyPr/>
           <a:lstStyle/>
           <a:p>
-            <a:fld id="{846CE7D5-CF57-46EF-B807-FDD0502418D4}" type="datetimeFigureOut">
+            <a:fld id="{4B95EF0B-55D9-2B4C-901E-7633B195A9DA}" type="datetimeFigureOut">
               <a:rPr lang="en-US" smtClean="0"/>
-              <a:t>6/26/24</a:t>
+              <a:t>6/24/26</a:t>
             </a:fld>
             <a:endParaRPr lang="en-US"/>
           </a:p>
@@ -2993,7 +1832,13 @@
       </p:sp>
       <p:sp>
         <p:nvSpPr>
-          <p:cNvPr id="8" name="Footer Placeholder 7"/>
+          <p:cNvPr id="8" name="Footer Placeholder 7">
+            <a:extLst>
+              <a:ext uri="{FF2B5EF4-FFF2-40B4-BE49-F238E27FC236}">
+                <a16:creationId xmlns:a16="http://schemas.microsoft.com/office/drawing/2014/main" id="{62CFD342-E926-5D49-820F-0E8C9E58FBB1}"/>
+              </a:ext>
+            </a:extLst>
+          </p:cNvPr>
           <p:cNvSpPr>
             <a:spLocks noGrp="1"/>
           </p:cNvSpPr>
@@ -3012,7 +1857,13 @@
       </p:sp>
       <p:sp>
         <p:nvSpPr>
-          <p:cNvPr id="9" name="Slide Number Placeholder 8"/>
+          <p:cNvPr id="9" name="Slide Number Placeholder 8">
+            <a:extLst>
+              <a:ext uri="{FF2B5EF4-FFF2-40B4-BE49-F238E27FC236}">
+                <a16:creationId xmlns:a16="http://schemas.microsoft.com/office/drawing/2014/main" id="{156AD8B0-056B-EAB7-A569-EDAA6118C52F}"/>
+              </a:ext>
+            </a:extLst>
+          </p:cNvPr>
           <p:cNvSpPr>
             <a:spLocks noGrp="1"/>
           </p:cNvSpPr>
@@ -3025,7 +1876,7 @@
           <a:bodyPr/>
           <a:lstStyle/>
           <a:p>
-            <a:fld id="{330EA680-D336-4FF7-8B7A-9848BB0A1C32}" type="slidenum">
+            <a:fld id="{48AF8FE1-0F10-154F-BA00-CFE3A1619C85}" type="slidenum">
               <a:rPr lang="en-US" smtClean="0"/>
               <a:t>‹#›</a:t>
             </a:fld>
@@ -3036,7 +1887,7 @@
     </p:spTree>
     <p:extLst>
       <p:ext uri="{BB962C8B-B14F-4D97-AF65-F5344CB8AC3E}">
-        <p14:creationId xmlns:p14="http://schemas.microsoft.com/office/powerpoint/2010/main" val="3733172339"/>
+        <p14:creationId xmlns:p14="http://schemas.microsoft.com/office/powerpoint/2010/main" val="958163935"/>
       </p:ext>
     </p:extLst>
   </p:cSld>
@@ -3065,7 +1916,13 @@
       </p:grpSpPr>
       <p:sp>
         <p:nvSpPr>
-          <p:cNvPr id="2" name="Title 1"/>
+          <p:cNvPr id="2" name="Title 1">
+            <a:extLst>
+              <a:ext uri="{FF2B5EF4-FFF2-40B4-BE49-F238E27FC236}">
+                <a16:creationId xmlns:a16="http://schemas.microsoft.com/office/drawing/2014/main" id="{0C80C422-870B-8F5E-E221-1FD5FC28AFCD}"/>
+              </a:ext>
+            </a:extLst>
+          </p:cNvPr>
           <p:cNvSpPr>
             <a:spLocks noGrp="1"/>
           </p:cNvSpPr>
@@ -3082,13 +1939,18 @@
               <a:rPr lang="en-US"/>
               <a:t>Click to edit Master title style</a:t>
             </a:r>
-            <a:endParaRPr lang="en-US" dirty="0"/>
-          </a:p>
-        </p:txBody>
-      </p:sp>
-      <p:sp>
-        <p:nvSpPr>
-          <p:cNvPr id="3" name="Date Placeholder 2"/>
+          </a:p>
+        </p:txBody>
+      </p:sp>
+      <p:sp>
+        <p:nvSpPr>
+          <p:cNvPr id="3" name="Date Placeholder 2">
+            <a:extLst>
+              <a:ext uri="{FF2B5EF4-FFF2-40B4-BE49-F238E27FC236}">
+                <a16:creationId xmlns:a16="http://schemas.microsoft.com/office/drawing/2014/main" id="{858EBDC3-513C-9F2C-AC21-2F6140CFF662}"/>
+              </a:ext>
+            </a:extLst>
+          </p:cNvPr>
           <p:cNvSpPr>
             <a:spLocks noGrp="1"/>
           </p:cNvSpPr>
@@ -3101,9 +1963,9 @@
           <a:bodyPr/>
           <a:lstStyle/>
           <a:p>
-            <a:fld id="{846CE7D5-CF57-46EF-B807-FDD0502418D4}" type="datetimeFigureOut">
+            <a:fld id="{4B95EF0B-55D9-2B4C-901E-7633B195A9DA}" type="datetimeFigureOut">
               <a:rPr lang="en-US" smtClean="0"/>
-              <a:t>6/26/24</a:t>
+              <a:t>6/24/26</a:t>
             </a:fld>
             <a:endParaRPr lang="en-US"/>
           </a:p>
@@ -3111,7 +1973,13 @@
       </p:sp>
       <p:sp>
         <p:nvSpPr>
-          <p:cNvPr id="4" name="Footer Placeholder 3"/>
+          <p:cNvPr id="4" name="Footer Placeholder 3">
+            <a:extLst>
+              <a:ext uri="{FF2B5EF4-FFF2-40B4-BE49-F238E27FC236}">
+                <a16:creationId xmlns:a16="http://schemas.microsoft.com/office/drawing/2014/main" id="{3546F87B-3EB2-D478-3B61-88568FA2D4A6}"/>
+              </a:ext>
+            </a:extLst>
+          </p:cNvPr>
           <p:cNvSpPr>
             <a:spLocks noGrp="1"/>
           </p:cNvSpPr>
@@ -3130,7 +1998,13 @@
       </p:sp>
       <p:sp>
         <p:nvSpPr>
-          <p:cNvPr id="5" name="Slide Number Placeholder 4"/>
+          <p:cNvPr id="5" name="Slide Number Placeholder 4">
+            <a:extLst>
+              <a:ext uri="{FF2B5EF4-FFF2-40B4-BE49-F238E27FC236}">
+                <a16:creationId xmlns:a16="http://schemas.microsoft.com/office/drawing/2014/main" id="{5E76F42C-0AE1-F9D5-3E1A-3E96AF21E679}"/>
+              </a:ext>
+            </a:extLst>
+          </p:cNvPr>
           <p:cNvSpPr>
             <a:spLocks noGrp="1"/>
           </p:cNvSpPr>
@@ -3143,7 +2017,7 @@
           <a:bodyPr/>
           <a:lstStyle/>
           <a:p>
-            <a:fld id="{330EA680-D336-4FF7-8B7A-9848BB0A1C32}" type="slidenum">
+            <a:fld id="{48AF8FE1-0F10-154F-BA00-CFE3A1619C85}" type="slidenum">
               <a:rPr lang="en-US" smtClean="0"/>
               <a:t>‹#›</a:t>
             </a:fld>
@@ -3154,7 +2028,7 @@
     </p:spTree>
     <p:extLst>
       <p:ext uri="{BB962C8B-B14F-4D97-AF65-F5344CB8AC3E}">
-        <p14:creationId xmlns:p14="http://schemas.microsoft.com/office/powerpoint/2010/main" val="3210312558"/>
+        <p14:creationId xmlns:p14="http://schemas.microsoft.com/office/powerpoint/2010/main" val="1231470159"/>
       </p:ext>
     </p:extLst>
   </p:cSld>
@@ -3183,7 +2057,13 @@
       </p:grpSpPr>
       <p:sp>
         <p:nvSpPr>
-          <p:cNvPr id="2" name="Date Placeholder 1"/>
+          <p:cNvPr id="2" name="Date Placeholder 1">
+            <a:extLst>
+              <a:ext uri="{FF2B5EF4-FFF2-40B4-BE49-F238E27FC236}">
+                <a16:creationId xmlns:a16="http://schemas.microsoft.com/office/drawing/2014/main" id="{478D9715-B584-2187-A861-99AED98D7294}"/>
+              </a:ext>
+            </a:extLst>
+          </p:cNvPr>
           <p:cNvSpPr>
             <a:spLocks noGrp="1"/>
           </p:cNvSpPr>
@@ -3196,9 +2076,9 @@
           <a:bodyPr/>
           <a:lstStyle/>
           <a:p>
-            <a:fld id="{846CE7D5-CF57-46EF-B807-FDD0502418D4}" type="datetimeFigureOut">
+            <a:fld id="{4B95EF0B-55D9-2B4C-901E-7633B195A9DA}" type="datetimeFigureOut">
               <a:rPr lang="en-US" smtClean="0"/>
-              <a:t>6/26/24</a:t>
+              <a:t>6/24/26</a:t>
             </a:fld>
             <a:endParaRPr lang="en-US"/>
           </a:p>
@@ -3206,7 +2086,13 @@
       </p:sp>
       <p:sp>
         <p:nvSpPr>
-          <p:cNvPr id="3" name="Footer Placeholder 2"/>
+          <p:cNvPr id="3" name="Footer Placeholder 2">
+            <a:extLst>
+              <a:ext uri="{FF2B5EF4-FFF2-40B4-BE49-F238E27FC236}">
+                <a16:creationId xmlns:a16="http://schemas.microsoft.com/office/drawing/2014/main" id="{1E5A8250-C6A1-D4B9-95D8-5737D3CEF20F}"/>
+              </a:ext>
+            </a:extLst>
+          </p:cNvPr>
           <p:cNvSpPr>
             <a:spLocks noGrp="1"/>
           </p:cNvSpPr>
@@ -3225,7 +2111,13 @@
       </p:sp>
       <p:sp>
         <p:nvSpPr>
-          <p:cNvPr id="4" name="Slide Number Placeholder 3"/>
+          <p:cNvPr id="4" name="Slide Number Placeholder 3">
+            <a:extLst>
+              <a:ext uri="{FF2B5EF4-FFF2-40B4-BE49-F238E27FC236}">
+                <a16:creationId xmlns:a16="http://schemas.microsoft.com/office/drawing/2014/main" id="{1EF294C2-CB4D-5118-EB74-A5C50C938709}"/>
+              </a:ext>
+            </a:extLst>
+          </p:cNvPr>
           <p:cNvSpPr>
             <a:spLocks noGrp="1"/>
           </p:cNvSpPr>
@@ -3238,7 +2130,7 @@
           <a:bodyPr/>
           <a:lstStyle/>
           <a:p>
-            <a:fld id="{330EA680-D336-4FF7-8B7A-9848BB0A1C32}" type="slidenum">
+            <a:fld id="{48AF8FE1-0F10-154F-BA00-CFE3A1619C85}" type="slidenum">
               <a:rPr lang="en-US" smtClean="0"/>
               <a:t>‹#›</a:t>
             </a:fld>
@@ -3249,7 +2141,7 @@
     </p:spTree>
     <p:extLst>
       <p:ext uri="{BB962C8B-B14F-4D97-AF65-F5344CB8AC3E}">
-        <p14:creationId xmlns:p14="http://schemas.microsoft.com/office/powerpoint/2010/main" val="3146388984"/>
+        <p14:creationId xmlns:p14="http://schemas.microsoft.com/office/powerpoint/2010/main" val="1302515192"/>
       </p:ext>
     </p:extLst>
   </p:cSld>
@@ -3278,7 +2170,13 @@
       </p:grpSpPr>
       <p:sp>
         <p:nvSpPr>
-          <p:cNvPr id="2" name="Title 1"/>
+          <p:cNvPr id="2" name="Title 1">
+            <a:extLst>
+              <a:ext uri="{FF2B5EF4-FFF2-40B4-BE49-F238E27FC236}">
+                <a16:creationId xmlns:a16="http://schemas.microsoft.com/office/drawing/2014/main" id="{08597020-5E65-3CD2-CE0F-FB296487402C}"/>
+              </a:ext>
+            </a:extLst>
+          </p:cNvPr>
           <p:cNvSpPr>
             <a:spLocks noGrp="1"/>
           </p:cNvSpPr>
@@ -3304,13 +2202,18 @@
               <a:rPr lang="en-US"/>
               <a:t>Click to edit Master title style</a:t>
             </a:r>
-            <a:endParaRPr lang="en-US" dirty="0"/>
-          </a:p>
-        </p:txBody>
-      </p:sp>
-      <p:sp>
-        <p:nvSpPr>
-          <p:cNvPr id="3" name="Content Placeholder 2"/>
+          </a:p>
+        </p:txBody>
+      </p:sp>
+      <p:sp>
+        <p:nvSpPr>
+          <p:cNvPr id="3" name="Content Placeholder 2">
+            <a:extLst>
+              <a:ext uri="{FF2B5EF4-FFF2-40B4-BE49-F238E27FC236}">
+                <a16:creationId xmlns:a16="http://schemas.microsoft.com/office/drawing/2014/main" id="{CDDB72D0-AAD5-6B5D-8FEA-1A8C7A0E9BE4}"/>
+              </a:ext>
+            </a:extLst>
+          </p:cNvPr>
           <p:cNvSpPr>
             <a:spLocks noGrp="1"/>
           </p:cNvSpPr>
@@ -3389,13 +2292,18 @@
               <a:rPr lang="en-US"/>
               <a:t>Fifth level</a:t>
             </a:r>
-            <a:endParaRPr lang="en-US" dirty="0"/>
-          </a:p>
-        </p:txBody>
-      </p:sp>
-      <p:sp>
-        <p:nvSpPr>
-          <p:cNvPr id="4" name="Text Placeholder 3"/>
+          </a:p>
+        </p:txBody>
+      </p:sp>
+      <p:sp>
+        <p:nvSpPr>
+          <p:cNvPr id="4" name="Text Placeholder 3">
+            <a:extLst>
+              <a:ext uri="{FF2B5EF4-FFF2-40B4-BE49-F238E27FC236}">
+                <a16:creationId xmlns:a16="http://schemas.microsoft.com/office/drawing/2014/main" id="{EE906EF6-727A-7F69-38F1-A9F9F450F85E}"/>
+              </a:ext>
+            </a:extLst>
+          </p:cNvPr>
           <p:cNvSpPr>
             <a:spLocks noGrp="1"/>
           </p:cNvSpPr>
@@ -3460,7 +2368,13 @@
       </p:sp>
       <p:sp>
         <p:nvSpPr>
-          <p:cNvPr id="5" name="Date Placeholder 4"/>
+          <p:cNvPr id="5" name="Date Placeholder 4">
+            <a:extLst>
+              <a:ext uri="{FF2B5EF4-FFF2-40B4-BE49-F238E27FC236}">
+                <a16:creationId xmlns:a16="http://schemas.microsoft.com/office/drawing/2014/main" id="{C00112B1-B70C-E174-B69D-5EFEED861188}"/>
+              </a:ext>
+            </a:extLst>
+          </p:cNvPr>
           <p:cNvSpPr>
             <a:spLocks noGrp="1"/>
           </p:cNvSpPr>
@@ -3473,9 +2387,9 @@
           <a:bodyPr/>
           <a:lstStyle/>
           <a:p>
-            <a:fld id="{846CE7D5-CF57-46EF-B807-FDD0502418D4}" type="datetimeFigureOut">
+            <a:fld id="{4B95EF0B-55D9-2B4C-901E-7633B195A9DA}" type="datetimeFigureOut">
               <a:rPr lang="en-US" smtClean="0"/>
-              <a:t>6/26/24</a:t>
+              <a:t>6/24/26</a:t>
             </a:fld>
             <a:endParaRPr lang="en-US"/>
           </a:p>
@@ -3483,7 +2397,13 @@
       </p:sp>
       <p:sp>
         <p:nvSpPr>
-          <p:cNvPr id="6" name="Footer Placeholder 5"/>
+          <p:cNvPr id="6" name="Footer Placeholder 5">
+            <a:extLst>
+              <a:ext uri="{FF2B5EF4-FFF2-40B4-BE49-F238E27FC236}">
+                <a16:creationId xmlns:a16="http://schemas.microsoft.com/office/drawing/2014/main" id="{385D2F3C-1E4E-5E77-84C7-21E32520BDAB}"/>
+              </a:ext>
+            </a:extLst>
+          </p:cNvPr>
           <p:cNvSpPr>
             <a:spLocks noGrp="1"/>
           </p:cNvSpPr>
@@ -3502,7 +2422,13 @@
       </p:sp>
       <p:sp>
         <p:nvSpPr>
-          <p:cNvPr id="7" name="Slide Number Placeholder 6"/>
+          <p:cNvPr id="7" name="Slide Number Placeholder 6">
+            <a:extLst>
+              <a:ext uri="{FF2B5EF4-FFF2-40B4-BE49-F238E27FC236}">
+                <a16:creationId xmlns:a16="http://schemas.microsoft.com/office/drawing/2014/main" id="{9D348002-81E6-D71A-2EED-A4D1D1DEAEE7}"/>
+              </a:ext>
+            </a:extLst>
+          </p:cNvPr>
           <p:cNvSpPr>
             <a:spLocks noGrp="1"/>
           </p:cNvSpPr>
@@ -3515,7 +2441,7 @@
           <a:bodyPr/>
           <a:lstStyle/>
           <a:p>
-            <a:fld id="{330EA680-D336-4FF7-8B7A-9848BB0A1C32}" type="slidenum">
+            <a:fld id="{48AF8FE1-0F10-154F-BA00-CFE3A1619C85}" type="slidenum">
               <a:rPr lang="en-US" smtClean="0"/>
               <a:t>‹#›</a:t>
             </a:fld>
@@ -3526,7 +2452,7 @@
     </p:spTree>
     <p:extLst>
       <p:ext uri="{BB962C8B-B14F-4D97-AF65-F5344CB8AC3E}">
-        <p14:creationId xmlns:p14="http://schemas.microsoft.com/office/powerpoint/2010/main" val="3171841454"/>
+        <p14:creationId xmlns:p14="http://schemas.microsoft.com/office/powerpoint/2010/main" val="2304511069"/>
       </p:ext>
     </p:extLst>
   </p:cSld>
@@ -3555,7 +2481,13 @@
       </p:grpSpPr>
       <p:sp>
         <p:nvSpPr>
-          <p:cNvPr id="2" name="Title 1"/>
+          <p:cNvPr id="2" name="Title 1">
+            <a:extLst>
+              <a:ext uri="{FF2B5EF4-FFF2-40B4-BE49-F238E27FC236}">
+                <a16:creationId xmlns:a16="http://schemas.microsoft.com/office/drawing/2014/main" id="{D8B88820-C9CF-F251-2C1D-FADAEBA6E6D7}"/>
+              </a:ext>
+            </a:extLst>
+          </p:cNvPr>
           <p:cNvSpPr>
             <a:spLocks noGrp="1"/>
           </p:cNvSpPr>
@@ -3581,15 +2513,20 @@
               <a:rPr lang="en-US"/>
               <a:t>Click to edit Master title style</a:t>
             </a:r>
-            <a:endParaRPr lang="en-US" dirty="0"/>
-          </a:p>
-        </p:txBody>
-      </p:sp>
-      <p:sp>
-        <p:nvSpPr>
-          <p:cNvPr id="3" name="Picture Placeholder 2"/>
-          <p:cNvSpPr>
-            <a:spLocks noGrp="1" noChangeAspect="1"/>
+          </a:p>
+        </p:txBody>
+      </p:sp>
+      <p:sp>
+        <p:nvSpPr>
+          <p:cNvPr id="3" name="Picture Placeholder 2">
+            <a:extLst>
+              <a:ext uri="{FF2B5EF4-FFF2-40B4-BE49-F238E27FC236}">
+                <a16:creationId xmlns:a16="http://schemas.microsoft.com/office/drawing/2014/main" id="{EB906F76-6D4D-BF9E-EC83-003F0F263B86}"/>
+              </a:ext>
+            </a:extLst>
+          </p:cNvPr>
+          <p:cNvSpPr>
+            <a:spLocks noGrp="1"/>
           </p:cNvSpPr>
           <p:nvPr>
             <p:ph type="pic" idx="1"/>
@@ -3602,7 +2539,7 @@
           </a:xfrm>
         </p:spPr>
         <p:txBody>
-          <a:bodyPr anchor="t"/>
+          <a:bodyPr/>
           <a:lstStyle>
             <a:lvl1pPr marL="0" indent="0">
               <a:buNone/>
@@ -3642,17 +2579,19 @@
             </a:lvl9pPr>
           </a:lstStyle>
           <a:p>
-            <a:r>
-              <a:rPr lang="en-US"/>
-              <a:t>Click icon to add picture</a:t>
-            </a:r>
-            <a:endParaRPr lang="en-US" dirty="0"/>
-          </a:p>
-        </p:txBody>
-      </p:sp>
-      <p:sp>
-        <p:nvSpPr>
-          <p:cNvPr id="4" name="Text Placeholder 3"/>
+            <a:endParaRPr lang="en-US"/>
+          </a:p>
+        </p:txBody>
+      </p:sp>
+      <p:sp>
+        <p:nvSpPr>
+          <p:cNvPr id="4" name="Text Placeholder 3">
+            <a:extLst>
+              <a:ext uri="{FF2B5EF4-FFF2-40B4-BE49-F238E27FC236}">
+                <a16:creationId xmlns:a16="http://schemas.microsoft.com/office/drawing/2014/main" id="{2196A2F7-A924-4CAB-F6F6-55ABA49DE698}"/>
+              </a:ext>
+            </a:extLst>
+          </p:cNvPr>
           <p:cNvSpPr>
             <a:spLocks noGrp="1"/>
           </p:cNvSpPr>
@@ -3717,7 +2656,13 @@
       </p:sp>
       <p:sp>
         <p:nvSpPr>
-          <p:cNvPr id="5" name="Date Placeholder 4"/>
+          <p:cNvPr id="5" name="Date Placeholder 4">
+            <a:extLst>
+              <a:ext uri="{FF2B5EF4-FFF2-40B4-BE49-F238E27FC236}">
+                <a16:creationId xmlns:a16="http://schemas.microsoft.com/office/drawing/2014/main" id="{6126BC86-5869-EECE-3AE1-E0637370B16E}"/>
+              </a:ext>
+            </a:extLst>
+          </p:cNvPr>
           <p:cNvSpPr>
             <a:spLocks noGrp="1"/>
           </p:cNvSpPr>
@@ -3730,9 +2675,9 @@
           <a:bodyPr/>
           <a:lstStyle/>
           <a:p>
-            <a:fld id="{846CE7D5-CF57-46EF-B807-FDD0502418D4}" type="datetimeFigureOut">
+            <a:fld id="{4B95EF0B-55D9-2B4C-901E-7633B195A9DA}" type="datetimeFigureOut">
               <a:rPr lang="en-US" smtClean="0"/>
-              <a:t>6/26/24</a:t>
+              <a:t>6/24/26</a:t>
             </a:fld>
             <a:endParaRPr lang="en-US"/>
           </a:p>
@@ -3740,7 +2685,13 @@
       </p:sp>
       <p:sp>
         <p:nvSpPr>
-          <p:cNvPr id="6" name="Footer Placeholder 5"/>
+          <p:cNvPr id="6" name="Footer Placeholder 5">
+            <a:extLst>
+              <a:ext uri="{FF2B5EF4-FFF2-40B4-BE49-F238E27FC236}">
+                <a16:creationId xmlns:a16="http://schemas.microsoft.com/office/drawing/2014/main" id="{0BBC7522-334F-B84C-99F3-08664F7E0C2E}"/>
+              </a:ext>
+            </a:extLst>
+          </p:cNvPr>
           <p:cNvSpPr>
             <a:spLocks noGrp="1"/>
           </p:cNvSpPr>
@@ -3759,7 +2710,13 @@
       </p:sp>
       <p:sp>
         <p:nvSpPr>
-          <p:cNvPr id="7" name="Slide Number Placeholder 6"/>
+          <p:cNvPr id="7" name="Slide Number Placeholder 6">
+            <a:extLst>
+              <a:ext uri="{FF2B5EF4-FFF2-40B4-BE49-F238E27FC236}">
+                <a16:creationId xmlns:a16="http://schemas.microsoft.com/office/drawing/2014/main" id="{72C90CFD-DECA-D06A-F868-5049CE2EB242}"/>
+              </a:ext>
+            </a:extLst>
+          </p:cNvPr>
           <p:cNvSpPr>
             <a:spLocks noGrp="1"/>
           </p:cNvSpPr>
@@ -3772,7 +2729,7 @@
           <a:bodyPr/>
           <a:lstStyle/>
           <a:p>
-            <a:fld id="{330EA680-D336-4FF7-8B7A-9848BB0A1C32}" type="slidenum">
+            <a:fld id="{48AF8FE1-0F10-154F-BA00-CFE3A1619C85}" type="slidenum">
               <a:rPr lang="en-US" smtClean="0"/>
               <a:t>‹#›</a:t>
             </a:fld>
@@ -3783,7 +2740,7 @@
     </p:spTree>
     <p:extLst>
       <p:ext uri="{BB962C8B-B14F-4D97-AF65-F5344CB8AC3E}">
-        <p14:creationId xmlns:p14="http://schemas.microsoft.com/office/powerpoint/2010/main" val="1718958274"/>
+        <p14:creationId xmlns:p14="http://schemas.microsoft.com/office/powerpoint/2010/main" val="2212244185"/>
       </p:ext>
     </p:extLst>
   </p:cSld>
@@ -3817,7 +2774,13 @@
       </p:grpSpPr>
       <p:sp>
         <p:nvSpPr>
-          <p:cNvPr id="2" name="Title Placeholder 1"/>
+          <p:cNvPr id="2" name="Title Placeholder 1">
+            <a:extLst>
+              <a:ext uri="{FF2B5EF4-FFF2-40B4-BE49-F238E27FC236}">
+                <a16:creationId xmlns:a16="http://schemas.microsoft.com/office/drawing/2014/main" id="{6FC51EAD-5927-3B8C-D0E6-9D9DF215363A}"/>
+              </a:ext>
+            </a:extLst>
+          </p:cNvPr>
           <p:cNvSpPr>
             <a:spLocks noGrp="1"/>
           </p:cNvSpPr>
@@ -3844,13 +2807,18 @@
               <a:rPr lang="en-US"/>
               <a:t>Click to edit Master title style</a:t>
             </a:r>
-            <a:endParaRPr lang="en-US" dirty="0"/>
-          </a:p>
-        </p:txBody>
-      </p:sp>
-      <p:sp>
-        <p:nvSpPr>
-          <p:cNvPr id="3" name="Text Placeholder 2"/>
+          </a:p>
+        </p:txBody>
+      </p:sp>
+      <p:sp>
+        <p:nvSpPr>
+          <p:cNvPr id="3" name="Text Placeholder 2">
+            <a:extLst>
+              <a:ext uri="{FF2B5EF4-FFF2-40B4-BE49-F238E27FC236}">
+                <a16:creationId xmlns:a16="http://schemas.microsoft.com/office/drawing/2014/main" id="{980265D5-1F7A-663A-10FF-FD486417BB66}"/>
+              </a:ext>
+            </a:extLst>
+          </p:cNvPr>
           <p:cNvSpPr>
             <a:spLocks noGrp="1"/>
           </p:cNvSpPr>
@@ -3906,13 +2874,18 @@
               <a:rPr lang="en-US"/>
               <a:t>Fifth level</a:t>
             </a:r>
-            <a:endParaRPr lang="en-US" dirty="0"/>
-          </a:p>
-        </p:txBody>
-      </p:sp>
-      <p:sp>
-        <p:nvSpPr>
-          <p:cNvPr id="4" name="Date Placeholder 3"/>
+          </a:p>
+        </p:txBody>
+      </p:sp>
+      <p:sp>
+        <p:nvSpPr>
+          <p:cNvPr id="4" name="Date Placeholder 3">
+            <a:extLst>
+              <a:ext uri="{FF2B5EF4-FFF2-40B4-BE49-F238E27FC236}">
+                <a16:creationId xmlns:a16="http://schemas.microsoft.com/office/drawing/2014/main" id="{5A95BF39-97B4-C84F-A7F5-76FF97667FC6}"/>
+              </a:ext>
+            </a:extLst>
+          </p:cNvPr>
           <p:cNvSpPr>
             <a:spLocks noGrp="1"/>
           </p:cNvSpPr>
@@ -3943,9 +2916,9 @@
             </a:lvl1pPr>
           </a:lstStyle>
           <a:p>
-            <a:fld id="{846CE7D5-CF57-46EF-B807-FDD0502418D4}" type="datetimeFigureOut">
+            <a:fld id="{4B95EF0B-55D9-2B4C-901E-7633B195A9DA}" type="datetimeFigureOut">
               <a:rPr lang="en-US" smtClean="0"/>
-              <a:t>6/26/24</a:t>
+              <a:t>6/24/26</a:t>
             </a:fld>
             <a:endParaRPr lang="en-US"/>
           </a:p>
@@ -3953,7 +2926,13 @@
       </p:sp>
       <p:sp>
         <p:nvSpPr>
-          <p:cNvPr id="5" name="Footer Placeholder 4"/>
+          <p:cNvPr id="5" name="Footer Placeholder 4">
+            <a:extLst>
+              <a:ext uri="{FF2B5EF4-FFF2-40B4-BE49-F238E27FC236}">
+                <a16:creationId xmlns:a16="http://schemas.microsoft.com/office/drawing/2014/main" id="{9FD83E15-0355-3505-BFB9-376BE6C152FF}"/>
+              </a:ext>
+            </a:extLst>
+          </p:cNvPr>
           <p:cNvSpPr>
             <a:spLocks noGrp="1"/>
           </p:cNvSpPr>
@@ -3990,7 +2969,13 @@
       </p:sp>
       <p:sp>
         <p:nvSpPr>
-          <p:cNvPr id="6" name="Slide Number Placeholder 5"/>
+          <p:cNvPr id="6" name="Slide Number Placeholder 5">
+            <a:extLst>
+              <a:ext uri="{FF2B5EF4-FFF2-40B4-BE49-F238E27FC236}">
+                <a16:creationId xmlns:a16="http://schemas.microsoft.com/office/drawing/2014/main" id="{0ED0F59E-2953-C804-ABBF-7EAFDA403F99}"/>
+              </a:ext>
+            </a:extLst>
+          </p:cNvPr>
           <p:cNvSpPr>
             <a:spLocks noGrp="1"/>
           </p:cNvSpPr>
@@ -4021,7 +3006,7 @@
             </a:lvl1pPr>
           </a:lstStyle>
           <a:p>
-            <a:fld id="{330EA680-D336-4FF7-8B7A-9848BB0A1C32}" type="slidenum">
+            <a:fld id="{48AF8FE1-0F10-154F-BA00-CFE3A1619C85}" type="slidenum">
               <a:rPr lang="en-US" smtClean="0"/>
               <a:t>‹#›</a:t>
             </a:fld>
@@ -4032,23 +3017,23 @@
     </p:spTree>
     <p:extLst>
       <p:ext uri="{BB962C8B-B14F-4D97-AF65-F5344CB8AC3E}">
-        <p14:creationId xmlns:p14="http://schemas.microsoft.com/office/powerpoint/2010/main" val="2460954070"/>
+        <p14:creationId xmlns:p14="http://schemas.microsoft.com/office/powerpoint/2010/main" val="1395727303"/>
       </p:ext>
     </p:extLst>
   </p:cSld>
   <p:clrMap bg1="lt1" tx1="dk1" bg2="lt2" tx2="dk2" accent1="accent1" accent2="accent2" accent3="accent3" accent4="accent4" accent5="accent5" accent6="accent6" hlink="hlink" folHlink="folHlink"/>
   <p:sldLayoutIdLst>
-    <p:sldLayoutId id="2147483661" r:id="rId1"/>
-    <p:sldLayoutId id="2147483662" r:id="rId2"/>
-    <p:sldLayoutId id="2147483663" r:id="rId3"/>
-    <p:sldLayoutId id="2147483664" r:id="rId4"/>
-    <p:sldLayoutId id="2147483665" r:id="rId5"/>
-    <p:sldLayoutId id="2147483666" r:id="rId6"/>
-    <p:sldLayoutId id="2147483667" r:id="rId7"/>
-    <p:sldLayoutId id="2147483668" r:id="rId8"/>
-    <p:sldLayoutId id="2147483669" r:id="rId9"/>
-    <p:sldLayoutId id="2147483670" r:id="rId10"/>
-    <p:sldLayoutId id="2147483671" r:id="rId11"/>
+    <p:sldLayoutId id="2147483649" r:id="rId1"/>
+    <p:sldLayoutId id="2147483650" r:id="rId2"/>
+    <p:sldLayoutId id="2147483651" r:id="rId3"/>
+    <p:sldLayoutId id="2147483652" r:id="rId4"/>
+    <p:sldLayoutId id="2147483653" r:id="rId5"/>
+    <p:sldLayoutId id="2147483654" r:id="rId6"/>
+    <p:sldLayoutId id="2147483655" r:id="rId7"/>
+    <p:sldLayoutId id="2147483656" r:id="rId8"/>
+    <p:sldLayoutId id="2147483657" r:id="rId9"/>
+    <p:sldLayoutId id="2147483658" r:id="rId10"/>
+    <p:sldLayoutId id="2147483659" r:id="rId11"/>
   </p:sldLayoutIdLst>
   <p:txStyles>
     <p:titleStyle>
@@ -4352,7 +3337,13 @@
       </p:grpSpPr>
       <p:sp>
         <p:nvSpPr>
-          <p:cNvPr id="2" name="Title 1"/>
+          <p:cNvPr id="2" name="Title 1">
+            <a:extLst>
+              <a:ext uri="{FF2B5EF4-FFF2-40B4-BE49-F238E27FC236}">
+                <a16:creationId xmlns:a16="http://schemas.microsoft.com/office/drawing/2014/main" id="{2E165B4B-BE59-1634-552D-34DA54155360}"/>
+              </a:ext>
+            </a:extLst>
+          </p:cNvPr>
           <p:cNvSpPr>
             <a:spLocks noGrp="1"/>
           </p:cNvSpPr>
@@ -4360,9 +3351,16 @@
             <p:ph type="ctrTitle"/>
           </p:nvPr>
         </p:nvSpPr>
-        <p:spPr/>
-        <p:txBody>
-          <a:bodyPr/>
+        <p:spPr>
+          <a:xfrm>
+            <a:off x="1524000" y="1122362"/>
+            <a:ext cx="9144000" cy="3300347"/>
+          </a:xfrm>
+        </p:spPr>
+        <p:txBody>
+          <a:bodyPr>
+            <a:normAutofit fontScale="90000"/>
+          </a:bodyPr>
           <a:lstStyle/>
           <a:p>
             <a:r>
@@ -4372,16 +3370,32 @@
             <a:br>
               <a:rPr lang="en-US" dirty="0"/>
             </a:br>
-            <a:r>
+            <a:br>
               <a:rPr lang="en-US" dirty="0"/>
-              <a:t>modeling and simulations</a:t>
-            </a:r>
-          </a:p>
-        </p:txBody>
-      </p:sp>
-      <p:sp>
-        <p:nvSpPr>
-          <p:cNvPr id="3" name="Subtitle 2"/>
+            </a:br>
+            <a:r>
+              <a:rPr lang="en-US" dirty="0"/>
+              <a:t>Modeling and</a:t>
+            </a:r>
+            <a:br>
+              <a:rPr lang="en-US" dirty="0"/>
+            </a:br>
+            <a:r>
+              <a:rPr lang="en-US" dirty="0"/>
+              <a:t>simulations</a:t>
+            </a:r>
+          </a:p>
+        </p:txBody>
+      </p:sp>
+      <p:sp>
+        <p:nvSpPr>
+          <p:cNvPr id="3" name="Subtitle 2">
+            <a:extLst>
+              <a:ext uri="{FF2B5EF4-FFF2-40B4-BE49-F238E27FC236}">
+                <a16:creationId xmlns:a16="http://schemas.microsoft.com/office/drawing/2014/main" id="{4C2483B7-8C3E-71DF-3A0D-135183921C49}"/>
+              </a:ext>
+            </a:extLst>
+          </p:cNvPr>
           <p:cNvSpPr>
             <a:spLocks noGrp="1"/>
           </p:cNvSpPr>
@@ -4389,17 +3403,19 @@
             <p:ph type="subTitle" idx="1"/>
           </p:nvPr>
         </p:nvSpPr>
-        <p:spPr/>
+        <p:spPr>
+          <a:xfrm>
+            <a:off x="1524000" y="4937868"/>
+            <a:ext cx="9144000" cy="835091"/>
+          </a:xfrm>
+        </p:spPr>
         <p:txBody>
           <a:bodyPr/>
           <a:lstStyle/>
           <a:p>
-            <a:endParaRPr lang="en-US" dirty="0"/>
-          </a:p>
-          <a:p>
             <a:r>
               <a:rPr lang="en-US" dirty="0"/>
-              <a:t>Keisuke Ishihara</a:t>
+              <a:t>Luisa Escobar-Robledo, Chris Morii-Sciolla</a:t>
             </a:r>
           </a:p>
         </p:txBody>
@@ -4407,7 +3423,7 @@
     </p:spTree>
     <p:extLst>
       <p:ext uri="{BB962C8B-B14F-4D97-AF65-F5344CB8AC3E}">
-        <p14:creationId xmlns:p14="http://schemas.microsoft.com/office/powerpoint/2010/main" val="109857222"/>
+        <p14:creationId xmlns:p14="http://schemas.microsoft.com/office/powerpoint/2010/main" val="3074381221"/>
       </p:ext>
     </p:extLst>
   </p:cSld>
@@ -4422,7 +3438,13 @@
   <p:cSld>
     <p:spTree>
       <p:nvGrpSpPr>
-        <p:cNvPr id="1" name=""/>
+        <p:cNvPr id="1" name="">
+          <a:extLst>
+            <a:ext uri="{FF2B5EF4-FFF2-40B4-BE49-F238E27FC236}">
+              <a16:creationId xmlns:a16="http://schemas.microsoft.com/office/drawing/2014/main" id="{8820E2C5-A422-5C3B-79CC-821F16DC6B9A}"/>
+            </a:ext>
+          </a:extLst>
+        </p:cNvPr>
         <p:cNvGrpSpPr/>
         <p:nvPr/>
       </p:nvGrpSpPr>
@@ -4434,1383 +3456,85 @@
           <a:chExt cx="0" cy="0"/>
         </a:xfrm>
       </p:grpSpPr>
-      <mc:AlternateContent xmlns:mc="http://schemas.openxmlformats.org/markup-compatibility/2006">
-        <mc:Choice xmlns:a14="http://schemas.microsoft.com/office/drawing/2010/main" Requires="a14">
-          <p:sp>
-            <p:nvSpPr>
-              <p:cNvPr id="9" name="TextBox 8">
-                <a:extLst>
-                  <a:ext uri="{FF2B5EF4-FFF2-40B4-BE49-F238E27FC236}">
-                    <a16:creationId xmlns:a16="http://schemas.microsoft.com/office/drawing/2014/main" id="{C0805BDD-20B7-2F6D-8EB2-C54DF25DB667}"/>
-                  </a:ext>
-                </a:extLst>
-              </p:cNvPr>
-              <p:cNvSpPr txBox="1"/>
-              <p:nvPr/>
-            </p:nvSpPr>
-            <p:spPr>
-              <a:xfrm>
-                <a:off x="4237290" y="2081975"/>
-                <a:ext cx="5558351" cy="769441"/>
-              </a:xfrm>
-              <a:prstGeom prst="rect">
-                <a:avLst/>
-              </a:prstGeom>
-              <a:noFill/>
-            </p:spPr>
-            <p:txBody>
-              <a:bodyPr wrap="square" rtlCol="0">
-                <a:spAutoFit/>
-              </a:bodyPr>
-              <a:lstStyle/>
-              <a:p>
-                <a:r>
-                  <a:rPr lang="en-US" sz="4400" dirty="0"/>
-                  <a:t>=   </a:t>
-                </a:r>
-                <a14:m>
-                  <m:oMath xmlns:m="http://schemas.openxmlformats.org/officeDocument/2006/math">
-                    <m:r>
-                      <a:rPr lang="en-US" sz="4400" b="0" i="1" smtClean="0">
-                        <a:latin typeface="Cambria Math" panose="02040503050406030204" pitchFamily="18" charset="0"/>
-                      </a:rPr>
-                      <m:t>𝑅</m:t>
-                    </m:r>
-                    <m:r>
-                      <a:rPr lang="en-US" sz="4400" b="0" i="1" smtClean="0">
-                        <a:latin typeface="Cambria Math" panose="02040503050406030204" pitchFamily="18" charset="0"/>
-                      </a:rPr>
-                      <m:t> + </m:t>
-                    </m:r>
-                    <m:sSub>
-                      <m:sSubPr>
-                        <m:ctrlPr>
-                          <a:rPr lang="en-US" sz="4400" b="0" i="1" smtClean="0">
-                            <a:latin typeface="Cambria Math" panose="02040503050406030204" pitchFamily="18" charset="0"/>
-                          </a:rPr>
-                        </m:ctrlPr>
-                      </m:sSubPr>
-                      <m:e>
-                        <m:r>
-                          <a:rPr lang="en-US" sz="4400" b="0" i="1" smtClean="0">
-                            <a:latin typeface="Cambria Math" panose="02040503050406030204" pitchFamily="18" charset="0"/>
-                          </a:rPr>
-                          <m:t>𝑔</m:t>
-                        </m:r>
-                      </m:e>
-                      <m:sub>
-                        <m:r>
-                          <a:rPr lang="en-US" sz="4400" b="0" i="1" smtClean="0">
-                            <a:latin typeface="Cambria Math" panose="02040503050406030204" pitchFamily="18" charset="0"/>
-                          </a:rPr>
-                          <m:t>1</m:t>
-                        </m:r>
-                      </m:sub>
-                    </m:sSub>
-                    <m:r>
-                      <a:rPr lang="en-US" sz="4400" b="0" i="1" smtClean="0">
-                        <a:latin typeface="Cambria Math" panose="02040503050406030204" pitchFamily="18" charset="0"/>
-                      </a:rPr>
-                      <m:t>𝑅</m:t>
-                    </m:r>
-                    <m:r>
-                      <a:rPr lang="en-US" sz="4400" b="0" i="1" smtClean="0">
-                        <a:latin typeface="Cambria Math" panose="02040503050406030204" pitchFamily="18" charset="0"/>
-                      </a:rPr>
-                      <m:t> − </m:t>
-                    </m:r>
-                    <m:sSub>
-                      <m:sSubPr>
-                        <m:ctrlPr>
-                          <a:rPr lang="en-US" sz="4400" b="0" i="1" smtClean="0">
-                            <a:latin typeface="Cambria Math" panose="02040503050406030204" pitchFamily="18" charset="0"/>
-                          </a:rPr>
-                        </m:ctrlPr>
-                      </m:sSubPr>
-                      <m:e>
-                        <m:r>
-                          <a:rPr lang="en-US" sz="4400" b="0" i="1" smtClean="0">
-                            <a:latin typeface="Cambria Math" panose="02040503050406030204" pitchFamily="18" charset="0"/>
-                          </a:rPr>
-                          <m:t>𝑑</m:t>
-                        </m:r>
-                      </m:e>
-                      <m:sub>
-                        <m:r>
-                          <a:rPr lang="en-US" sz="4400" b="0" i="1" smtClean="0">
-                            <a:latin typeface="Cambria Math" panose="02040503050406030204" pitchFamily="18" charset="0"/>
-                          </a:rPr>
-                          <m:t>1</m:t>
-                        </m:r>
-                      </m:sub>
-                    </m:sSub>
-                    <m:r>
-                      <a:rPr lang="en-US" sz="4400" b="0" i="1" smtClean="0">
-                        <a:latin typeface="Cambria Math" panose="02040503050406030204" pitchFamily="18" charset="0"/>
-                      </a:rPr>
-                      <m:t>𝑅𝐹</m:t>
-                    </m:r>
-                  </m:oMath>
-                </a14:m>
-                <a:endParaRPr lang="en-US" sz="4400" b="0" dirty="0"/>
-              </a:p>
-            </p:txBody>
-          </p:sp>
-        </mc:Choice>
-        <mc:Fallback>
-          <p:sp>
-            <p:nvSpPr>
-              <p:cNvPr id="9" name="TextBox 8">
-                <a:extLst>
-                  <a:ext uri="{FF2B5EF4-FFF2-40B4-BE49-F238E27FC236}">
-                    <a16:creationId xmlns:a16="http://schemas.microsoft.com/office/drawing/2014/main" id="{C0805BDD-20B7-2F6D-8EB2-C54DF25DB667}"/>
-                  </a:ext>
-                </a:extLst>
-              </p:cNvPr>
-              <p:cNvSpPr txBox="1">
-                <a:spLocks noRot="1" noChangeAspect="1" noMove="1" noResize="1" noEditPoints="1" noAdjustHandles="1" noChangeArrowheads="1" noChangeShapeType="1" noTextEdit="1"/>
-              </p:cNvSpPr>
-              <p:nvPr/>
-            </p:nvSpPr>
-            <p:spPr>
-              <a:xfrm>
-                <a:off x="4237290" y="2081975"/>
-                <a:ext cx="5558351" cy="769441"/>
-              </a:xfrm>
-              <a:prstGeom prst="rect">
-                <a:avLst/>
-              </a:prstGeom>
-              <a:blipFill>
-                <a:blip r:embed="rId2"/>
-                <a:stretch>
-                  <a:fillRect l="-4556" t="-16393" b="-37705"/>
-                </a:stretch>
-              </a:blipFill>
-            </p:spPr>
-            <p:txBody>
-              <a:bodyPr/>
-              <a:lstStyle/>
-              <a:p>
-                <a:r>
-                  <a:rPr lang="en-US">
-                    <a:noFill/>
-                  </a:rPr>
-                  <a:t> </a:t>
-                </a:r>
-              </a:p>
-            </p:txBody>
-          </p:sp>
-        </mc:Fallback>
-      </mc:AlternateContent>
-      <mc:AlternateContent xmlns:mc="http://schemas.openxmlformats.org/markup-compatibility/2006">
-        <mc:Choice xmlns:a14="http://schemas.microsoft.com/office/drawing/2010/main" Requires="a14">
-          <p:sp>
-            <p:nvSpPr>
-              <p:cNvPr id="10" name="TextBox 9">
-                <a:extLst>
-                  <a:ext uri="{FF2B5EF4-FFF2-40B4-BE49-F238E27FC236}">
-                    <a16:creationId xmlns:a16="http://schemas.microsoft.com/office/drawing/2014/main" id="{86969F1B-8E5E-D6D9-201D-C0D12B068752}"/>
-                  </a:ext>
-                </a:extLst>
-              </p:cNvPr>
-              <p:cNvSpPr txBox="1"/>
-              <p:nvPr/>
-            </p:nvSpPr>
-            <p:spPr>
-              <a:xfrm>
-                <a:off x="4237290" y="3913848"/>
-                <a:ext cx="5453248" cy="769441"/>
-              </a:xfrm>
-              <a:prstGeom prst="rect">
-                <a:avLst/>
-              </a:prstGeom>
-              <a:noFill/>
-            </p:spPr>
-            <p:txBody>
-              <a:bodyPr wrap="square" rtlCol="0">
-                <a:spAutoFit/>
-              </a:bodyPr>
-              <a:lstStyle/>
-              <a:p>
-                <a:r>
-                  <a:rPr lang="en-US" sz="4400" dirty="0"/>
-                  <a:t>= </a:t>
-                </a:r>
-                <a14:m>
-                  <m:oMath xmlns:m="http://schemas.openxmlformats.org/officeDocument/2006/math">
-                    <m:r>
-                      <a:rPr lang="en-US" sz="4400" b="0" i="0" smtClean="0">
-                        <a:latin typeface="Cambria Math" panose="02040503050406030204" pitchFamily="18" charset="0"/>
-                      </a:rPr>
-                      <m:t>  </m:t>
-                    </m:r>
-                    <m:r>
-                      <a:rPr lang="en-US" sz="4400" b="0" i="1" smtClean="0">
-                        <a:latin typeface="Cambria Math" panose="02040503050406030204" pitchFamily="18" charset="0"/>
-                      </a:rPr>
-                      <m:t>𝐹</m:t>
-                    </m:r>
-                    <m:r>
-                      <a:rPr lang="en-US" sz="4400" b="0" i="1" smtClean="0">
-                        <a:latin typeface="Cambria Math" panose="02040503050406030204" pitchFamily="18" charset="0"/>
-                      </a:rPr>
-                      <m:t> + </m:t>
-                    </m:r>
-                    <m:sSub>
-                      <m:sSubPr>
-                        <m:ctrlPr>
-                          <a:rPr lang="en-US" sz="4400" b="0" i="1" smtClean="0">
-                            <a:latin typeface="Cambria Math" panose="02040503050406030204" pitchFamily="18" charset="0"/>
-                          </a:rPr>
-                        </m:ctrlPr>
-                      </m:sSubPr>
-                      <m:e>
-                        <m:r>
-                          <a:rPr lang="en-US" sz="4400" b="0" i="1" smtClean="0">
-                            <a:latin typeface="Cambria Math" panose="02040503050406030204" pitchFamily="18" charset="0"/>
-                          </a:rPr>
-                          <m:t>𝑔</m:t>
-                        </m:r>
-                      </m:e>
-                      <m:sub>
-                        <m:r>
-                          <a:rPr lang="en-US" sz="4400" b="0" i="1" smtClean="0">
-                            <a:latin typeface="Cambria Math" panose="02040503050406030204" pitchFamily="18" charset="0"/>
-                          </a:rPr>
-                          <m:t>2</m:t>
-                        </m:r>
-                      </m:sub>
-                    </m:sSub>
-                    <m:r>
-                      <a:rPr lang="en-US" sz="4400" b="0" i="1" smtClean="0">
-                        <a:latin typeface="Cambria Math" panose="02040503050406030204" pitchFamily="18" charset="0"/>
-                      </a:rPr>
-                      <m:t>𝑅𝐹</m:t>
-                    </m:r>
-                    <m:r>
-                      <a:rPr lang="en-US" sz="4400" b="0" i="1" smtClean="0">
-                        <a:latin typeface="Cambria Math" panose="02040503050406030204" pitchFamily="18" charset="0"/>
-                      </a:rPr>
-                      <m:t> − </m:t>
-                    </m:r>
-                    <m:sSub>
-                      <m:sSubPr>
-                        <m:ctrlPr>
-                          <a:rPr lang="en-US" sz="4400" b="0" i="1" smtClean="0">
-                            <a:latin typeface="Cambria Math" panose="02040503050406030204" pitchFamily="18" charset="0"/>
-                          </a:rPr>
-                        </m:ctrlPr>
-                      </m:sSubPr>
-                      <m:e>
-                        <m:r>
-                          <a:rPr lang="en-US" sz="4400" b="0" i="1" smtClean="0">
-                            <a:latin typeface="Cambria Math" panose="02040503050406030204" pitchFamily="18" charset="0"/>
-                          </a:rPr>
-                          <m:t>𝑑</m:t>
-                        </m:r>
-                      </m:e>
-                      <m:sub>
-                        <m:r>
-                          <a:rPr lang="en-US" sz="4400" b="0" i="1" smtClean="0">
-                            <a:latin typeface="Cambria Math" panose="02040503050406030204" pitchFamily="18" charset="0"/>
-                          </a:rPr>
-                          <m:t>2</m:t>
-                        </m:r>
-                      </m:sub>
-                    </m:sSub>
-                    <m:r>
-                      <a:rPr lang="en-US" sz="4400" b="0" i="1" smtClean="0">
-                        <a:latin typeface="Cambria Math" panose="02040503050406030204" pitchFamily="18" charset="0"/>
-                      </a:rPr>
-                      <m:t>𝐹</m:t>
-                    </m:r>
-                  </m:oMath>
-                </a14:m>
-                <a:endParaRPr lang="en-US" sz="4400" b="0" dirty="0"/>
-              </a:p>
-            </p:txBody>
-          </p:sp>
-        </mc:Choice>
-        <mc:Fallback>
-          <p:sp>
-            <p:nvSpPr>
-              <p:cNvPr id="10" name="TextBox 9">
-                <a:extLst>
-                  <a:ext uri="{FF2B5EF4-FFF2-40B4-BE49-F238E27FC236}">
-                    <a16:creationId xmlns:a16="http://schemas.microsoft.com/office/drawing/2014/main" id="{86969F1B-8E5E-D6D9-201D-C0D12B068752}"/>
-                  </a:ext>
-                </a:extLst>
-              </p:cNvPr>
-              <p:cNvSpPr txBox="1">
-                <a:spLocks noRot="1" noChangeAspect="1" noMove="1" noResize="1" noEditPoints="1" noAdjustHandles="1" noChangeArrowheads="1" noChangeShapeType="1" noTextEdit="1"/>
-              </p:cNvSpPr>
-              <p:nvPr/>
-            </p:nvSpPr>
-            <p:spPr>
-              <a:xfrm>
-                <a:off x="4237290" y="3913848"/>
-                <a:ext cx="5453248" cy="769441"/>
-              </a:xfrm>
-              <a:prstGeom prst="rect">
-                <a:avLst/>
-              </a:prstGeom>
-              <a:blipFill>
-                <a:blip r:embed="rId3"/>
-                <a:stretch>
-                  <a:fillRect l="-4640" t="-16393" b="-37705"/>
-                </a:stretch>
-              </a:blipFill>
-            </p:spPr>
-            <p:txBody>
-              <a:bodyPr/>
-              <a:lstStyle/>
-              <a:p>
-                <a:r>
-                  <a:rPr lang="en-US">
-                    <a:noFill/>
-                  </a:rPr>
-                  <a:t> </a:t>
-                </a:r>
-              </a:p>
-            </p:txBody>
-          </p:sp>
-        </mc:Fallback>
-      </mc:AlternateContent>
-      <mc:AlternateContent xmlns:mc="http://schemas.openxmlformats.org/markup-compatibility/2006">
-        <mc:Choice xmlns:a14="http://schemas.microsoft.com/office/drawing/2010/main" Requires="a14">
-          <p:sp>
-            <p:nvSpPr>
-              <p:cNvPr id="11" name="TextBox 10">
-                <a:extLst>
-                  <a:ext uri="{FF2B5EF4-FFF2-40B4-BE49-F238E27FC236}">
-                    <a16:creationId xmlns:a16="http://schemas.microsoft.com/office/drawing/2014/main" id="{DF3C6143-CCD2-D3BE-7DD1-6AA41FF393D1}"/>
-                  </a:ext>
-                </a:extLst>
-              </p:cNvPr>
-              <p:cNvSpPr txBox="1"/>
-              <p:nvPr/>
-            </p:nvSpPr>
-            <p:spPr>
-              <a:xfrm>
-                <a:off x="2291255" y="5745721"/>
-                <a:ext cx="476606" cy="369643"/>
-              </a:xfrm>
-              <a:prstGeom prst="rect">
-                <a:avLst/>
-              </a:prstGeom>
-              <a:noFill/>
-            </p:spPr>
-            <p:txBody>
-              <a:bodyPr wrap="none" rtlCol="0">
-                <a:spAutoFit/>
-              </a:bodyPr>
-              <a:lstStyle/>
-              <a:p>
-                <a:pPr/>
-                <a14:m>
-                  <m:oMathPara xmlns:m="http://schemas.openxmlformats.org/officeDocument/2006/math">
-                    <m:oMathParaPr>
-                      <m:jc m:val="centerGroup"/>
-                    </m:oMathParaPr>
-                    <m:oMath xmlns:m="http://schemas.openxmlformats.org/officeDocument/2006/math">
-                      <m:sSub>
-                        <m:sSubPr>
-                          <m:ctrlPr>
-                            <a:rPr lang="en-US" sz="2000" b="0" i="1" smtClean="0">
-                              <a:latin typeface="Cambria Math" panose="02040503050406030204" pitchFamily="18" charset="0"/>
-                            </a:rPr>
-                          </m:ctrlPr>
-                        </m:sSubPr>
-                        <m:e>
-                          <m:r>
-                            <a:rPr lang="en-US" sz="2000" b="0" i="1" smtClean="0">
-                              <a:latin typeface="Cambria Math" panose="02040503050406030204" pitchFamily="18" charset="0"/>
-                            </a:rPr>
-                            <m:t>𝑔</m:t>
-                          </m:r>
-                        </m:e>
-                        <m:sub>
-                          <m:r>
-                            <a:rPr lang="en-US" sz="2000" b="0" i="1" smtClean="0">
-                              <a:latin typeface="Cambria Math" panose="02040503050406030204" pitchFamily="18" charset="0"/>
-                            </a:rPr>
-                            <m:t>1</m:t>
-                          </m:r>
-                        </m:sub>
-                      </m:sSub>
-                      <m:r>
-                        <a:rPr lang="en-US" sz="2000" b="0" i="1" smtClean="0">
-                          <a:latin typeface="Cambria Math" panose="02040503050406030204" pitchFamily="18" charset="0"/>
-                        </a:rPr>
-                        <m:t>:</m:t>
-                      </m:r>
-                    </m:oMath>
-                  </m:oMathPara>
-                </a14:m>
-                <a:endParaRPr lang="en-US" sz="2000" dirty="0"/>
-              </a:p>
-            </p:txBody>
-          </p:sp>
-        </mc:Choice>
-        <mc:Fallback>
-          <p:sp>
-            <p:nvSpPr>
-              <p:cNvPr id="11" name="TextBox 10">
-                <a:extLst>
-                  <a:ext uri="{FF2B5EF4-FFF2-40B4-BE49-F238E27FC236}">
-                    <a16:creationId xmlns:a16="http://schemas.microsoft.com/office/drawing/2014/main" id="{DF3C6143-CCD2-D3BE-7DD1-6AA41FF393D1}"/>
-                  </a:ext>
-                </a:extLst>
-              </p:cNvPr>
-              <p:cNvSpPr txBox="1">
-                <a:spLocks noRot="1" noChangeAspect="1" noMove="1" noResize="1" noEditPoints="1" noAdjustHandles="1" noChangeArrowheads="1" noChangeShapeType="1" noTextEdit="1"/>
-              </p:cNvSpPr>
-              <p:nvPr/>
-            </p:nvSpPr>
-            <p:spPr>
-              <a:xfrm>
-                <a:off x="2291255" y="5745721"/>
-                <a:ext cx="476606" cy="369643"/>
-              </a:xfrm>
-              <a:prstGeom prst="rect">
-                <a:avLst/>
-              </a:prstGeom>
-              <a:blipFill>
-                <a:blip r:embed="rId4"/>
-                <a:stretch>
-                  <a:fillRect b="-16667"/>
-                </a:stretch>
-              </a:blipFill>
-            </p:spPr>
-            <p:txBody>
-              <a:bodyPr/>
-              <a:lstStyle/>
-              <a:p>
-                <a:r>
-                  <a:rPr lang="en-US">
-                    <a:noFill/>
-                  </a:rPr>
-                  <a:t> </a:t>
-                </a:r>
-              </a:p>
-            </p:txBody>
-          </p:sp>
-        </mc:Fallback>
-      </mc:AlternateContent>
-      <mc:AlternateContent xmlns:mc="http://schemas.openxmlformats.org/markup-compatibility/2006">
-        <mc:Choice xmlns:a14="http://schemas.microsoft.com/office/drawing/2010/main" Requires="a14">
-          <p:sp>
-            <p:nvSpPr>
-              <p:cNvPr id="13" name="TextBox 12">
-                <a:extLst>
-                  <a:ext uri="{FF2B5EF4-FFF2-40B4-BE49-F238E27FC236}">
-                    <a16:creationId xmlns:a16="http://schemas.microsoft.com/office/drawing/2014/main" id="{554B10DC-B6E5-27C8-E03F-DF22F8F46A4A}"/>
-                  </a:ext>
-                </a:extLst>
-              </p:cNvPr>
-              <p:cNvSpPr txBox="1"/>
-              <p:nvPr/>
-            </p:nvSpPr>
-            <p:spPr>
-              <a:xfrm>
-                <a:off x="2291255" y="6163235"/>
-                <a:ext cx="481620" cy="369643"/>
-              </a:xfrm>
-              <a:prstGeom prst="rect">
-                <a:avLst/>
-              </a:prstGeom>
-              <a:noFill/>
-            </p:spPr>
-            <p:txBody>
-              <a:bodyPr wrap="none" rtlCol="0">
-                <a:spAutoFit/>
-              </a:bodyPr>
-              <a:lstStyle/>
-              <a:p>
-                <a:pPr/>
-                <a14:m>
-                  <m:oMathPara xmlns:m="http://schemas.openxmlformats.org/officeDocument/2006/math">
-                    <m:oMathParaPr>
-                      <m:jc m:val="centerGroup"/>
-                    </m:oMathParaPr>
-                    <m:oMath xmlns:m="http://schemas.openxmlformats.org/officeDocument/2006/math">
-                      <m:sSub>
-                        <m:sSubPr>
-                          <m:ctrlPr>
-                            <a:rPr lang="en-US" sz="2000" b="0" i="1" smtClean="0">
-                              <a:latin typeface="Cambria Math" panose="02040503050406030204" pitchFamily="18" charset="0"/>
-                            </a:rPr>
-                          </m:ctrlPr>
-                        </m:sSubPr>
-                        <m:e>
-                          <m:r>
-                            <a:rPr lang="en-US" sz="2000" b="0" i="1" smtClean="0">
-                              <a:latin typeface="Cambria Math" panose="02040503050406030204" pitchFamily="18" charset="0"/>
-                            </a:rPr>
-                            <m:t>𝑔</m:t>
-                          </m:r>
-                        </m:e>
-                        <m:sub>
-                          <m:r>
-                            <a:rPr lang="en-US" sz="2000" b="0" i="1" smtClean="0">
-                              <a:latin typeface="Cambria Math" panose="02040503050406030204" pitchFamily="18" charset="0"/>
-                            </a:rPr>
-                            <m:t>2</m:t>
-                          </m:r>
-                        </m:sub>
-                      </m:sSub>
-                      <m:r>
-                        <a:rPr lang="en-US" sz="2000" b="0" i="1" smtClean="0">
-                          <a:latin typeface="Cambria Math" panose="02040503050406030204" pitchFamily="18" charset="0"/>
-                        </a:rPr>
-                        <m:t>:</m:t>
-                      </m:r>
-                    </m:oMath>
-                  </m:oMathPara>
-                </a14:m>
-                <a:endParaRPr lang="en-US" sz="2000" dirty="0"/>
-              </a:p>
-            </p:txBody>
-          </p:sp>
-        </mc:Choice>
-        <mc:Fallback>
-          <p:sp>
-            <p:nvSpPr>
-              <p:cNvPr id="13" name="TextBox 12">
-                <a:extLst>
-                  <a:ext uri="{FF2B5EF4-FFF2-40B4-BE49-F238E27FC236}">
-                    <a16:creationId xmlns:a16="http://schemas.microsoft.com/office/drawing/2014/main" id="{554B10DC-B6E5-27C8-E03F-DF22F8F46A4A}"/>
-                  </a:ext>
-                </a:extLst>
-              </p:cNvPr>
-              <p:cNvSpPr txBox="1">
-                <a:spLocks noRot="1" noChangeAspect="1" noMove="1" noResize="1" noEditPoints="1" noAdjustHandles="1" noChangeArrowheads="1" noChangeShapeType="1" noTextEdit="1"/>
-              </p:cNvSpPr>
-              <p:nvPr/>
-            </p:nvSpPr>
-            <p:spPr>
-              <a:xfrm>
-                <a:off x="2291255" y="6163235"/>
-                <a:ext cx="481620" cy="369643"/>
-              </a:xfrm>
-              <a:prstGeom prst="rect">
-                <a:avLst/>
-              </a:prstGeom>
-              <a:blipFill>
-                <a:blip r:embed="rId5"/>
-                <a:stretch>
-                  <a:fillRect b="-16667"/>
-                </a:stretch>
-              </a:blipFill>
-            </p:spPr>
-            <p:txBody>
-              <a:bodyPr/>
-              <a:lstStyle/>
-              <a:p>
-                <a:r>
-                  <a:rPr lang="en-US">
-                    <a:noFill/>
-                  </a:rPr>
-                  <a:t> </a:t>
-                </a:r>
-              </a:p>
-            </p:txBody>
-          </p:sp>
-        </mc:Fallback>
-      </mc:AlternateContent>
-      <mc:AlternateContent xmlns:mc="http://schemas.openxmlformats.org/markup-compatibility/2006">
-        <mc:Choice xmlns:a14="http://schemas.microsoft.com/office/drawing/2010/main" Requires="a14">
-          <p:sp>
-            <p:nvSpPr>
-              <p:cNvPr id="14" name="TextBox 13">
-                <a:extLst>
-                  <a:ext uri="{FF2B5EF4-FFF2-40B4-BE49-F238E27FC236}">
-                    <a16:creationId xmlns:a16="http://schemas.microsoft.com/office/drawing/2014/main" id="{AF500C16-B97C-47DE-457D-AA8AD939ED04}"/>
-                  </a:ext>
-                </a:extLst>
-              </p:cNvPr>
-              <p:cNvSpPr txBox="1"/>
-              <p:nvPr/>
-            </p:nvSpPr>
-            <p:spPr>
-              <a:xfrm>
-                <a:off x="6421819" y="5723499"/>
-                <a:ext cx="477254" cy="369643"/>
-              </a:xfrm>
-              <a:prstGeom prst="rect">
-                <a:avLst/>
-              </a:prstGeom>
-              <a:noFill/>
-            </p:spPr>
-            <p:txBody>
-              <a:bodyPr wrap="none" rtlCol="0">
-                <a:spAutoFit/>
-              </a:bodyPr>
-              <a:lstStyle/>
-              <a:p>
-                <a:pPr/>
-                <a14:m>
-                  <m:oMathPara xmlns:m="http://schemas.openxmlformats.org/officeDocument/2006/math">
-                    <m:oMathParaPr>
-                      <m:jc m:val="centerGroup"/>
-                    </m:oMathParaPr>
-                    <m:oMath xmlns:m="http://schemas.openxmlformats.org/officeDocument/2006/math">
-                      <m:sSub>
-                        <m:sSubPr>
-                          <m:ctrlPr>
-                            <a:rPr lang="en-US" sz="2000" b="0" i="1" smtClean="0">
-                              <a:latin typeface="Cambria Math" panose="02040503050406030204" pitchFamily="18" charset="0"/>
-                            </a:rPr>
-                          </m:ctrlPr>
-                        </m:sSubPr>
-                        <m:e>
-                          <m:r>
-                            <a:rPr lang="en-US" sz="2000" b="0" i="1" smtClean="0">
-                              <a:latin typeface="Cambria Math" panose="02040503050406030204" pitchFamily="18" charset="0"/>
-                            </a:rPr>
-                            <m:t>𝑑</m:t>
-                          </m:r>
-                        </m:e>
-                        <m:sub>
-                          <m:r>
-                            <a:rPr lang="en-US" sz="2000" b="0" i="1" smtClean="0">
-                              <a:latin typeface="Cambria Math" panose="02040503050406030204" pitchFamily="18" charset="0"/>
-                            </a:rPr>
-                            <m:t>1</m:t>
-                          </m:r>
-                        </m:sub>
-                      </m:sSub>
-                      <m:r>
-                        <a:rPr lang="en-US" sz="2000" b="0" i="1" smtClean="0">
-                          <a:latin typeface="Cambria Math" panose="02040503050406030204" pitchFamily="18" charset="0"/>
-                        </a:rPr>
-                        <m:t>:</m:t>
-                      </m:r>
-                    </m:oMath>
-                  </m:oMathPara>
-                </a14:m>
-                <a:endParaRPr lang="en-US" sz="2000" dirty="0"/>
-              </a:p>
-            </p:txBody>
-          </p:sp>
-        </mc:Choice>
-        <mc:Fallback>
-          <p:sp>
-            <p:nvSpPr>
-              <p:cNvPr id="14" name="TextBox 13">
-                <a:extLst>
-                  <a:ext uri="{FF2B5EF4-FFF2-40B4-BE49-F238E27FC236}">
-                    <a16:creationId xmlns:a16="http://schemas.microsoft.com/office/drawing/2014/main" id="{AF500C16-B97C-47DE-457D-AA8AD939ED04}"/>
-                  </a:ext>
-                </a:extLst>
-              </p:cNvPr>
-              <p:cNvSpPr txBox="1">
-                <a:spLocks noRot="1" noChangeAspect="1" noMove="1" noResize="1" noEditPoints="1" noAdjustHandles="1" noChangeArrowheads="1" noChangeShapeType="1" noTextEdit="1"/>
-              </p:cNvSpPr>
-              <p:nvPr/>
-            </p:nvSpPr>
-            <p:spPr>
-              <a:xfrm>
-                <a:off x="6421819" y="5723499"/>
-                <a:ext cx="477254" cy="369643"/>
-              </a:xfrm>
-              <a:prstGeom prst="rect">
-                <a:avLst/>
-              </a:prstGeom>
-              <a:blipFill>
-                <a:blip r:embed="rId6"/>
-                <a:stretch>
-                  <a:fillRect b="-3226"/>
-                </a:stretch>
-              </a:blipFill>
-            </p:spPr>
-            <p:txBody>
-              <a:bodyPr/>
-              <a:lstStyle/>
-              <a:p>
-                <a:r>
-                  <a:rPr lang="en-US">
-                    <a:noFill/>
-                  </a:rPr>
-                  <a:t> </a:t>
-                </a:r>
-              </a:p>
-            </p:txBody>
-          </p:sp>
-        </mc:Fallback>
-      </mc:AlternateContent>
-      <mc:AlternateContent xmlns:mc="http://schemas.openxmlformats.org/markup-compatibility/2006">
-        <mc:Choice xmlns:a14="http://schemas.microsoft.com/office/drawing/2010/main" Requires="a14">
-          <p:sp>
-            <p:nvSpPr>
-              <p:cNvPr id="15" name="TextBox 14">
-                <a:extLst>
-                  <a:ext uri="{FF2B5EF4-FFF2-40B4-BE49-F238E27FC236}">
-                    <a16:creationId xmlns:a16="http://schemas.microsoft.com/office/drawing/2014/main" id="{65E2CB8C-5F8F-CA93-F645-ABBFACC2BC17}"/>
-                  </a:ext>
-                </a:extLst>
-              </p:cNvPr>
-              <p:cNvSpPr txBox="1"/>
-              <p:nvPr/>
-            </p:nvSpPr>
-            <p:spPr>
-              <a:xfrm>
-                <a:off x="6421819" y="6141014"/>
-                <a:ext cx="482267" cy="369643"/>
-              </a:xfrm>
-              <a:prstGeom prst="rect">
-                <a:avLst/>
-              </a:prstGeom>
-              <a:noFill/>
-            </p:spPr>
-            <p:txBody>
-              <a:bodyPr wrap="none" rtlCol="0">
-                <a:spAutoFit/>
-              </a:bodyPr>
-              <a:lstStyle/>
-              <a:p>
-                <a:pPr/>
-                <a14:m>
-                  <m:oMathPara xmlns:m="http://schemas.openxmlformats.org/officeDocument/2006/math">
-                    <m:oMathParaPr>
-                      <m:jc m:val="centerGroup"/>
-                    </m:oMathParaPr>
-                    <m:oMath xmlns:m="http://schemas.openxmlformats.org/officeDocument/2006/math">
-                      <m:sSub>
-                        <m:sSubPr>
-                          <m:ctrlPr>
-                            <a:rPr lang="en-US" sz="2000" b="0" i="1" smtClean="0">
-                              <a:latin typeface="Cambria Math" panose="02040503050406030204" pitchFamily="18" charset="0"/>
-                            </a:rPr>
-                          </m:ctrlPr>
-                        </m:sSubPr>
-                        <m:e>
-                          <m:r>
-                            <a:rPr lang="en-US" sz="2000" b="0" i="1" smtClean="0">
-                              <a:latin typeface="Cambria Math" panose="02040503050406030204" pitchFamily="18" charset="0"/>
-                            </a:rPr>
-                            <m:t>𝑑</m:t>
-                          </m:r>
-                        </m:e>
-                        <m:sub>
-                          <m:r>
-                            <a:rPr lang="en-US" sz="2000" b="0" i="1" smtClean="0">
-                              <a:latin typeface="Cambria Math" panose="02040503050406030204" pitchFamily="18" charset="0"/>
-                            </a:rPr>
-                            <m:t>2</m:t>
-                          </m:r>
-                        </m:sub>
-                      </m:sSub>
-                      <m:r>
-                        <a:rPr lang="en-US" sz="2000" b="0" i="1" smtClean="0">
-                          <a:latin typeface="Cambria Math" panose="02040503050406030204" pitchFamily="18" charset="0"/>
-                        </a:rPr>
-                        <m:t>:</m:t>
-                      </m:r>
-                    </m:oMath>
-                  </m:oMathPara>
-                </a14:m>
-                <a:endParaRPr lang="en-US" sz="2000" dirty="0"/>
-              </a:p>
-            </p:txBody>
-          </p:sp>
-        </mc:Choice>
-        <mc:Fallback>
-          <p:sp>
-            <p:nvSpPr>
-              <p:cNvPr id="15" name="TextBox 14">
-                <a:extLst>
-                  <a:ext uri="{FF2B5EF4-FFF2-40B4-BE49-F238E27FC236}">
-                    <a16:creationId xmlns:a16="http://schemas.microsoft.com/office/drawing/2014/main" id="{65E2CB8C-5F8F-CA93-F645-ABBFACC2BC17}"/>
-                  </a:ext>
-                </a:extLst>
-              </p:cNvPr>
-              <p:cNvSpPr txBox="1">
-                <a:spLocks noRot="1" noChangeAspect="1" noMove="1" noResize="1" noEditPoints="1" noAdjustHandles="1" noChangeArrowheads="1" noChangeShapeType="1" noTextEdit="1"/>
-              </p:cNvSpPr>
-              <p:nvPr/>
-            </p:nvSpPr>
-            <p:spPr>
-              <a:xfrm>
-                <a:off x="6421819" y="6141014"/>
-                <a:ext cx="482267" cy="369643"/>
-              </a:xfrm>
-              <a:prstGeom prst="rect">
-                <a:avLst/>
-              </a:prstGeom>
-              <a:blipFill>
-                <a:blip r:embed="rId7"/>
-                <a:stretch>
-                  <a:fillRect b="-10000"/>
-                </a:stretch>
-              </a:blipFill>
-            </p:spPr>
-            <p:txBody>
-              <a:bodyPr/>
-              <a:lstStyle/>
-              <a:p>
-                <a:r>
-                  <a:rPr lang="en-US">
-                    <a:noFill/>
-                  </a:rPr>
-                  <a:t> </a:t>
-                </a:r>
-              </a:p>
-            </p:txBody>
-          </p:sp>
-        </mc:Fallback>
-      </mc:AlternateContent>
-      <p:sp>
-        <p:nvSpPr>
-          <p:cNvPr id="16" name="TextBox 15">
-            <a:extLst>
-              <a:ext uri="{FF2B5EF4-FFF2-40B4-BE49-F238E27FC236}">
-                <a16:creationId xmlns:a16="http://schemas.microsoft.com/office/drawing/2014/main" id="{54E66330-13DE-BBAC-0A6C-1963A6447FBC}"/>
-              </a:ext>
-            </a:extLst>
-          </p:cNvPr>
-          <p:cNvSpPr txBox="1"/>
-          <p:nvPr/>
+      <p:sp>
+        <p:nvSpPr>
+          <p:cNvPr id="2" name="Title 1">
+            <a:extLst>
+              <a:ext uri="{FF2B5EF4-FFF2-40B4-BE49-F238E27FC236}">
+                <a16:creationId xmlns:a16="http://schemas.microsoft.com/office/drawing/2014/main" id="{341E9A3C-EBA0-BCA9-705D-52020F2F013C}"/>
+              </a:ext>
+            </a:extLst>
+          </p:cNvPr>
+          <p:cNvSpPr>
+            <a:spLocks noGrp="1"/>
+          </p:cNvSpPr>
+          <p:nvPr>
+            <p:ph type="title"/>
+          </p:nvPr>
         </p:nvSpPr>
         <p:spPr>
           <a:xfrm>
-            <a:off x="2882107" y="5787823"/>
-            <a:ext cx="1961520" cy="341209"/>
+            <a:off x="-1" y="1"/>
+            <a:ext cx="5357248" cy="1363850"/>
+          </a:xfrm>
+        </p:spPr>
+        <p:txBody>
+          <a:bodyPr>
+            <a:normAutofit/>
+          </a:bodyPr>
+          <a:lstStyle/>
+          <a:p>
+            <a:r>
+              <a:rPr lang="en-US" dirty="0"/>
+              <a:t>Let’s build a model!</a:t>
+            </a:r>
+            <a:br>
+              <a:rPr lang="en-US" dirty="0"/>
+            </a:br>
+            <a:r>
+              <a:rPr lang="en-US" dirty="0"/>
+              <a:t>(Chemotaxis)</a:t>
+            </a:r>
+          </a:p>
+        </p:txBody>
+      </p:sp>
+      <p:pic>
+        <p:nvPicPr>
+          <p:cNvPr id="4" name="Picture 3" descr="A group of orange dots in the sky&#10;&#10;AI-generated content may be incorrect.">
+            <a:extLst>
+              <a:ext uri="{FF2B5EF4-FFF2-40B4-BE49-F238E27FC236}">
+                <a16:creationId xmlns:a16="http://schemas.microsoft.com/office/drawing/2014/main" id="{8073743F-7696-2BAE-2F60-3966DE54B982}"/>
+              </a:ext>
+            </a:extLst>
+          </p:cNvPr>
+          <p:cNvPicPr>
+            <a:picLocks noChangeAspect="1"/>
+          </p:cNvPicPr>
+          <p:nvPr/>
+        </p:nvPicPr>
+        <p:blipFill>
+          <a:blip r:embed="rId2"/>
+          <a:srcRect l="12598" r="12655"/>
+          <a:stretch>
+            <a:fillRect/>
+          </a:stretch>
+        </p:blipFill>
+        <p:spPr>
+          <a:xfrm>
+            <a:off x="5357247" y="0"/>
+            <a:ext cx="6834753" cy="6858000"/>
           </a:xfrm>
           <a:prstGeom prst="rect">
             <a:avLst/>
           </a:prstGeom>
-          <a:noFill/>
         </p:spPr>
-        <p:txBody>
-          <a:bodyPr wrap="none" rtlCol="0">
-            <a:spAutoFit/>
-          </a:bodyPr>
-          <a:lstStyle/>
-          <a:p>
-            <a:r>
-              <a:rPr lang="en-US" dirty="0"/>
-              <a:t>Growth rate of rabbits</a:t>
-            </a:r>
-          </a:p>
-        </p:txBody>
-      </p:sp>
-      <p:sp>
-        <p:nvSpPr>
-          <p:cNvPr id="17" name="TextBox 16">
-            <a:extLst>
-              <a:ext uri="{FF2B5EF4-FFF2-40B4-BE49-F238E27FC236}">
-                <a16:creationId xmlns:a16="http://schemas.microsoft.com/office/drawing/2014/main" id="{A2F7E5E7-0F21-6B8A-AD71-06BA9F8FC83C}"/>
-              </a:ext>
-            </a:extLst>
-          </p:cNvPr>
-          <p:cNvSpPr txBox="1"/>
-          <p:nvPr/>
-        </p:nvSpPr>
-        <p:spPr>
-          <a:xfrm>
-            <a:off x="2882107" y="6195397"/>
-            <a:ext cx="1816452" cy="341209"/>
-          </a:xfrm>
-          <a:prstGeom prst="rect">
-            <a:avLst/>
-          </a:prstGeom>
-          <a:noFill/>
-        </p:spPr>
-        <p:txBody>
-          <a:bodyPr wrap="none" rtlCol="0">
-            <a:spAutoFit/>
-          </a:bodyPr>
-          <a:lstStyle/>
-          <a:p>
-            <a:r>
-              <a:rPr lang="en-US" dirty="0"/>
-              <a:t>Growth rate of foxes</a:t>
-            </a:r>
-          </a:p>
-        </p:txBody>
-      </p:sp>
-      <p:sp>
-        <p:nvSpPr>
-          <p:cNvPr id="18" name="TextBox 17">
-            <a:extLst>
-              <a:ext uri="{FF2B5EF4-FFF2-40B4-BE49-F238E27FC236}">
-                <a16:creationId xmlns:a16="http://schemas.microsoft.com/office/drawing/2014/main" id="{95B9902C-715E-B2EA-1C21-71D6EB6150D7}"/>
-              </a:ext>
-            </a:extLst>
-          </p:cNvPr>
-          <p:cNvSpPr txBox="1"/>
-          <p:nvPr/>
-        </p:nvSpPr>
-        <p:spPr>
-          <a:xfrm>
-            <a:off x="7012671" y="5745721"/>
-            <a:ext cx="1854188" cy="341209"/>
-          </a:xfrm>
-          <a:prstGeom prst="rect">
-            <a:avLst/>
-          </a:prstGeom>
-          <a:noFill/>
-        </p:spPr>
-        <p:txBody>
-          <a:bodyPr wrap="none" rtlCol="0">
-            <a:spAutoFit/>
-          </a:bodyPr>
-          <a:lstStyle/>
-          <a:p>
-            <a:r>
-              <a:rPr lang="en-US" dirty="0"/>
-              <a:t>Death rate of rabbits</a:t>
-            </a:r>
-          </a:p>
-        </p:txBody>
-      </p:sp>
-      <p:sp>
-        <p:nvSpPr>
-          <p:cNvPr id="19" name="TextBox 18">
-            <a:extLst>
-              <a:ext uri="{FF2B5EF4-FFF2-40B4-BE49-F238E27FC236}">
-                <a16:creationId xmlns:a16="http://schemas.microsoft.com/office/drawing/2014/main" id="{70C007C7-17B9-B644-E900-ACBD2DE9E23F}"/>
-              </a:ext>
-            </a:extLst>
-          </p:cNvPr>
-          <p:cNvSpPr txBox="1"/>
-          <p:nvPr/>
-        </p:nvSpPr>
-        <p:spPr>
-          <a:xfrm>
-            <a:off x="7012671" y="6153294"/>
-            <a:ext cx="1709119" cy="341209"/>
-          </a:xfrm>
-          <a:prstGeom prst="rect">
-            <a:avLst/>
-          </a:prstGeom>
-          <a:noFill/>
-        </p:spPr>
-        <p:txBody>
-          <a:bodyPr wrap="none" rtlCol="0">
-            <a:spAutoFit/>
-          </a:bodyPr>
-          <a:lstStyle/>
-          <a:p>
-            <a:r>
-              <a:rPr lang="en-US" dirty="0"/>
-              <a:t>Death rate of foxes</a:t>
-            </a:r>
-          </a:p>
-        </p:txBody>
-      </p:sp>
-      <p:sp>
-        <p:nvSpPr>
-          <p:cNvPr id="22" name="TextBox 21">
-            <a:extLst>
-              <a:ext uri="{FF2B5EF4-FFF2-40B4-BE49-F238E27FC236}">
-                <a16:creationId xmlns:a16="http://schemas.microsoft.com/office/drawing/2014/main" id="{9999D3B9-3B4F-5E7A-C7EF-9663CF9412E6}"/>
-              </a:ext>
-            </a:extLst>
-          </p:cNvPr>
-          <p:cNvSpPr txBox="1"/>
-          <p:nvPr/>
-        </p:nvSpPr>
-        <p:spPr>
-          <a:xfrm>
-            <a:off x="1404515" y="2124348"/>
-            <a:ext cx="2098098" cy="646331"/>
-          </a:xfrm>
-          <a:prstGeom prst="rect">
-            <a:avLst/>
-          </a:prstGeom>
-          <a:noFill/>
-        </p:spPr>
-        <p:txBody>
-          <a:bodyPr wrap="square" rtlCol="0">
-            <a:spAutoFit/>
-          </a:bodyPr>
-          <a:lstStyle/>
-          <a:p>
-            <a:r>
-              <a:rPr lang="en-US" dirty="0"/>
-              <a:t>Rabbit pop. in</a:t>
-            </a:r>
-          </a:p>
-          <a:p>
-            <a:r>
-              <a:rPr lang="en-US" dirty="0"/>
-              <a:t>next generation</a:t>
-            </a:r>
-          </a:p>
-        </p:txBody>
-      </p:sp>
-      <p:sp>
-        <p:nvSpPr>
-          <p:cNvPr id="23" name="TextBox 22">
-            <a:extLst>
-              <a:ext uri="{FF2B5EF4-FFF2-40B4-BE49-F238E27FC236}">
-                <a16:creationId xmlns:a16="http://schemas.microsoft.com/office/drawing/2014/main" id="{FCC2FF63-5C0E-F7DE-25D9-359C8CEE05C9}"/>
-              </a:ext>
-            </a:extLst>
-          </p:cNvPr>
-          <p:cNvSpPr txBox="1"/>
-          <p:nvPr/>
-        </p:nvSpPr>
-        <p:spPr>
-          <a:xfrm>
-            <a:off x="1404514" y="3960015"/>
-            <a:ext cx="2098098" cy="646331"/>
-          </a:xfrm>
-          <a:prstGeom prst="rect">
-            <a:avLst/>
-          </a:prstGeom>
-          <a:noFill/>
-        </p:spPr>
-        <p:txBody>
-          <a:bodyPr wrap="square" rtlCol="0">
-            <a:spAutoFit/>
-          </a:bodyPr>
-          <a:lstStyle/>
-          <a:p>
-            <a:r>
-              <a:rPr lang="en-US" dirty="0"/>
-              <a:t>Fox pop. in</a:t>
-            </a:r>
-          </a:p>
-          <a:p>
-            <a:r>
-              <a:rPr lang="en-US" dirty="0"/>
-              <a:t>next generation</a:t>
-            </a:r>
-          </a:p>
-        </p:txBody>
-      </p:sp>
-      <p:sp>
-        <p:nvSpPr>
-          <p:cNvPr id="25" name="TextBox 24">
-            <a:extLst>
-              <a:ext uri="{FF2B5EF4-FFF2-40B4-BE49-F238E27FC236}">
-                <a16:creationId xmlns:a16="http://schemas.microsoft.com/office/drawing/2014/main" id="{6830B1AE-F0DE-CEC9-5DA3-411CCFA766CF}"/>
-              </a:ext>
-            </a:extLst>
-          </p:cNvPr>
-          <p:cNvSpPr txBox="1"/>
-          <p:nvPr/>
-        </p:nvSpPr>
-        <p:spPr>
-          <a:xfrm>
-            <a:off x="5812221" y="3090113"/>
-            <a:ext cx="1565172" cy="369332"/>
-          </a:xfrm>
-          <a:prstGeom prst="rect">
-            <a:avLst/>
-          </a:prstGeom>
-          <a:noFill/>
-        </p:spPr>
-        <p:txBody>
-          <a:bodyPr wrap="none" rtlCol="0">
-            <a:spAutoFit/>
-          </a:bodyPr>
-          <a:lstStyle/>
-          <a:p>
-            <a:r>
-              <a:rPr lang="en-US" dirty="0"/>
-              <a:t>Rabbit growth</a:t>
-            </a:r>
-          </a:p>
-        </p:txBody>
-      </p:sp>
-      <p:sp>
-        <p:nvSpPr>
-          <p:cNvPr id="26" name="TextBox 25">
-            <a:extLst>
-              <a:ext uri="{FF2B5EF4-FFF2-40B4-BE49-F238E27FC236}">
-                <a16:creationId xmlns:a16="http://schemas.microsoft.com/office/drawing/2014/main" id="{04A43354-5EB5-D7F4-7B51-290A6809A55B}"/>
-              </a:ext>
-            </a:extLst>
-          </p:cNvPr>
-          <p:cNvSpPr txBox="1"/>
-          <p:nvPr/>
-        </p:nvSpPr>
-        <p:spPr>
-          <a:xfrm>
-            <a:off x="7939204" y="3095630"/>
-            <a:ext cx="1459951" cy="369332"/>
-          </a:xfrm>
-          <a:prstGeom prst="rect">
-            <a:avLst/>
-          </a:prstGeom>
-          <a:noFill/>
-        </p:spPr>
-        <p:txBody>
-          <a:bodyPr wrap="none" rtlCol="0">
-            <a:spAutoFit/>
-          </a:bodyPr>
-          <a:lstStyle/>
-          <a:p>
-            <a:r>
-              <a:rPr lang="en-US" dirty="0"/>
-              <a:t>Rabbit death</a:t>
-            </a:r>
-          </a:p>
-        </p:txBody>
-      </p:sp>
-      <p:sp>
-        <p:nvSpPr>
-          <p:cNvPr id="27" name="TextBox 26">
-            <a:extLst>
-              <a:ext uri="{FF2B5EF4-FFF2-40B4-BE49-F238E27FC236}">
-                <a16:creationId xmlns:a16="http://schemas.microsoft.com/office/drawing/2014/main" id="{F1FBFA94-B1EB-E461-7294-4A9F931C9E06}"/>
-              </a:ext>
-            </a:extLst>
-          </p:cNvPr>
-          <p:cNvSpPr txBox="1"/>
-          <p:nvPr/>
-        </p:nvSpPr>
-        <p:spPr>
-          <a:xfrm>
-            <a:off x="6096000" y="4866224"/>
-            <a:ext cx="1255793" cy="369332"/>
-          </a:xfrm>
-          <a:prstGeom prst="rect">
-            <a:avLst/>
-          </a:prstGeom>
-          <a:noFill/>
-        </p:spPr>
-        <p:txBody>
-          <a:bodyPr wrap="none" rtlCol="0">
-            <a:spAutoFit/>
-          </a:bodyPr>
-          <a:lstStyle/>
-          <a:p>
-            <a:r>
-              <a:rPr lang="en-US" dirty="0"/>
-              <a:t>Fox growth</a:t>
-            </a:r>
-          </a:p>
-        </p:txBody>
-      </p:sp>
-      <p:sp>
-        <p:nvSpPr>
-          <p:cNvPr id="28" name="TextBox 27">
-            <a:extLst>
-              <a:ext uri="{FF2B5EF4-FFF2-40B4-BE49-F238E27FC236}">
-                <a16:creationId xmlns:a16="http://schemas.microsoft.com/office/drawing/2014/main" id="{F0E9EC61-B563-A6B3-B8BD-AE14E4420DA7}"/>
-              </a:ext>
-            </a:extLst>
-          </p:cNvPr>
-          <p:cNvSpPr txBox="1"/>
-          <p:nvPr/>
-        </p:nvSpPr>
-        <p:spPr>
-          <a:xfrm>
-            <a:off x="8291573" y="4845138"/>
-            <a:ext cx="1150571" cy="369332"/>
-          </a:xfrm>
-          <a:prstGeom prst="rect">
-            <a:avLst/>
-          </a:prstGeom>
-          <a:noFill/>
-        </p:spPr>
-        <p:txBody>
-          <a:bodyPr wrap="none" rtlCol="0">
-            <a:spAutoFit/>
-          </a:bodyPr>
-          <a:lstStyle/>
-          <a:p>
-            <a:r>
-              <a:rPr lang="en-US" dirty="0"/>
-              <a:t>Fox death</a:t>
-            </a:r>
-          </a:p>
-        </p:txBody>
-      </p:sp>
-      <p:sp>
-        <p:nvSpPr>
-          <p:cNvPr id="6" name="Title 1">
-            <a:extLst>
-              <a:ext uri="{FF2B5EF4-FFF2-40B4-BE49-F238E27FC236}">
-                <a16:creationId xmlns:a16="http://schemas.microsoft.com/office/drawing/2014/main" id="{92FE2944-C956-978C-3EC2-5F802151FD4D}"/>
-              </a:ext>
-            </a:extLst>
-          </p:cNvPr>
-          <p:cNvSpPr>
-            <a:spLocks noGrp="1"/>
-          </p:cNvSpPr>
-          <p:nvPr>
-            <p:ph type="title"/>
-          </p:nvPr>
-        </p:nvSpPr>
-        <p:spPr>
-          <a:xfrm>
-            <a:off x="838200" y="365125"/>
-            <a:ext cx="10515600" cy="1325563"/>
-          </a:xfrm>
-        </p:spPr>
-        <p:txBody>
-          <a:bodyPr/>
-          <a:lstStyle/>
-          <a:p>
-            <a:r>
-              <a:rPr lang="en-US" dirty="0"/>
-              <a:t>Modeling the Rabbit-Fox interactions</a:t>
-            </a:r>
-          </a:p>
-        </p:txBody>
-      </p:sp>
-    </p:spTree>
-    <p:extLst>
-      <p:ext uri="{BB962C8B-B14F-4D97-AF65-F5344CB8AC3E}">
-        <p14:creationId xmlns:p14="http://schemas.microsoft.com/office/powerpoint/2010/main" val="185672550"/>
-      </p:ext>
-    </p:extLst>
-  </p:cSld>
-  <p:clrMapOvr>
-    <a:masterClrMapping/>
-  </p:clrMapOvr>
-</p:sld>
-</file>
-
-<file path=ppt/slides/slide11.xml><?xml version="1.0" encoding="utf-8"?>
-<p:sld xmlns:a="http://schemas.openxmlformats.org/drawingml/2006/main" xmlns:r="http://schemas.openxmlformats.org/officeDocument/2006/relationships" xmlns:p="http://schemas.openxmlformats.org/presentationml/2006/main">
-  <p:cSld>
-    <p:spTree>
-      <p:nvGrpSpPr>
-        <p:cNvPr id="1" name=""/>
-        <p:cNvGrpSpPr/>
-        <p:nvPr/>
-      </p:nvGrpSpPr>
-      <p:grpSpPr>
-        <a:xfrm>
-          <a:off x="0" y="0"/>
-          <a:ext cx="0" cy="0"/>
-          <a:chOff x="0" y="0"/>
-          <a:chExt cx="0" cy="0"/>
-        </a:xfrm>
-      </p:grpSpPr>
-      <p:sp>
-        <p:nvSpPr>
-          <p:cNvPr id="2" name="Title 1">
-            <a:extLst>
-              <a:ext uri="{FF2B5EF4-FFF2-40B4-BE49-F238E27FC236}">
-                <a16:creationId xmlns:a16="http://schemas.microsoft.com/office/drawing/2014/main" id="{052061DB-BC45-E25C-A798-4FA005192E21}"/>
-              </a:ext>
-            </a:extLst>
-          </p:cNvPr>
-          <p:cNvSpPr>
-            <a:spLocks noGrp="1"/>
-          </p:cNvSpPr>
-          <p:nvPr>
-            <p:ph type="title"/>
-          </p:nvPr>
-        </p:nvSpPr>
-        <p:spPr>
-          <a:xfrm>
-            <a:off x="838200" y="2216227"/>
-            <a:ext cx="10515600" cy="2199656"/>
-          </a:xfrm>
-        </p:spPr>
-        <p:txBody>
-          <a:bodyPr>
-            <a:normAutofit fontScale="90000"/>
-          </a:bodyPr>
-          <a:lstStyle/>
-          <a:p>
-            <a:pPr algn="ctr"/>
-            <a:r>
-              <a:rPr lang="en-US" dirty="0"/>
-              <a:t>Predicting the population dynamics of</a:t>
-            </a:r>
-            <a:br>
-              <a:rPr lang="en-US" dirty="0"/>
-            </a:br>
-            <a:r>
-              <a:rPr lang="en-US" dirty="0"/>
-              <a:t>rabbits and foxes</a:t>
-            </a:r>
-            <a:br>
-              <a:rPr lang="en-US" dirty="0"/>
-            </a:br>
-            <a:br>
-              <a:rPr lang="en-US" dirty="0"/>
-            </a:br>
-            <a:r>
-              <a:rPr lang="en-US" dirty="0"/>
-              <a:t>1. using Google Spreadsheets</a:t>
-            </a:r>
-            <a:br>
-              <a:rPr lang="en-US" dirty="0"/>
-            </a:br>
-            <a:r>
-              <a:rPr lang="en-US" dirty="0"/>
-              <a:t>2. using Python and for loops</a:t>
-            </a:r>
-          </a:p>
-        </p:txBody>
-      </p:sp>
-    </p:spTree>
-    <p:extLst>
-      <p:ext uri="{BB962C8B-B14F-4D97-AF65-F5344CB8AC3E}">
-        <p14:creationId xmlns:p14="http://schemas.microsoft.com/office/powerpoint/2010/main" val="3659151056"/>
-      </p:ext>
-    </p:extLst>
-  </p:cSld>
-  <p:clrMapOvr>
-    <a:masterClrMapping/>
-  </p:clrMapOvr>
-</p:sld>
-</file>
-
-<file path=ppt/slides/slide12.xml><?xml version="1.0" encoding="utf-8"?>
-<p:sld xmlns:a="http://schemas.openxmlformats.org/drawingml/2006/main" xmlns:r="http://schemas.openxmlformats.org/officeDocument/2006/relationships" xmlns:p="http://schemas.openxmlformats.org/presentationml/2006/main">
-  <p:cSld>
-    <p:spTree>
-      <p:nvGrpSpPr>
-        <p:cNvPr id="1" name=""/>
-        <p:cNvGrpSpPr/>
-        <p:nvPr/>
-      </p:nvGrpSpPr>
-      <p:grpSpPr>
-        <a:xfrm>
-          <a:off x="0" y="0"/>
-          <a:ext cx="0" cy="0"/>
-          <a:chOff x="0" y="0"/>
-          <a:chExt cx="0" cy="0"/>
-        </a:xfrm>
-      </p:grpSpPr>
-      <p:sp>
-        <p:nvSpPr>
-          <p:cNvPr id="2" name="Title 1">
-            <a:extLst>
-              <a:ext uri="{FF2B5EF4-FFF2-40B4-BE49-F238E27FC236}">
-                <a16:creationId xmlns:a16="http://schemas.microsoft.com/office/drawing/2014/main" id="{C64522BA-38EF-CC24-9435-1A82F05FFCFA}"/>
-              </a:ext>
-            </a:extLst>
-          </p:cNvPr>
-          <p:cNvSpPr>
-            <a:spLocks noGrp="1"/>
-          </p:cNvSpPr>
-          <p:nvPr>
-            <p:ph type="title"/>
-          </p:nvPr>
-        </p:nvSpPr>
-        <p:spPr/>
-        <p:txBody>
-          <a:bodyPr>
-            <a:normAutofit/>
-          </a:bodyPr>
-          <a:lstStyle/>
-          <a:p>
-            <a:r>
-              <a:rPr lang="en-US" sz="3600" dirty="0"/>
-              <a:t>Modeling oscillations in the field and in our bodies</a:t>
-            </a:r>
-          </a:p>
-        </p:txBody>
-      </p:sp>
+      </p:pic>
       <p:pic>
         <p:nvPicPr>
-          <p:cNvPr id="1026" name="Picture 2" descr="hare-lynx graph">
-            <a:extLst>
-              <a:ext uri="{FF2B5EF4-FFF2-40B4-BE49-F238E27FC236}">
-                <a16:creationId xmlns:a16="http://schemas.microsoft.com/office/drawing/2014/main" id="{90F5572B-141B-AB38-41A9-0938555C94BA}"/>
+          <p:cNvPr id="2052" name="Picture 4" descr="Chemotactic behavior of E. coli: run and tumble. | Download Scientific ...">
+            <a:extLst>
+              <a:ext uri="{FF2B5EF4-FFF2-40B4-BE49-F238E27FC236}">
+                <a16:creationId xmlns:a16="http://schemas.microsoft.com/office/drawing/2014/main" id="{84694026-3B03-282A-CA16-FCA3F272F6C7}"/>
               </a:ext>
             </a:extLst>
           </p:cNvPr>
@@ -5820,7 +3544,7 @@
           <p:nvPr/>
         </p:nvPicPr>
         <p:blipFill>
-          <a:blip r:embed="rId2">
+          <a:blip r:embed="rId3">
             <a:extLst>
               <a:ext uri="{28A0092B-C50C-407E-A947-70E740481C1C}">
                 <a14:useLocalDpi xmlns:a14="http://schemas.microsoft.com/office/drawing/2010/main" val="0"/>
@@ -5834,8 +3558,8 @@
         </p:blipFill>
         <p:spPr bwMode="auto">
           <a:xfrm>
-            <a:off x="838200" y="2953405"/>
-            <a:ext cx="5493332" cy="2622331"/>
+            <a:off x="0" y="3971830"/>
+            <a:ext cx="5186563" cy="2886170"/>
           </a:xfrm>
           <a:prstGeom prst="rect">
             <a:avLst/>
@@ -5852,496 +3576,10 @@
           </a:extLst>
         </p:spPr>
       </p:pic>
-      <p:sp>
-        <p:nvSpPr>
-          <p:cNvPr id="7" name="TextBox 6">
-            <a:extLst>
-              <a:ext uri="{FF2B5EF4-FFF2-40B4-BE49-F238E27FC236}">
-                <a16:creationId xmlns:a16="http://schemas.microsoft.com/office/drawing/2014/main" id="{FD174E58-8587-C289-2552-0C59781825D6}"/>
-              </a:ext>
-            </a:extLst>
-          </p:cNvPr>
-          <p:cNvSpPr txBox="1"/>
-          <p:nvPr/>
-        </p:nvSpPr>
-        <p:spPr>
-          <a:xfrm>
-            <a:off x="838200" y="6228289"/>
-            <a:ext cx="5257800" cy="261610"/>
-          </a:xfrm>
-          <a:prstGeom prst="rect">
-            <a:avLst/>
-          </a:prstGeom>
-          <a:noFill/>
-        </p:spPr>
-        <p:txBody>
-          <a:bodyPr wrap="square">
-            <a:spAutoFit/>
-          </a:bodyPr>
-          <a:lstStyle/>
-          <a:p>
-            <a:pPr algn="ctr"/>
-            <a:r>
-              <a:rPr lang="en-US" sz="1100" dirty="0"/>
-              <a:t>https://www2.nau.edu/lrm22/lessons/</a:t>
-            </a:r>
-            <a:r>
-              <a:rPr lang="en-US" sz="1100" dirty="0" err="1"/>
-              <a:t>predator_prey</a:t>
-            </a:r>
-            <a:r>
-              <a:rPr lang="en-US" sz="1100" dirty="0"/>
-              <a:t>/</a:t>
-            </a:r>
-            <a:r>
-              <a:rPr lang="en-US" sz="1100" dirty="0" err="1"/>
-              <a:t>predator_prey.html</a:t>
-            </a:r>
-            <a:endParaRPr lang="en-US" sz="1100" dirty="0"/>
-          </a:p>
-        </p:txBody>
-      </p:sp>
-      <p:pic>
-        <p:nvPicPr>
-          <p:cNvPr id="1028" name="Picture 4">
-            <a:extLst>
-              <a:ext uri="{FF2B5EF4-FFF2-40B4-BE49-F238E27FC236}">
-                <a16:creationId xmlns:a16="http://schemas.microsoft.com/office/drawing/2014/main" id="{BFDA6355-139A-5EEE-7F26-C11B2AE23FA0}"/>
-              </a:ext>
-            </a:extLst>
-          </p:cNvPr>
-          <p:cNvPicPr>
-            <a:picLocks noChangeAspect="1" noChangeArrowheads="1"/>
-          </p:cNvPicPr>
-          <p:nvPr/>
-        </p:nvPicPr>
-        <p:blipFill rotWithShape="1">
-          <a:blip r:embed="rId3">
-            <a:extLst>
-              <a:ext uri="{28A0092B-C50C-407E-A947-70E740481C1C}">
-                <a14:useLocalDpi xmlns:a14="http://schemas.microsoft.com/office/drawing/2010/main" val="0"/>
-              </a:ext>
-            </a:extLst>
-          </a:blip>
-          <a:srcRect t="27294" r="20777"/>
-          <a:stretch/>
-        </p:blipFill>
-        <p:spPr bwMode="auto">
-          <a:xfrm>
-            <a:off x="3216912" y="2039242"/>
-            <a:ext cx="2420938" cy="1481193"/>
-          </a:xfrm>
-          <a:prstGeom prst="rect">
-            <a:avLst/>
-          </a:prstGeom>
-          <a:noFill/>
-          <a:extLst>
-            <a:ext uri="{909E8E84-426E-40DD-AFC4-6F175D3DCCD1}">
-              <a14:hiddenFill xmlns:a14="http://schemas.microsoft.com/office/drawing/2010/main">
-                <a:solidFill>
-                  <a:srgbClr val="FFFFFF"/>
-                </a:solidFill>
-              </a14:hiddenFill>
-            </a:ext>
-          </a:extLst>
-        </p:spPr>
-      </p:pic>
-      <p:sp>
-        <p:nvSpPr>
-          <p:cNvPr id="8" name="TextBox 7">
-            <a:extLst>
-              <a:ext uri="{FF2B5EF4-FFF2-40B4-BE49-F238E27FC236}">
-                <a16:creationId xmlns:a16="http://schemas.microsoft.com/office/drawing/2014/main" id="{6A500637-61D6-7D3B-4B23-8BC17B4E81CE}"/>
-              </a:ext>
-            </a:extLst>
-          </p:cNvPr>
-          <p:cNvSpPr txBox="1"/>
-          <p:nvPr/>
-        </p:nvSpPr>
-        <p:spPr>
-          <a:xfrm>
-            <a:off x="778604" y="2125504"/>
-            <a:ext cx="2806262" cy="523220"/>
-          </a:xfrm>
-          <a:prstGeom prst="rect">
-            <a:avLst/>
-          </a:prstGeom>
-          <a:noFill/>
-        </p:spPr>
-        <p:txBody>
-          <a:bodyPr wrap="square" rtlCol="0">
-            <a:spAutoFit/>
-          </a:bodyPr>
-          <a:lstStyle/>
-          <a:p>
-            <a:r>
-              <a:rPr lang="en-US" sz="2800" dirty="0"/>
-              <a:t>Hare and Lynx</a:t>
-            </a:r>
-          </a:p>
-        </p:txBody>
-      </p:sp>
-      <p:sp>
-        <p:nvSpPr>
-          <p:cNvPr id="10" name="Content Placeholder 2">
-            <a:extLst>
-              <a:ext uri="{FF2B5EF4-FFF2-40B4-BE49-F238E27FC236}">
-                <a16:creationId xmlns:a16="http://schemas.microsoft.com/office/drawing/2014/main" id="{26C813B5-E8B9-49CD-9328-BF5F5746A3FA}"/>
-              </a:ext>
-            </a:extLst>
-          </p:cNvPr>
-          <p:cNvSpPr txBox="1">
-            <a:spLocks/>
-          </p:cNvSpPr>
-          <p:nvPr/>
-        </p:nvSpPr>
-        <p:spPr>
-          <a:xfrm>
-            <a:off x="7550440" y="1976682"/>
-            <a:ext cx="2967446" cy="2904636"/>
-          </a:xfrm>
-          <a:prstGeom prst="rect">
-            <a:avLst/>
-          </a:prstGeom>
-        </p:spPr>
-        <p:txBody>
-          <a:bodyPr vert="horz" lIns="91440" tIns="45720" rIns="91440" bIns="45720" rtlCol="0">
-            <a:normAutofit/>
-          </a:bodyPr>
-          <a:lstStyle>
-            <a:lvl1pPr marL="228600" indent="-228600" algn="l" defTabSz="914400" rtl="0" eaLnBrk="1" latinLnBrk="0" hangingPunct="1">
-              <a:lnSpc>
-                <a:spcPct val="90000"/>
-              </a:lnSpc>
-              <a:spcBef>
-                <a:spcPts val="1000"/>
-              </a:spcBef>
-              <a:buFont typeface="Arial" panose="020B0604020202020204" pitchFamily="34" charset="0"/>
-              <a:buChar char="•"/>
-              <a:defRPr sz="2800" kern="1200">
-                <a:solidFill>
-                  <a:schemeClr val="tx1"/>
-                </a:solidFill>
-                <a:latin typeface="Avenir Book" panose="02000503020000020003" pitchFamily="2" charset="0"/>
-                <a:ea typeface="+mn-ea"/>
-                <a:cs typeface="+mn-cs"/>
-              </a:defRPr>
-            </a:lvl1pPr>
-            <a:lvl2pPr marL="685800" indent="-228600" algn="l" defTabSz="914400" rtl="0" eaLnBrk="1" latinLnBrk="0" hangingPunct="1">
-              <a:lnSpc>
-                <a:spcPct val="90000"/>
-              </a:lnSpc>
-              <a:spcBef>
-                <a:spcPts val="500"/>
-              </a:spcBef>
-              <a:buFont typeface="Arial" panose="020B0604020202020204" pitchFamily="34" charset="0"/>
-              <a:buChar char="•"/>
-              <a:defRPr sz="2400" kern="1200">
-                <a:solidFill>
-                  <a:schemeClr val="tx1"/>
-                </a:solidFill>
-                <a:latin typeface="Avenir Book" panose="02000503020000020003" pitchFamily="2" charset="0"/>
-                <a:ea typeface="+mn-ea"/>
-                <a:cs typeface="+mn-cs"/>
-              </a:defRPr>
-            </a:lvl2pPr>
-            <a:lvl3pPr marL="1143000" indent="-228600" algn="l" defTabSz="914400" rtl="0" eaLnBrk="1" latinLnBrk="0" hangingPunct="1">
-              <a:lnSpc>
-                <a:spcPct val="90000"/>
-              </a:lnSpc>
-              <a:spcBef>
-                <a:spcPts val="500"/>
-              </a:spcBef>
-              <a:buFont typeface="Arial" panose="020B0604020202020204" pitchFamily="34" charset="0"/>
-              <a:buChar char="•"/>
-              <a:defRPr sz="2000" kern="1200">
-                <a:solidFill>
-                  <a:schemeClr val="tx1"/>
-                </a:solidFill>
-                <a:latin typeface="Avenir Book" panose="02000503020000020003" pitchFamily="2" charset="0"/>
-                <a:ea typeface="+mn-ea"/>
-                <a:cs typeface="+mn-cs"/>
-              </a:defRPr>
-            </a:lvl3pPr>
-            <a:lvl4pPr marL="1600200" indent="-228600" algn="l" defTabSz="914400" rtl="0" eaLnBrk="1" latinLnBrk="0" hangingPunct="1">
-              <a:lnSpc>
-                <a:spcPct val="90000"/>
-              </a:lnSpc>
-              <a:spcBef>
-                <a:spcPts val="500"/>
-              </a:spcBef>
-              <a:buFont typeface="Arial" panose="020B0604020202020204" pitchFamily="34" charset="0"/>
-              <a:buChar char="•"/>
-              <a:defRPr sz="1800" kern="1200">
-                <a:solidFill>
-                  <a:schemeClr val="tx1"/>
-                </a:solidFill>
-                <a:latin typeface="Avenir Book" panose="02000503020000020003" pitchFamily="2" charset="0"/>
-                <a:ea typeface="+mn-ea"/>
-                <a:cs typeface="+mn-cs"/>
-              </a:defRPr>
-            </a:lvl4pPr>
-            <a:lvl5pPr marL="2057400" indent="-228600" algn="l" defTabSz="914400" rtl="0" eaLnBrk="1" latinLnBrk="0" hangingPunct="1">
-              <a:lnSpc>
-                <a:spcPct val="90000"/>
-              </a:lnSpc>
-              <a:spcBef>
-                <a:spcPts val="500"/>
-              </a:spcBef>
-              <a:buFont typeface="Arial" panose="020B0604020202020204" pitchFamily="34" charset="0"/>
-              <a:buChar char="•"/>
-              <a:defRPr sz="1800" kern="1200">
-                <a:solidFill>
-                  <a:schemeClr val="tx1"/>
-                </a:solidFill>
-                <a:latin typeface="Avenir Book" panose="02000503020000020003" pitchFamily="2" charset="0"/>
-                <a:ea typeface="+mn-ea"/>
-                <a:cs typeface="+mn-cs"/>
-              </a:defRPr>
-            </a:lvl5pPr>
-            <a:lvl6pPr marL="2514600" indent="-228600" algn="l" defTabSz="914400" rtl="0" eaLnBrk="1" latinLnBrk="0" hangingPunct="1">
-              <a:lnSpc>
-                <a:spcPct val="90000"/>
-              </a:lnSpc>
-              <a:spcBef>
-                <a:spcPts val="500"/>
-              </a:spcBef>
-              <a:buFont typeface="Arial" panose="020B0604020202020204" pitchFamily="34" charset="0"/>
-              <a:buChar char="•"/>
-              <a:defRPr sz="1800" kern="1200">
-                <a:solidFill>
-                  <a:schemeClr val="tx1"/>
-                </a:solidFill>
-                <a:latin typeface="+mn-lt"/>
-                <a:ea typeface="+mn-ea"/>
-                <a:cs typeface="+mn-cs"/>
-              </a:defRPr>
-            </a:lvl6pPr>
-            <a:lvl7pPr marL="2971800" indent="-228600" algn="l" defTabSz="914400" rtl="0" eaLnBrk="1" latinLnBrk="0" hangingPunct="1">
-              <a:lnSpc>
-                <a:spcPct val="90000"/>
-              </a:lnSpc>
-              <a:spcBef>
-                <a:spcPts val="500"/>
-              </a:spcBef>
-              <a:buFont typeface="Arial" panose="020B0604020202020204" pitchFamily="34" charset="0"/>
-              <a:buChar char="•"/>
-              <a:defRPr sz="1800" kern="1200">
-                <a:solidFill>
-                  <a:schemeClr val="tx1"/>
-                </a:solidFill>
-                <a:latin typeface="+mn-lt"/>
-                <a:ea typeface="+mn-ea"/>
-                <a:cs typeface="+mn-cs"/>
-              </a:defRPr>
-            </a:lvl7pPr>
-            <a:lvl8pPr marL="3429000" indent="-228600" algn="l" defTabSz="914400" rtl="0" eaLnBrk="1" latinLnBrk="0" hangingPunct="1">
-              <a:lnSpc>
-                <a:spcPct val="90000"/>
-              </a:lnSpc>
-              <a:spcBef>
-                <a:spcPts val="500"/>
-              </a:spcBef>
-              <a:buFont typeface="Arial" panose="020B0604020202020204" pitchFamily="34" charset="0"/>
-              <a:buChar char="•"/>
-              <a:defRPr sz="1800" kern="1200">
-                <a:solidFill>
-                  <a:schemeClr val="tx1"/>
-                </a:solidFill>
-                <a:latin typeface="+mn-lt"/>
-                <a:ea typeface="+mn-ea"/>
-                <a:cs typeface="+mn-cs"/>
-              </a:defRPr>
-            </a:lvl8pPr>
-            <a:lvl9pPr marL="3886200" indent="-228600" algn="l" defTabSz="914400" rtl="0" eaLnBrk="1" latinLnBrk="0" hangingPunct="1">
-              <a:lnSpc>
-                <a:spcPct val="90000"/>
-              </a:lnSpc>
-              <a:spcBef>
-                <a:spcPts val="500"/>
-              </a:spcBef>
-              <a:buFont typeface="Arial" panose="020B0604020202020204" pitchFamily="34" charset="0"/>
-              <a:buChar char="•"/>
-              <a:defRPr sz="1800" kern="1200">
-                <a:solidFill>
-                  <a:schemeClr val="tx1"/>
-                </a:solidFill>
-                <a:latin typeface="+mn-lt"/>
-                <a:ea typeface="+mn-ea"/>
-                <a:cs typeface="+mn-cs"/>
-              </a:defRPr>
-            </a:lvl9pPr>
-          </a:lstStyle>
-          <a:p>
-            <a:pPr marL="0" indent="0">
-              <a:buFont typeface="Arial" panose="020B0604020202020204" pitchFamily="34" charset="0"/>
-              <a:buNone/>
-            </a:pPr>
-            <a:r>
-              <a:rPr lang="en-US" sz="2400" dirty="0"/>
-              <a:t>Circadian clock</a:t>
-            </a:r>
-          </a:p>
-          <a:p>
-            <a:pPr marL="0" indent="0">
-              <a:buFont typeface="Arial" panose="020B0604020202020204" pitchFamily="34" charset="0"/>
-              <a:buNone/>
-            </a:pPr>
-            <a:r>
-              <a:rPr lang="en-US" sz="2400" dirty="0"/>
-              <a:t>~24 hours</a:t>
-            </a:r>
-          </a:p>
-        </p:txBody>
-      </p:sp>
-      <p:pic>
-        <p:nvPicPr>
-          <p:cNvPr id="12" name="Picture 6" descr="First 2017 Nobel Prize goes to discoverers of circadian rhythm genes">
-            <a:extLst>
-              <a:ext uri="{FF2B5EF4-FFF2-40B4-BE49-F238E27FC236}">
-                <a16:creationId xmlns:a16="http://schemas.microsoft.com/office/drawing/2014/main" id="{C983A59C-4185-294E-B543-8FAA14441060}"/>
-              </a:ext>
-            </a:extLst>
-          </p:cNvPr>
-          <p:cNvPicPr>
-            <a:picLocks noChangeAspect="1" noChangeArrowheads="1"/>
-          </p:cNvPicPr>
-          <p:nvPr/>
-        </p:nvPicPr>
-        <p:blipFill>
-          <a:blip r:embed="rId4">
-            <a:extLst>
-              <a:ext uri="{28A0092B-C50C-407E-A947-70E740481C1C}">
-                <a14:useLocalDpi xmlns:a14="http://schemas.microsoft.com/office/drawing/2010/main" val="0"/>
-              </a:ext>
-            </a:extLst>
-          </a:blip>
-          <a:srcRect/>
-          <a:stretch>
-            <a:fillRect/>
-          </a:stretch>
-        </p:blipFill>
-        <p:spPr bwMode="auto">
-          <a:xfrm>
-            <a:off x="8076158" y="3197772"/>
-            <a:ext cx="3040222" cy="2562685"/>
-          </a:xfrm>
-          <a:prstGeom prst="rect">
-            <a:avLst/>
-          </a:prstGeom>
-          <a:noFill/>
-          <a:extLst>
-            <a:ext uri="{909E8E84-426E-40DD-AFC4-6F175D3DCCD1}">
-              <a14:hiddenFill xmlns:a14="http://schemas.microsoft.com/office/drawing/2010/main">
-                <a:solidFill>
-                  <a:srgbClr val="FFFFFF"/>
-                </a:solidFill>
-              </a14:hiddenFill>
-            </a:ext>
-          </a:extLst>
-        </p:spPr>
-      </p:pic>
-      <p:pic>
-        <p:nvPicPr>
-          <p:cNvPr id="13" name="Picture 12">
-            <a:extLst>
-              <a:ext uri="{FF2B5EF4-FFF2-40B4-BE49-F238E27FC236}">
-                <a16:creationId xmlns:a16="http://schemas.microsoft.com/office/drawing/2014/main" id="{A4F4B4F3-B953-8664-161D-6598673FE5C4}"/>
-              </a:ext>
-            </a:extLst>
-          </p:cNvPr>
-          <p:cNvPicPr>
-            <a:picLocks noChangeAspect="1"/>
-          </p:cNvPicPr>
-          <p:nvPr/>
-        </p:nvPicPr>
-        <p:blipFill>
-          <a:blip r:embed="rId5">
-            <a:extLst>
-              <a:ext uri="{BEBA8EAE-BF5A-486C-A8C5-ECC9F3942E4B}">
-                <a14:imgProps xmlns:a14="http://schemas.microsoft.com/office/drawing/2010/main">
-                  <a14:imgLayer r:embed="rId6">
-                    <a14:imgEffect>
-                      <a14:backgroundRemoval t="8912" b="92598" l="9846" r="89865">
-                        <a14:foregroundMark x1="63996" y1="71299" x2="63996" y2="71299"/>
-                        <a14:foregroundMark x1="64479" y1="74320" x2="64768" y2="75076"/>
-                        <a14:foregroundMark x1="73069" y1="27039" x2="76834" y2="38218"/>
-                        <a14:foregroundMark x1="69595" y1="21903" x2="59170" y2="13142"/>
-                        <a14:foregroundMark x1="61293" y1="12840" x2="68243" y2="18278"/>
-                        <a14:foregroundMark x1="78668" y1="48792" x2="78185" y2="41692"/>
-                        <a14:foregroundMark x1="24710" y1="43353" x2="27510" y2="32024"/>
-                        <a14:foregroundMark x1="27510" y1="32024" x2="31660" y2="23716"/>
-                        <a14:foregroundMark x1="35425" y1="18278" x2="42375" y2="14653"/>
-                        <a14:foregroundMark x1="42375" y1="14653" x2="44498" y2="10272"/>
-                        <a14:foregroundMark x1="49324" y1="9063" x2="54633" y2="9366"/>
-                        <a14:foregroundMark x1="44981" y1="92598" x2="56467" y2="91390"/>
-                      </a14:backgroundRemoval>
-                    </a14:imgEffect>
-                  </a14:imgLayer>
-                </a14:imgProps>
-              </a:ext>
-            </a:extLst>
-          </a:blip>
-          <a:stretch>
-            <a:fillRect/>
-          </a:stretch>
-        </p:blipFill>
-        <p:spPr>
-          <a:xfrm>
-            <a:off x="9501088" y="1690688"/>
-            <a:ext cx="2632091" cy="1681896"/>
-          </a:xfrm>
-          <a:prstGeom prst="rect">
-            <a:avLst/>
-          </a:prstGeom>
-        </p:spPr>
-      </p:pic>
-      <p:sp>
-        <p:nvSpPr>
-          <p:cNvPr id="14" name="TextBox 13">
-            <a:extLst>
-              <a:ext uri="{FF2B5EF4-FFF2-40B4-BE49-F238E27FC236}">
-                <a16:creationId xmlns:a16="http://schemas.microsoft.com/office/drawing/2014/main" id="{C12A502D-9D4F-5E8C-0F4F-2A8A5E2638BB}"/>
-              </a:ext>
-            </a:extLst>
-          </p:cNvPr>
-          <p:cNvSpPr txBox="1"/>
-          <p:nvPr/>
-        </p:nvSpPr>
-        <p:spPr>
-          <a:xfrm>
-            <a:off x="8911438" y="6140347"/>
-            <a:ext cx="1779398" cy="307777"/>
-          </a:xfrm>
-          <a:prstGeom prst="rect">
-            <a:avLst/>
-          </a:prstGeom>
-          <a:noFill/>
-        </p:spPr>
-        <p:txBody>
-          <a:bodyPr wrap="none" rtlCol="0">
-            <a:spAutoFit/>
-          </a:bodyPr>
-          <a:lstStyle/>
-          <a:p>
-            <a:pPr algn="l"/>
-            <a:r>
-              <a:rPr lang="en-US" sz="1400" dirty="0" err="1">
-                <a:latin typeface="Avenir Book" panose="02000503020000020003" pitchFamily="2" charset="0"/>
-                <a:hlinkClick r:id="rId7"/>
-              </a:rPr>
-              <a:t>www.nobelprize.org</a:t>
-            </a:r>
-            <a:endParaRPr lang="en-US" sz="1400" dirty="0">
-              <a:latin typeface="Avenir Book" panose="02000503020000020003" pitchFamily="2" charset="0"/>
-            </a:endParaRPr>
-          </a:p>
-        </p:txBody>
-      </p:sp>
     </p:spTree>
     <p:extLst>
       <p:ext uri="{BB962C8B-B14F-4D97-AF65-F5344CB8AC3E}">
-        <p14:creationId xmlns:p14="http://schemas.microsoft.com/office/powerpoint/2010/main" val="2405548140"/>
+        <p14:creationId xmlns:p14="http://schemas.microsoft.com/office/powerpoint/2010/main" val="1000104525"/>
       </p:ext>
     </p:extLst>
   </p:cSld>
@@ -6623,425 +3861,10 @@
 <file path=ppt/slides/slide3.xml><?xml version="1.0" encoding="utf-8"?>
 <p:sld xmlns:a="http://schemas.openxmlformats.org/drawingml/2006/main" xmlns:r="http://schemas.openxmlformats.org/officeDocument/2006/relationships" xmlns:p="http://schemas.openxmlformats.org/presentationml/2006/main">
   <p:cSld>
-    <p:spTree>
-      <p:nvGrpSpPr>
-        <p:cNvPr id="1" name=""/>
-        <p:cNvGrpSpPr/>
-        <p:nvPr/>
-      </p:nvGrpSpPr>
-      <p:grpSpPr>
-        <a:xfrm>
-          <a:off x="0" y="0"/>
-          <a:ext cx="0" cy="0"/>
-          <a:chOff x="0" y="0"/>
-          <a:chExt cx="0" cy="0"/>
-        </a:xfrm>
-      </p:grpSpPr>
-      <p:pic>
-        <p:nvPicPr>
-          <p:cNvPr id="1026" name="Picture 2" descr="Fig. 2">
-            <a:extLst>
-              <a:ext uri="{FF2B5EF4-FFF2-40B4-BE49-F238E27FC236}">
-                <a16:creationId xmlns:a16="http://schemas.microsoft.com/office/drawing/2014/main" id="{42A11DEB-4488-E572-B26A-84C1C57B0FB8}"/>
-              </a:ext>
-            </a:extLst>
-          </p:cNvPr>
-          <p:cNvPicPr>
-            <a:picLocks noChangeAspect="1" noChangeArrowheads="1"/>
-          </p:cNvPicPr>
-          <p:nvPr/>
-        </p:nvPicPr>
-        <p:blipFill>
-          <a:blip r:embed="rId2">
-            <a:extLst>
-              <a:ext uri="{28A0092B-C50C-407E-A947-70E740481C1C}">
-                <a14:useLocalDpi xmlns:a14="http://schemas.microsoft.com/office/drawing/2010/main" val="0"/>
-              </a:ext>
-            </a:extLst>
-          </a:blip>
-          <a:srcRect/>
-          <a:stretch>
-            <a:fillRect/>
-          </a:stretch>
-        </p:blipFill>
-        <p:spPr bwMode="auto">
-          <a:xfrm>
-            <a:off x="3340480" y="442675"/>
-            <a:ext cx="5511040" cy="5470517"/>
-          </a:xfrm>
-          <a:prstGeom prst="rect">
-            <a:avLst/>
-          </a:prstGeom>
-          <a:noFill/>
-          <a:extLst>
-            <a:ext uri="{909E8E84-426E-40DD-AFC4-6F175D3DCCD1}">
-              <a14:hiddenFill xmlns:a14="http://schemas.microsoft.com/office/drawing/2010/main">
-                <a:solidFill>
-                  <a:srgbClr val="FFFFFF"/>
-                </a:solidFill>
-              </a14:hiddenFill>
-            </a:ext>
-          </a:extLst>
-        </p:spPr>
-      </p:pic>
-      <p:sp>
-        <p:nvSpPr>
-          <p:cNvPr id="5" name="TextBox 4">
-            <a:extLst>
-              <a:ext uri="{FF2B5EF4-FFF2-40B4-BE49-F238E27FC236}">
-                <a16:creationId xmlns:a16="http://schemas.microsoft.com/office/drawing/2014/main" id="{6D77F1FC-67C4-EF53-CEFD-1E6A88E68553}"/>
-              </a:ext>
-            </a:extLst>
-          </p:cNvPr>
-          <p:cNvSpPr txBox="1"/>
-          <p:nvPr/>
-        </p:nvSpPr>
-        <p:spPr>
-          <a:xfrm>
-            <a:off x="933582" y="6231265"/>
-            <a:ext cx="10420218" cy="523220"/>
-          </a:xfrm>
-          <a:prstGeom prst="rect">
-            <a:avLst/>
-          </a:prstGeom>
-          <a:noFill/>
-        </p:spPr>
-        <p:txBody>
-          <a:bodyPr wrap="square">
-            <a:spAutoFit/>
-          </a:bodyPr>
-          <a:lstStyle/>
-          <a:p>
-            <a:r>
-              <a:rPr lang="en-US" sz="1400" dirty="0" err="1"/>
-              <a:t>Lopatkin</a:t>
-            </a:r>
-            <a:r>
-              <a:rPr lang="en-US" sz="1400" dirty="0"/>
-              <a:t>, A.J., Collins, J.J. Predictive biology: modelling, understanding and harnessing microbial complexity. </a:t>
-            </a:r>
-            <a:r>
-              <a:rPr lang="en-US" sz="1400" i="1" dirty="0"/>
-              <a:t>Nat Rev </a:t>
-            </a:r>
-            <a:r>
-              <a:rPr lang="en-US" sz="1400" i="1" dirty="0" err="1"/>
-              <a:t>Microbiol</a:t>
-            </a:r>
-            <a:r>
-              <a:rPr lang="en-US" sz="1400" dirty="0"/>
-              <a:t> </a:t>
-            </a:r>
-            <a:r>
-              <a:rPr lang="en-US" sz="1400" b="1" dirty="0"/>
-              <a:t>18</a:t>
-            </a:r>
-            <a:r>
-              <a:rPr lang="en-US" sz="1400" dirty="0"/>
-              <a:t>, 507–520 (2020). https://</a:t>
-            </a:r>
-            <a:r>
-              <a:rPr lang="en-US" sz="1400" dirty="0" err="1"/>
-              <a:t>doi.org</a:t>
-            </a:r>
-            <a:r>
-              <a:rPr lang="en-US" sz="1400" dirty="0"/>
-              <a:t>/10.1038/s41579-020-0372-5</a:t>
-            </a:r>
-          </a:p>
-        </p:txBody>
-      </p:sp>
-      <p:sp>
-        <p:nvSpPr>
-          <p:cNvPr id="7" name="Rounded Rectangle 6">
-            <a:extLst>
-              <a:ext uri="{FF2B5EF4-FFF2-40B4-BE49-F238E27FC236}">
-                <a16:creationId xmlns:a16="http://schemas.microsoft.com/office/drawing/2014/main" id="{376621A0-E4F7-1041-E8CF-827D7A9F17C6}"/>
-              </a:ext>
-            </a:extLst>
-          </p:cNvPr>
-          <p:cNvSpPr/>
-          <p:nvPr/>
-        </p:nvSpPr>
-        <p:spPr>
-          <a:xfrm>
-            <a:off x="2878389" y="3314700"/>
-            <a:ext cx="2503170" cy="2686050"/>
-          </a:xfrm>
-          <a:prstGeom prst="roundRect">
-            <a:avLst/>
-          </a:prstGeom>
-          <a:noFill/>
-          <a:ln>
-            <a:solidFill>
-              <a:srgbClr val="FFC000"/>
-            </a:solidFill>
-          </a:ln>
-        </p:spPr>
-        <p:style>
-          <a:lnRef idx="2">
-            <a:schemeClr val="accent1">
-              <a:shade val="15000"/>
-            </a:schemeClr>
-          </a:lnRef>
-          <a:fillRef idx="1">
-            <a:schemeClr val="accent1"/>
-          </a:fillRef>
-          <a:effectRef idx="0">
-            <a:schemeClr val="accent1"/>
-          </a:effectRef>
-          <a:fontRef idx="minor">
-            <a:schemeClr val="lt1"/>
-          </a:fontRef>
-        </p:style>
-        <p:txBody>
-          <a:bodyPr rtlCol="0" anchor="ctr"/>
-          <a:lstStyle/>
-          <a:p>
-            <a:pPr algn="ctr"/>
-            <a:endParaRPr lang="en-US"/>
-          </a:p>
-        </p:txBody>
-      </p:sp>
-      <p:sp>
-        <p:nvSpPr>
-          <p:cNvPr id="8" name="TextBox 7">
-            <a:extLst>
-              <a:ext uri="{FF2B5EF4-FFF2-40B4-BE49-F238E27FC236}">
-                <a16:creationId xmlns:a16="http://schemas.microsoft.com/office/drawing/2014/main" id="{DFB9B672-4BE8-E8BF-B9A6-C73B48720F91}"/>
-              </a:ext>
-            </a:extLst>
-          </p:cNvPr>
-          <p:cNvSpPr txBox="1"/>
-          <p:nvPr/>
-        </p:nvSpPr>
-        <p:spPr>
-          <a:xfrm>
-            <a:off x="1631820" y="4334559"/>
-            <a:ext cx="1070486" cy="646331"/>
-          </a:xfrm>
-          <a:prstGeom prst="rect">
-            <a:avLst/>
-          </a:prstGeom>
-          <a:noFill/>
-        </p:spPr>
-        <p:txBody>
-          <a:bodyPr wrap="none" rtlCol="0">
-            <a:spAutoFit/>
-          </a:bodyPr>
-          <a:lstStyle/>
-          <a:p>
-            <a:r>
-              <a:rPr lang="en-US" b="1" dirty="0">
-                <a:solidFill>
-                  <a:srgbClr val="FFC000"/>
-                </a:solidFill>
-              </a:rPr>
-              <a:t>Physical</a:t>
-            </a:r>
-          </a:p>
-          <a:p>
-            <a:r>
-              <a:rPr lang="en-US" b="1" dirty="0">
-                <a:solidFill>
-                  <a:srgbClr val="FFC000"/>
-                </a:solidFill>
-              </a:rPr>
-              <a:t>Models</a:t>
-            </a:r>
-          </a:p>
-        </p:txBody>
-      </p:sp>
-      <p:sp>
-        <p:nvSpPr>
-          <p:cNvPr id="9" name="TextBox 8">
-            <a:extLst>
-              <a:ext uri="{FF2B5EF4-FFF2-40B4-BE49-F238E27FC236}">
-                <a16:creationId xmlns:a16="http://schemas.microsoft.com/office/drawing/2014/main" id="{39D3D929-0BCA-6AA2-02A1-F1FE698E8032}"/>
-              </a:ext>
-            </a:extLst>
-          </p:cNvPr>
-          <p:cNvSpPr txBox="1"/>
-          <p:nvPr/>
-        </p:nvSpPr>
-        <p:spPr>
-          <a:xfrm>
-            <a:off x="9102804" y="2321600"/>
-            <a:ext cx="2821606" cy="1477328"/>
-          </a:xfrm>
-          <a:prstGeom prst="rect">
-            <a:avLst/>
-          </a:prstGeom>
-          <a:noFill/>
-        </p:spPr>
-        <p:txBody>
-          <a:bodyPr wrap="none" rtlCol="0">
-            <a:spAutoFit/>
-          </a:bodyPr>
-          <a:lstStyle/>
-          <a:p>
-            <a:pPr algn="ctr"/>
-            <a:r>
-              <a:rPr lang="en-US" b="1" dirty="0"/>
-              <a:t>Experiments</a:t>
-            </a:r>
-          </a:p>
-          <a:p>
-            <a:pPr algn="ctr"/>
-            <a:r>
-              <a:rPr lang="en-US" b="1" dirty="0"/>
-              <a:t>+</a:t>
-            </a:r>
-          </a:p>
-          <a:p>
-            <a:pPr algn="ctr"/>
-            <a:r>
-              <a:rPr lang="en-US" b="1" dirty="0"/>
-              <a:t>Physical models</a:t>
-            </a:r>
-          </a:p>
-          <a:p>
-            <a:pPr algn="ctr"/>
-            <a:r>
-              <a:rPr lang="en-US" b="1" dirty="0"/>
-              <a:t>+</a:t>
-            </a:r>
-          </a:p>
-          <a:p>
-            <a:pPr algn="ctr"/>
-            <a:r>
-              <a:rPr lang="en-US" b="1" dirty="0"/>
-              <a:t>Machine learning models</a:t>
-            </a:r>
-          </a:p>
-        </p:txBody>
-      </p:sp>
-    </p:spTree>
-    <p:extLst>
-      <p:ext uri="{BB962C8B-B14F-4D97-AF65-F5344CB8AC3E}">
-        <p14:creationId xmlns:p14="http://schemas.microsoft.com/office/powerpoint/2010/main" val="517770189"/>
-      </p:ext>
-    </p:extLst>
-  </p:cSld>
-  <p:clrMapOvr>
-    <a:masterClrMapping/>
-  </p:clrMapOvr>
-  <p:timing>
-    <p:tnLst>
-      <p:par>
-        <p:cTn id="1" dur="indefinite" restart="never" nodeType="tmRoot">
-          <p:childTnLst>
-            <p:seq concurrent="1" nextAc="seek">
-              <p:cTn id="2" dur="indefinite" nodeType="mainSeq">
-                <p:childTnLst>
-                  <p:par>
-                    <p:cTn id="3" fill="hold">
-                      <p:stCondLst>
-                        <p:cond delay="indefinite"/>
-                      </p:stCondLst>
-                      <p:childTnLst>
-                        <p:par>
-                          <p:cTn id="4" fill="hold">
-                            <p:stCondLst>
-                              <p:cond delay="0"/>
-                            </p:stCondLst>
-                            <p:childTnLst>
-                              <p:par>
-                                <p:cTn id="5" presetID="1" presetClass="entr" presetSubtype="0" fill="hold" grpId="0" nodeType="clickEffect">
-                                  <p:stCondLst>
-                                    <p:cond delay="0"/>
-                                  </p:stCondLst>
-                                  <p:childTnLst>
-                                    <p:set>
-                                      <p:cBhvr>
-                                        <p:cTn id="6" dur="1" fill="hold">
-                                          <p:stCondLst>
-                                            <p:cond delay="0"/>
-                                          </p:stCondLst>
-                                        </p:cTn>
-                                        <p:tgtEl>
-                                          <p:spTgt spid="8"/>
-                                        </p:tgtEl>
-                                        <p:attrNameLst>
-                                          <p:attrName>style.visibility</p:attrName>
-                                        </p:attrNameLst>
-                                      </p:cBhvr>
-                                      <p:to>
-                                        <p:strVal val="visible"/>
-                                      </p:to>
-                                    </p:set>
-                                  </p:childTnLst>
-                                </p:cTn>
-                              </p:par>
-                              <p:par>
-                                <p:cTn id="7" presetID="1" presetClass="entr" presetSubtype="0" fill="hold" grpId="0" nodeType="withEffect">
-                                  <p:stCondLst>
-                                    <p:cond delay="0"/>
-                                  </p:stCondLst>
-                                  <p:childTnLst>
-                                    <p:set>
-                                      <p:cBhvr>
-                                        <p:cTn id="8" dur="1" fill="hold">
-                                          <p:stCondLst>
-                                            <p:cond delay="0"/>
-                                          </p:stCondLst>
-                                        </p:cTn>
-                                        <p:tgtEl>
-                                          <p:spTgt spid="7"/>
-                                        </p:tgtEl>
-                                        <p:attrNameLst>
-                                          <p:attrName>style.visibility</p:attrName>
-                                        </p:attrNameLst>
-                                      </p:cBhvr>
-                                      <p:to>
-                                        <p:strVal val="visible"/>
-                                      </p:to>
-                                    </p:set>
-                                  </p:childTnLst>
-                                </p:cTn>
-                              </p:par>
-                            </p:childTnLst>
-                          </p:cTn>
-                        </p:par>
-                      </p:childTnLst>
-                    </p:cTn>
-                  </p:par>
-                </p:childTnLst>
-              </p:cTn>
-              <p:prevCondLst>
-                <p:cond evt="onPrev" delay="0">
-                  <p:tgtEl>
-                    <p:sldTgt/>
-                  </p:tgtEl>
-                </p:cond>
-              </p:prevCondLst>
-              <p:nextCondLst>
-                <p:cond evt="onNext" delay="0">
-                  <p:tgtEl>
-                    <p:sldTgt/>
-                  </p:tgtEl>
-                </p:cond>
-              </p:nextCondLst>
-            </p:seq>
-          </p:childTnLst>
-        </p:cTn>
-      </p:par>
-    </p:tnLst>
-    <p:bldLst>
-      <p:bldP spid="7" grpId="0" animBg="1"/>
-      <p:bldP spid="8" grpId="0"/>
-    </p:bldLst>
-  </p:timing>
-</p:sld>
-</file>
-
-<file path=ppt/slides/slide4.xml><?xml version="1.0" encoding="utf-8"?>
-<p:sld xmlns:a="http://schemas.openxmlformats.org/drawingml/2006/main" xmlns:r="http://schemas.openxmlformats.org/officeDocument/2006/relationships" xmlns:p="http://schemas.openxmlformats.org/presentationml/2006/main">
-  <p:cSld>
     <p:bg>
       <p:bgPr>
         <a:solidFill>
-          <a:schemeClr val="bg1"/>
+          <a:schemeClr val="tx1"/>
         </a:solidFill>
         <a:effectLst/>
       </p:bgPr>
@@ -7060,66 +3883,6 @@
           <a:chExt cx="0" cy="0"/>
         </a:xfrm>
       </p:grpSpPr>
-      <p:sp useBgFill="1">
-        <p:nvSpPr>
-          <p:cNvPr id="9" name="Rectangle 8">
-            <a:extLst>
-              <a:ext uri="{FF2B5EF4-FFF2-40B4-BE49-F238E27FC236}">
-                <a16:creationId xmlns:a16="http://schemas.microsoft.com/office/drawing/2014/main" id="{0671A8AE-40A1-4631-A6B8-581AFF065482}"/>
-              </a:ext>
-              <a:ext uri="{C183D7F6-B498-43B3-948B-1728B52AA6E4}">
-                <adec:decorative xmlns:adec="http://schemas.microsoft.com/office/drawing/2017/decorative" val="1"/>
-              </a:ext>
-            </a:extLst>
-          </p:cNvPr>
-          <p:cNvSpPr>
-            <a:spLocks noGrp="1" noRot="1" noChangeAspect="1" noMove="1" noResize="1" noEditPoints="1" noAdjustHandles="1" noChangeArrowheads="1" noChangeShapeType="1" noTextEdit="1"/>
-          </p:cNvSpPr>
-          <p:nvPr>
-            <p:extLst>
-              <p:ext uri="{386F3935-93C4-4BCD-93E2-E3B085C9AB24}">
-                <p16:designElem xmlns:p16="http://schemas.microsoft.com/office/powerpoint/2015/main" val="1"/>
-              </p:ext>
-            </p:extLst>
-          </p:nvPr>
-        </p:nvSpPr>
-        <p:spPr>
-          <a:xfrm>
-            <a:off x="0" y="0"/>
-            <a:ext cx="12192000" cy="6858000"/>
-          </a:xfrm>
-          <a:prstGeom prst="rect">
-            <a:avLst/>
-          </a:prstGeom>
-          <a:ln>
-            <a:noFill/>
-          </a:ln>
-        </p:spPr>
-        <p:style>
-          <a:lnRef idx="2">
-            <a:schemeClr val="accent1">
-              <a:shade val="50000"/>
-            </a:schemeClr>
-          </a:lnRef>
-          <a:fillRef idx="1">
-            <a:schemeClr val="accent1"/>
-          </a:fillRef>
-          <a:effectRef idx="0">
-            <a:schemeClr val="accent1"/>
-          </a:effectRef>
-          <a:fontRef idx="minor">
-            <a:schemeClr val="lt1"/>
-          </a:fontRef>
-        </p:style>
-        <p:txBody>
-          <a:bodyPr rtlCol="0" anchor="ctr"/>
-          <a:lstStyle/>
-          <a:p>
-            <a:pPr algn="ctr"/>
-            <a:endParaRPr lang="en-US"/>
-          </a:p>
-        </p:txBody>
-      </p:sp>
       <p:pic>
         <p:nvPicPr>
           <p:cNvPr id="4" name="Picture 3" descr="Escherichia coli (E. coli)">
@@ -7151,87 +3914,6 @@
       </p:pic>
       <p:sp>
         <p:nvSpPr>
-          <p:cNvPr id="11" name="Rectangle 10">
-            <a:extLst>
-              <a:ext uri="{FF2B5EF4-FFF2-40B4-BE49-F238E27FC236}">
-                <a16:creationId xmlns:a16="http://schemas.microsoft.com/office/drawing/2014/main" id="{AB58EF07-17C2-48CF-ABB0-EEF1F17CB8F0}"/>
-              </a:ext>
-              <a:ext uri="{C183D7F6-B498-43B3-948B-1728B52AA6E4}">
-                <adec:decorative xmlns:adec="http://schemas.microsoft.com/office/drawing/2017/decorative" val="1"/>
-              </a:ext>
-            </a:extLst>
-          </p:cNvPr>
-          <p:cNvSpPr>
-            <a:spLocks noGrp="1" noRot="1" noChangeAspect="1" noMove="1" noResize="1" noEditPoints="1" noAdjustHandles="1" noChangeArrowheads="1" noChangeShapeType="1" noTextEdit="1"/>
-          </p:cNvSpPr>
-          <p:nvPr>
-            <p:extLst>
-              <p:ext uri="{386F3935-93C4-4BCD-93E2-E3B085C9AB24}">
-                <p16:designElem xmlns:p16="http://schemas.microsoft.com/office/powerpoint/2015/main" val="1"/>
-              </p:ext>
-            </p:extLst>
-          </p:nvPr>
-        </p:nvSpPr>
-        <p:spPr>
-          <a:xfrm>
-            <a:off x="3" y="0"/>
-            <a:ext cx="9339206" cy="6858000"/>
-          </a:xfrm>
-          <a:prstGeom prst="rect">
-            <a:avLst/>
-          </a:prstGeom>
-          <a:gradFill>
-            <a:gsLst>
-              <a:gs pos="58000">
-                <a:schemeClr val="tx1"/>
-              </a:gs>
-              <a:gs pos="33000">
-                <a:schemeClr val="tx1">
-                  <a:alpha val="64000"/>
-                </a:schemeClr>
-              </a:gs>
-              <a:gs pos="0">
-                <a:schemeClr val="tx1">
-                  <a:alpha val="0"/>
-                </a:schemeClr>
-              </a:gs>
-              <a:gs pos="100000">
-                <a:schemeClr val="tx1"/>
-              </a:gs>
-            </a:gsLst>
-            <a:lin ang="10800000" scaled="0"/>
-          </a:gradFill>
-          <a:ln>
-            <a:noFill/>
-          </a:ln>
-        </p:spPr>
-        <p:style>
-          <a:lnRef idx="2">
-            <a:schemeClr val="accent1">
-              <a:shade val="50000"/>
-            </a:schemeClr>
-          </a:lnRef>
-          <a:fillRef idx="1">
-            <a:schemeClr val="accent1"/>
-          </a:fillRef>
-          <a:effectRef idx="0">
-            <a:schemeClr val="accent1"/>
-          </a:effectRef>
-          <a:fontRef idx="minor">
-            <a:schemeClr val="lt1"/>
-          </a:fontRef>
-        </p:style>
-        <p:txBody>
-          <a:bodyPr rtlCol="0" anchor="ctr"/>
-          <a:lstStyle/>
-          <a:p>
-            <a:pPr algn="ctr"/>
-            <a:endParaRPr lang="en-US" dirty="0"/>
-          </a:p>
-        </p:txBody>
-      </p:sp>
-      <p:sp>
-        <p:nvSpPr>
           <p:cNvPr id="2" name="Title 1">
             <a:extLst>
               <a:ext uri="{FF2B5EF4-FFF2-40B4-BE49-F238E27FC236}">
@@ -7332,167 +4014,6 @@
           </a:p>
         </p:txBody>
       </p:sp>
-      <p:sp>
-        <p:nvSpPr>
-          <p:cNvPr id="13" name="Rectangle 12">
-            <a:extLst>
-              <a:ext uri="{FF2B5EF4-FFF2-40B4-BE49-F238E27FC236}">
-                <a16:creationId xmlns:a16="http://schemas.microsoft.com/office/drawing/2014/main" id="{AF2F604E-43BE-4DC3-B983-E071523364F8}"/>
-              </a:ext>
-              <a:ext uri="{C183D7F6-B498-43B3-948B-1728B52AA6E4}">
-                <adec:decorative xmlns:adec="http://schemas.microsoft.com/office/drawing/2017/decorative" val="1"/>
-              </a:ext>
-            </a:extLst>
-          </p:cNvPr>
-          <p:cNvSpPr>
-            <a:spLocks noGrp="1" noRot="1" noChangeAspect="1" noMove="1" noResize="1" noEditPoints="1" noAdjustHandles="1" noChangeArrowheads="1" noChangeShapeType="1" noTextEdit="1"/>
-          </p:cNvSpPr>
-          <p:nvPr>
-            <p:extLst>
-              <p:ext uri="{386F3935-93C4-4BCD-93E2-E3B085C9AB24}">
-                <p16:designElem xmlns:p16="http://schemas.microsoft.com/office/powerpoint/2015/main" val="1"/>
-              </p:ext>
-            </p:extLst>
-          </p:nvPr>
-        </p:nvSpPr>
-        <p:spPr>
-          <a:xfrm rot="5400000">
-            <a:off x="759921" y="346791"/>
-            <a:ext cx="146304" cy="704088"/>
-          </a:xfrm>
-          <a:prstGeom prst="rect">
-            <a:avLst/>
-          </a:prstGeom>
-          <a:solidFill>
-            <a:schemeClr val="accent2"/>
-          </a:solidFill>
-          <a:ln>
-            <a:noFill/>
-          </a:ln>
-        </p:spPr>
-        <p:style>
-          <a:lnRef idx="2">
-            <a:schemeClr val="accent1">
-              <a:shade val="50000"/>
-            </a:schemeClr>
-          </a:lnRef>
-          <a:fillRef idx="1">
-            <a:schemeClr val="accent1"/>
-          </a:fillRef>
-          <a:effectRef idx="0">
-            <a:schemeClr val="accent1"/>
-          </a:effectRef>
-          <a:fontRef idx="minor">
-            <a:schemeClr val="lt1"/>
-          </a:fontRef>
-        </p:style>
-        <p:txBody>
-          <a:bodyPr rtlCol="0" anchor="ctr"/>
-          <a:lstStyle/>
-          <a:p>
-            <a:pPr algn="ctr"/>
-            <a:endParaRPr lang="en-US">
-              <a:solidFill>
-                <a:prstClr val="white"/>
-              </a:solidFill>
-              <a:latin typeface="Calibri" panose="020F0502020204030204"/>
-            </a:endParaRPr>
-          </a:p>
-        </p:txBody>
-      </p:sp>
-      <p:sp>
-        <p:nvSpPr>
-          <p:cNvPr id="15" name="Rectangle 14">
-            <a:extLst>
-              <a:ext uri="{FF2B5EF4-FFF2-40B4-BE49-F238E27FC236}">
-                <a16:creationId xmlns:a16="http://schemas.microsoft.com/office/drawing/2014/main" id="{08C9B587-E65E-4B52-B37C-ABEBB6E87928}"/>
-              </a:ext>
-              <a:ext uri="{C183D7F6-B498-43B3-948B-1728B52AA6E4}">
-                <adec:decorative xmlns:adec="http://schemas.microsoft.com/office/drawing/2017/decorative" val="1"/>
-              </a:ext>
-            </a:extLst>
-          </p:cNvPr>
-          <p:cNvSpPr>
-            <a:spLocks noGrp="1" noRot="1" noChangeAspect="1" noMove="1" noResize="1" noEditPoints="1" noAdjustHandles="1" noChangeArrowheads="1" noChangeShapeType="1" noTextEdit="1"/>
-          </p:cNvSpPr>
-          <p:nvPr>
-            <p:extLst>
-              <p:ext uri="{386F3935-93C4-4BCD-93E2-E3B085C9AB24}">
-                <p16:designElem xmlns:p16="http://schemas.microsoft.com/office/powerpoint/2015/main" val="1"/>
-              </p:ext>
-            </p:extLst>
-          </p:nvPr>
-        </p:nvSpPr>
-        <p:spPr>
-          <a:xfrm>
-            <a:off x="481029" y="4546920"/>
-            <a:ext cx="3977640" cy="18288"/>
-          </a:xfrm>
-          <a:prstGeom prst="rect">
-            <a:avLst/>
-          </a:prstGeom>
-          <a:solidFill>
-            <a:schemeClr val="tx1"/>
-          </a:solidFill>
-          <a:ln w="3175">
-            <a:noFill/>
-          </a:ln>
-          <a:effectLst/>
-        </p:spPr>
-        <p:style>
-          <a:lnRef idx="2">
-            <a:schemeClr val="accent1">
-              <a:shade val="50000"/>
-            </a:schemeClr>
-          </a:lnRef>
-          <a:fillRef idx="1">
-            <a:schemeClr val="accent1"/>
-          </a:fillRef>
-          <a:effectRef idx="0">
-            <a:schemeClr val="accent1"/>
-          </a:effectRef>
-          <a:fontRef idx="minor">
-            <a:schemeClr val="lt1"/>
-          </a:fontRef>
-        </p:style>
-        <p:txBody>
-          <a:bodyPr rtlCol="0" anchor="ctr"/>
-          <a:lstStyle/>
-          <a:p>
-            <a:pPr marL="0" marR="0" lvl="0" indent="0" algn="ctr" defTabSz="914400" rtl="0" eaLnBrk="1" fontAlgn="auto" latinLnBrk="0" hangingPunct="1">
-              <a:lnSpc>
-                <a:spcPct val="100000"/>
-              </a:lnSpc>
-              <a:spcBef>
-                <a:spcPts val="0"/>
-              </a:spcBef>
-              <a:spcAft>
-                <a:spcPts val="0"/>
-              </a:spcAft>
-              <a:buClrTx/>
-              <a:buSzTx/>
-              <a:buFontTx/>
-              <a:buNone/>
-              <a:tabLst/>
-              <a:defRPr/>
-            </a:pPr>
-            <a:endParaRPr kumimoji="0" lang="en-US" sz="1800" b="0" i="0" u="none" strike="noStrike" kern="1200" cap="none" spc="0" normalizeH="0" baseline="0" noProof="0">
-              <a:ln>
-                <a:noFill/>
-              </a:ln>
-              <a:solidFill>
-                <a:prstClr val="white"/>
-              </a:solidFill>
-              <a:effectLst/>
-              <a:uLnTx/>
-              <a:uFillTx/>
-              <a:latin typeface="Calibri" panose="020F0502020204030204"/>
-              <a:ea typeface="+mn-ea"/>
-              <a:cs typeface="+mn-cs"/>
-            </a:endParaRPr>
-          </a:p>
-        </p:txBody>
-      </p:sp>
     </p:spTree>
     <p:extLst>
       <p:ext uri="{BB962C8B-B14F-4D97-AF65-F5344CB8AC3E}">
@@ -7506,7 +4027,7 @@
 </p:sld>
 </file>
 
-<file path=ppt/slides/slide5.xml><?xml version="1.0" encoding="utf-8"?>
+<file path=ppt/slides/slide4.xml><?xml version="1.0" encoding="utf-8"?>
 <p:sld xmlns:a="http://schemas.openxmlformats.org/drawingml/2006/main" xmlns:r="http://schemas.openxmlformats.org/officeDocument/2006/relationships" xmlns:p="http://schemas.openxmlformats.org/presentationml/2006/main">
   <p:cSld>
     <p:spTree>
@@ -7565,13 +4086,7 @@
           <p:cNvGraphicFramePr>
             <a:graphicFrameLocks noGrp="1"/>
           </p:cNvGraphicFramePr>
-          <p:nvPr>
-            <p:extLst>
-              <p:ext uri="{D42A27DB-BD31-4B8C-83A1-F6EECF244321}">
-                <p14:modId xmlns:p14="http://schemas.microsoft.com/office/powerpoint/2010/main" val="1758837921"/>
-              </p:ext>
-            </p:extLst>
-          </p:nvPr>
+          <p:nvPr/>
         </p:nvGraphicFramePr>
         <p:xfrm>
           <a:off x="6637454" y="1557432"/>
@@ -9307,8 +5822,8 @@
           </p:style>
         </p:cxnSp>
       </p:grpSp>
-      <mc:AlternateContent xmlns:mc="http://schemas.openxmlformats.org/markup-compatibility/2006">
-        <mc:Choice xmlns:a14="http://schemas.microsoft.com/office/drawing/2010/main" Requires="a14">
+      <mc:AlternateContent xmlns:mc="http://schemas.openxmlformats.org/markup-compatibility/2006" xmlns:a14="http://schemas.microsoft.com/office/drawing/2010/main">
+        <mc:Choice Requires="a14">
           <p:sp>
             <p:nvSpPr>
               <p:cNvPr id="6" name="TextBox 5">
@@ -9362,7 +5877,7 @@
             </p:txBody>
           </p:sp>
         </mc:Choice>
-        <mc:Fallback>
+        <mc:Fallback xmlns="">
           <p:sp>
             <p:nvSpPr>
               <p:cNvPr id="6" name="TextBox 5">
@@ -9448,8 +5963,8 @@
           </a:p>
         </p:txBody>
       </p:sp>
-      <mc:AlternateContent xmlns:mc="http://schemas.openxmlformats.org/markup-compatibility/2006">
-        <mc:Choice xmlns:a14="http://schemas.microsoft.com/office/drawing/2010/main" Requires="a14">
+      <mc:AlternateContent xmlns:mc="http://schemas.openxmlformats.org/markup-compatibility/2006" xmlns:a14="http://schemas.microsoft.com/office/drawing/2010/main">
+        <mc:Choice Requires="a14">
           <p:sp>
             <p:nvSpPr>
               <p:cNvPr id="9" name="TextBox 8">
@@ -9503,7 +6018,7 @@
             </p:txBody>
           </p:sp>
         </mc:Choice>
-        <mc:Fallback>
+        <mc:Fallback xmlns="">
           <p:sp>
             <p:nvSpPr>
               <p:cNvPr id="9" name="TextBox 8">
@@ -9561,7 +6076,7 @@
 </p:sld>
 </file>
 
-<file path=ppt/slides/slide6.xml><?xml version="1.0" encoding="utf-8"?>
+<file path=ppt/slides/slide5.xml><?xml version="1.0" encoding="utf-8"?>
 <p:sld xmlns:a="http://schemas.openxmlformats.org/drawingml/2006/main" xmlns:r="http://schemas.openxmlformats.org/officeDocument/2006/relationships" xmlns:p="http://schemas.openxmlformats.org/presentationml/2006/main">
   <p:cSld>
     <p:spTree>
@@ -9596,37 +6111,20 @@
         </p:nvSpPr>
         <p:spPr>
           <a:xfrm>
-            <a:off x="838200" y="2216227"/>
+            <a:off x="838200" y="2329172"/>
             <a:ext cx="10515600" cy="2199656"/>
           </a:xfrm>
         </p:spPr>
         <p:txBody>
           <a:bodyPr>
-            <a:normAutofit fontScale="90000"/>
+            <a:normAutofit/>
           </a:bodyPr>
           <a:lstStyle/>
           <a:p>
             <a:pPr algn="ctr"/>
             <a:r>
               <a:rPr lang="en-US" dirty="0"/>
-              <a:t>Predicting the number of cells vs. time</a:t>
-            </a:r>
-            <a:br>
-              <a:rPr lang="en-US" dirty="0"/>
-            </a:br>
-            <a:br>
-              <a:rPr lang="en-US" dirty="0"/>
-            </a:br>
-            <a:r>
-              <a:rPr lang="en-US" dirty="0"/>
-              <a:t>1. using Google Spreadsheets</a:t>
-            </a:r>
-            <a:br>
-              <a:rPr lang="en-US" dirty="0"/>
-            </a:br>
-            <a:r>
-              <a:rPr lang="en-US" dirty="0"/>
-              <a:t>2. using Python and for loops</a:t>
+              <a:t>How would you predict the # of cells vs. time?</a:t>
             </a:r>
           </a:p>
         </p:txBody>
@@ -9644,7 +6142,7 @@
 </p:sld>
 </file>
 
-<file path=ppt/slides/slide7.xml><?xml version="1.0" encoding="utf-8"?>
+<file path=ppt/slides/slide6.xml><?xml version="1.0" encoding="utf-8"?>
 <p:sld xmlns:a="http://schemas.openxmlformats.org/drawingml/2006/main" xmlns:r="http://schemas.openxmlformats.org/officeDocument/2006/relationships" xmlns:p="http://schemas.openxmlformats.org/presentationml/2006/main">
   <p:cSld>
     <p:spTree>
@@ -10040,17 +6538,9 @@
 </p:sld>
 </file>
 
-<file path=ppt/slides/slide8.xml><?xml version="1.0" encoding="utf-8"?>
+<file path=ppt/slides/slide7.xml><?xml version="1.0" encoding="utf-8"?>
 <p:sld xmlns:a="http://schemas.openxmlformats.org/drawingml/2006/main" xmlns:r="http://schemas.openxmlformats.org/officeDocument/2006/relationships" xmlns:p="http://schemas.openxmlformats.org/presentationml/2006/main">
   <p:cSld>
-    <p:bg>
-      <p:bgPr>
-        <a:solidFill>
-          <a:schemeClr val="bg1"/>
-        </a:solidFill>
-        <a:effectLst/>
-      </p:bgPr>
-    </p:bg>
     <p:spTree>
       <p:nvGrpSpPr>
         <p:cNvPr id="1" name=""/>
@@ -10065,213 +6555,12 @@
           <a:chExt cx="0" cy="0"/>
         </a:xfrm>
       </p:grpSpPr>
-      <p:sp>
-        <p:nvSpPr>
-          <p:cNvPr id="3083" name="Rectangle 3082">
-            <a:extLst>
-              <a:ext uri="{FF2B5EF4-FFF2-40B4-BE49-F238E27FC236}">
-                <a16:creationId xmlns:a16="http://schemas.microsoft.com/office/drawing/2014/main" id="{A7AE9375-4664-4DB2-922D-2782A6E439AC}"/>
-              </a:ext>
-              <a:ext uri="{C183D7F6-B498-43B3-948B-1728B52AA6E4}">
-                <adec:decorative xmlns:adec="http://schemas.microsoft.com/office/drawing/2017/decorative" val="1"/>
-              </a:ext>
-            </a:extLst>
-          </p:cNvPr>
-          <p:cNvSpPr>
-            <a:spLocks noGrp="1" noRot="1" noChangeAspect="1" noMove="1" noResize="1" noEditPoints="1" noAdjustHandles="1" noChangeArrowheads="1" noChangeShapeType="1" noTextEdit="1"/>
-          </p:cNvSpPr>
-          <p:nvPr>
-            <p:extLst>
-              <p:ext uri="{386F3935-93C4-4BCD-93E2-E3B085C9AB24}">
-                <p16:designElem xmlns:p16="http://schemas.microsoft.com/office/powerpoint/2015/main" val="1"/>
-              </p:ext>
-            </p:extLst>
-          </p:nvPr>
-        </p:nvSpPr>
-        <p:spPr>
-          <a:xfrm>
-            <a:off x="-1" y="0"/>
-            <a:ext cx="12192000" cy="6858000"/>
-          </a:xfrm>
-          <a:prstGeom prst="rect">
-            <a:avLst/>
-          </a:prstGeom>
-          <a:solidFill>
-            <a:schemeClr val="tx1">
-              <a:lumMod val="95000"/>
-              <a:lumOff val="5000"/>
-            </a:schemeClr>
-          </a:solidFill>
-          <a:ln>
-            <a:noFill/>
-          </a:ln>
-        </p:spPr>
-        <p:style>
-          <a:lnRef idx="2">
-            <a:schemeClr val="accent1">
-              <a:shade val="50000"/>
-            </a:schemeClr>
-          </a:lnRef>
-          <a:fillRef idx="1">
-            <a:schemeClr val="accent1"/>
-          </a:fillRef>
-          <a:effectRef idx="0">
-            <a:schemeClr val="accent1"/>
-          </a:effectRef>
-          <a:fontRef idx="minor">
-            <a:schemeClr val="lt1"/>
-          </a:fontRef>
-        </p:style>
-        <p:txBody>
-          <a:bodyPr rtlCol="0" anchor="ctr"/>
-          <a:lstStyle/>
-          <a:p>
-            <a:pPr algn="ctr"/>
-            <a:endParaRPr lang="en-US" dirty="0">
-              <a:solidFill>
-                <a:schemeClr val="tx1"/>
-              </a:solidFill>
-            </a:endParaRPr>
-          </a:p>
-        </p:txBody>
-      </p:sp>
-      <p:cxnSp>
-        <p:nvCxnSpPr>
-          <p:cNvPr id="3085" name="Straight Connector 3084">
-            <a:extLst>
-              <a:ext uri="{FF2B5EF4-FFF2-40B4-BE49-F238E27FC236}">
-                <a16:creationId xmlns:a16="http://schemas.microsoft.com/office/drawing/2014/main" id="{EE504C98-6397-41C1-A8D8-2D9C4ED307E0}"/>
-              </a:ext>
-              <a:ext uri="{C183D7F6-B498-43B3-948B-1728B52AA6E4}">
-                <adec:decorative xmlns:adec="http://schemas.microsoft.com/office/drawing/2017/decorative" val="1"/>
-              </a:ext>
-            </a:extLst>
-          </p:cNvPr>
-          <p:cNvCxnSpPr>
-            <a:cxnSpLocks noGrp="1" noRot="1" noChangeAspect="1" noMove="1" noResize="1" noEditPoints="1" noAdjustHandles="1" noChangeArrowheads="1" noChangeShapeType="1"/>
-          </p:cNvCxnSpPr>
-          <p:nvPr>
-            <p:extLst>
-              <p:ext uri="{386F3935-93C4-4BCD-93E2-E3B085C9AB24}">
-                <p16:designElem xmlns:p16="http://schemas.microsoft.com/office/powerpoint/2015/main" val="1"/>
-              </p:ext>
-            </p:extLst>
-          </p:nvPr>
-        </p:nvCxnSpPr>
-        <p:spPr>
-          <a:xfrm flipH="1">
-            <a:off x="1" y="2026340"/>
-            <a:ext cx="6095999" cy="0"/>
-          </a:xfrm>
-          <a:prstGeom prst="line">
-            <a:avLst/>
-          </a:prstGeom>
-          <a:ln w="12700">
-            <a:solidFill>
-              <a:schemeClr val="accent2"/>
-            </a:solidFill>
-          </a:ln>
-        </p:spPr>
-        <p:style>
-          <a:lnRef idx="1">
-            <a:schemeClr val="accent1"/>
-          </a:lnRef>
-          <a:fillRef idx="0">
-            <a:schemeClr val="accent1"/>
-          </a:fillRef>
-          <a:effectRef idx="0">
-            <a:schemeClr val="accent1"/>
-          </a:effectRef>
-          <a:fontRef idx="minor">
-            <a:schemeClr val="tx1"/>
-          </a:fontRef>
-        </p:style>
-      </p:cxnSp>
-      <p:sp>
-        <p:nvSpPr>
-          <p:cNvPr id="6" name="TextBox 5">
-            <a:extLst>
-              <a:ext uri="{FF2B5EF4-FFF2-40B4-BE49-F238E27FC236}">
-                <a16:creationId xmlns:a16="http://schemas.microsoft.com/office/drawing/2014/main" id="{7B04CCC1-EFC3-496F-B07D-8843ABECBFA2}"/>
-              </a:ext>
-            </a:extLst>
-          </p:cNvPr>
-          <p:cNvSpPr txBox="1"/>
-          <p:nvPr/>
-        </p:nvSpPr>
-        <p:spPr>
-          <a:xfrm>
-            <a:off x="414430" y="982929"/>
-            <a:ext cx="5866904" cy="3711571"/>
-          </a:xfrm>
-          <a:prstGeom prst="rect">
-            <a:avLst/>
-          </a:prstGeom>
-        </p:spPr>
-        <p:txBody>
-          <a:bodyPr vert="horz" lIns="91440" tIns="45720" rIns="91440" bIns="45720" rtlCol="0">
-            <a:normAutofit/>
-          </a:bodyPr>
-          <a:lstStyle/>
-          <a:p>
-            <a:pPr>
-              <a:lnSpc>
-                <a:spcPct val="90000"/>
-              </a:lnSpc>
-              <a:spcAft>
-                <a:spcPts val="600"/>
-              </a:spcAft>
-            </a:pPr>
-            <a:r>
-              <a:rPr lang="en-US" sz="4400" dirty="0">
-                <a:solidFill>
-                  <a:schemeClr val="bg1"/>
-                </a:solidFill>
-              </a:rPr>
-              <a:t>Mathematical ecology:</a:t>
-            </a:r>
-          </a:p>
-          <a:p>
-            <a:pPr>
-              <a:lnSpc>
-                <a:spcPct val="90000"/>
-              </a:lnSpc>
-              <a:spcAft>
-                <a:spcPts val="600"/>
-              </a:spcAft>
-            </a:pPr>
-            <a:endParaRPr lang="en-US" sz="4400" dirty="0">
-              <a:solidFill>
-                <a:schemeClr val="bg1"/>
-              </a:solidFill>
-            </a:endParaRPr>
-          </a:p>
-          <a:p>
-            <a:pPr>
-              <a:lnSpc>
-                <a:spcPct val="90000"/>
-              </a:lnSpc>
-              <a:spcAft>
-                <a:spcPts val="600"/>
-              </a:spcAft>
-            </a:pPr>
-            <a:r>
-              <a:rPr lang="en-US" sz="4400" dirty="0">
-                <a:solidFill>
-                  <a:schemeClr val="bg1"/>
-                </a:solidFill>
-              </a:rPr>
-              <a:t>Modeling the population dynamics of rabbits and foxes</a:t>
-            </a:r>
-          </a:p>
-        </p:txBody>
-      </p:sp>
       <p:pic>
         <p:nvPicPr>
-          <p:cNvPr id="3076" name="Picture 4" descr="Eastern cottontail - Wikipedia">
-            <a:extLst>
-              <a:ext uri="{FF2B5EF4-FFF2-40B4-BE49-F238E27FC236}">
-                <a16:creationId xmlns:a16="http://schemas.microsoft.com/office/drawing/2014/main" id="{60BCACAA-AA96-37FE-7FCF-AA297BD8818A}"/>
+          <p:cNvPr id="1026" name="Picture 2" descr="A schematic showing how the three models discussed here are related ...">
+            <a:extLst>
+              <a:ext uri="{FF2B5EF4-FFF2-40B4-BE49-F238E27FC236}">
+                <a16:creationId xmlns:a16="http://schemas.microsoft.com/office/drawing/2014/main" id="{D96B3C96-6D97-66BE-79FB-5E0A0D7FD3F5}"/>
               </a:ext>
             </a:extLst>
           </p:cNvPr>
@@ -10288,14 +6577,15 @@
               </a:ext>
             </a:extLst>
           </a:blip>
+          <a:srcRect/>
           <a:stretch>
             <a:fillRect/>
           </a:stretch>
         </p:blipFill>
         <p:spPr bwMode="auto">
           <a:xfrm>
-            <a:off x="7000478" y="369913"/>
-            <a:ext cx="2878069" cy="2784532"/>
+            <a:off x="698500" y="1679064"/>
+            <a:ext cx="10795000" cy="4470400"/>
           </a:xfrm>
           <a:prstGeom prst="rect">
             <a:avLst/>
@@ -10314,234 +6604,215 @@
       </p:pic>
       <p:sp>
         <p:nvSpPr>
-          <p:cNvPr id="3087" name="Rectangle 3086">
-            <a:extLst>
-              <a:ext uri="{FF2B5EF4-FFF2-40B4-BE49-F238E27FC236}">
-                <a16:creationId xmlns:a16="http://schemas.microsoft.com/office/drawing/2014/main" id="{C87417AF-190E-4D6E-AFA6-7D3E84B0B430}"/>
-              </a:ext>
-              <a:ext uri="{C183D7F6-B498-43B3-948B-1728B52AA6E4}">
-                <adec:decorative xmlns:adec="http://schemas.microsoft.com/office/drawing/2017/decorative" val="1"/>
-              </a:ext>
-            </a:extLst>
-          </p:cNvPr>
-          <p:cNvSpPr>
-            <a:spLocks noGrp="1" noRot="1" noChangeAspect="1" noMove="1" noResize="1" noEditPoints="1" noAdjustHandles="1" noChangeArrowheads="1" noChangeShapeType="1" noTextEdit="1"/>
-          </p:cNvSpPr>
-          <p:nvPr>
-            <p:extLst>
-              <p:ext uri="{386F3935-93C4-4BCD-93E2-E3B085C9AB24}">
-                <p16:designElem xmlns:p16="http://schemas.microsoft.com/office/powerpoint/2015/main" val="1"/>
-              </p:ext>
-            </p:extLst>
-          </p:nvPr>
-        </p:nvSpPr>
+          <p:cNvPr id="2" name="Title 1">
+            <a:extLst>
+              <a:ext uri="{FF2B5EF4-FFF2-40B4-BE49-F238E27FC236}">
+                <a16:creationId xmlns:a16="http://schemas.microsoft.com/office/drawing/2014/main" id="{A5500169-884F-542A-9B5C-648992E21ECF}"/>
+              </a:ext>
+            </a:extLst>
+          </p:cNvPr>
+          <p:cNvSpPr>
+            <a:spLocks noGrp="1"/>
+          </p:cNvSpPr>
+          <p:nvPr>
+            <p:ph type="title"/>
+          </p:nvPr>
+        </p:nvSpPr>
+        <p:spPr/>
+        <p:txBody>
+          <a:bodyPr/>
+          <a:lstStyle/>
+          <a:p>
+            <a:r>
+              <a:rPr lang="en-US" dirty="0"/>
+              <a:t>Different Model Types</a:t>
+            </a:r>
+          </a:p>
+        </p:txBody>
+      </p:sp>
+      <p:pic>
+        <p:nvPicPr>
+          <p:cNvPr id="5" name="Picture 4" descr="A black text on a white background&#10;&#10;AI-generated content may be incorrect.">
+            <a:extLst>
+              <a:ext uri="{FF2B5EF4-FFF2-40B4-BE49-F238E27FC236}">
+                <a16:creationId xmlns:a16="http://schemas.microsoft.com/office/drawing/2014/main" id="{49E410F3-7F6C-ADD4-F2CB-8C094BB120F2}"/>
+              </a:ext>
+            </a:extLst>
+          </p:cNvPr>
+          <p:cNvPicPr>
+            <a:picLocks noChangeAspect="1"/>
+          </p:cNvPicPr>
+          <p:nvPr/>
+        </p:nvPicPr>
+        <p:blipFill>
+          <a:blip r:embed="rId3"/>
+          <a:stretch>
+            <a:fillRect/>
+          </a:stretch>
+        </p:blipFill>
         <p:spPr>
           <a:xfrm>
-            <a:off x="6431603" y="182859"/>
-            <a:ext cx="3996261" cy="3177496"/>
+            <a:off x="7531100" y="54486"/>
+            <a:ext cx="4660900" cy="1308100"/>
           </a:xfrm>
           <a:prstGeom prst="rect">
             <a:avLst/>
           </a:prstGeom>
-          <a:noFill/>
-          <a:ln w="12700">
-            <a:solidFill>
-              <a:schemeClr val="accent2"/>
-            </a:solidFill>
-          </a:ln>
         </p:spPr>
-        <p:style>
-          <a:lnRef idx="2">
-            <a:schemeClr val="accent1">
-              <a:shade val="50000"/>
-            </a:schemeClr>
-          </a:lnRef>
-          <a:fillRef idx="1">
-            <a:schemeClr val="accent1"/>
-          </a:fillRef>
-          <a:effectRef idx="0">
-            <a:schemeClr val="accent1"/>
-          </a:effectRef>
-          <a:fontRef idx="minor">
-            <a:schemeClr val="lt1"/>
-          </a:fontRef>
-        </p:style>
-        <p:txBody>
-          <a:bodyPr rtlCol="0" anchor="ctr"/>
+      </p:pic>
+    </p:spTree>
+    <p:extLst>
+      <p:ext uri="{BB962C8B-B14F-4D97-AF65-F5344CB8AC3E}">
+        <p14:creationId xmlns:p14="http://schemas.microsoft.com/office/powerpoint/2010/main" val="2113961140"/>
+      </p:ext>
+    </p:extLst>
+  </p:cSld>
+  <p:clrMapOvr>
+    <a:masterClrMapping/>
+  </p:clrMapOvr>
+</p:sld>
+</file>
+
+<file path=ppt/slides/slide8.xml><?xml version="1.0" encoding="utf-8"?>
+<p:sld xmlns:a="http://schemas.openxmlformats.org/drawingml/2006/main" xmlns:r="http://schemas.openxmlformats.org/officeDocument/2006/relationships" xmlns:p="http://schemas.openxmlformats.org/presentationml/2006/main">
+  <p:cSld>
+    <p:spTree>
+      <p:nvGrpSpPr>
+        <p:cNvPr id="1" name=""/>
+        <p:cNvGrpSpPr/>
+        <p:nvPr/>
+      </p:nvGrpSpPr>
+      <p:grpSpPr>
+        <a:xfrm>
+          <a:off x="0" y="0"/>
+          <a:ext cx="0" cy="0"/>
+          <a:chOff x="0" y="0"/>
+          <a:chExt cx="0" cy="0"/>
+        </a:xfrm>
+      </p:grpSpPr>
+      <p:sp>
+        <p:nvSpPr>
+          <p:cNvPr id="2" name="Title 1">
+            <a:extLst>
+              <a:ext uri="{FF2B5EF4-FFF2-40B4-BE49-F238E27FC236}">
+                <a16:creationId xmlns:a16="http://schemas.microsoft.com/office/drawing/2014/main" id="{6CAED051-BF3B-9144-25DE-FCB1D40C0746}"/>
+              </a:ext>
+            </a:extLst>
+          </p:cNvPr>
+          <p:cNvSpPr>
+            <a:spLocks noGrp="1"/>
+          </p:cNvSpPr>
+          <p:nvPr>
+            <p:ph type="title"/>
+          </p:nvPr>
+        </p:nvSpPr>
+        <p:spPr/>
+        <p:txBody>
+          <a:bodyPr/>
           <a:lstStyle/>
           <a:p>
-            <a:pPr algn="ctr"/>
-            <a:endParaRPr lang="en-US"/>
+            <a:r>
+              <a:rPr lang="en-US" dirty="0"/>
+              <a:t>Agent based models can simulate spatial dynamics</a:t>
+            </a:r>
+          </a:p>
+        </p:txBody>
+      </p:sp>
+      <p:sp>
+        <p:nvSpPr>
+          <p:cNvPr id="3" name="Content Placeholder 2">
+            <a:extLst>
+              <a:ext uri="{FF2B5EF4-FFF2-40B4-BE49-F238E27FC236}">
+                <a16:creationId xmlns:a16="http://schemas.microsoft.com/office/drawing/2014/main" id="{7FBE010A-E981-5BC6-C14C-E79141D8C289}"/>
+              </a:ext>
+            </a:extLst>
+          </p:cNvPr>
+          <p:cNvSpPr>
+            <a:spLocks noGrp="1"/>
+          </p:cNvSpPr>
+          <p:nvPr>
+            <p:ph idx="1"/>
+          </p:nvPr>
+        </p:nvSpPr>
+        <p:spPr/>
+        <p:txBody>
+          <a:bodyPr/>
+          <a:lstStyle/>
+          <a:p>
+            <a:r>
+              <a:rPr lang="en-US" dirty="0">
+                <a:hlinkClick r:id="rId2"/>
+              </a:rPr>
+              <a:t>https://dan-ball.jp/en/javagame/dust/</a:t>
+            </a:r>
+            <a:endParaRPr lang="en-US" dirty="0"/>
           </a:p>
         </p:txBody>
       </p:sp>
       <p:pic>
         <p:nvPicPr>
-          <p:cNvPr id="3078" name="Picture 6" descr="Photographer Shoots Epic Battle Between Fox And Eagle Over Rabbit, And It Gets More And More Epic With Each Photo">
-            <a:extLst>
-              <a:ext uri="{FF2B5EF4-FFF2-40B4-BE49-F238E27FC236}">
-                <a16:creationId xmlns:a16="http://schemas.microsoft.com/office/drawing/2014/main" id="{11F4B439-3C47-5729-36C8-9EA50F41713C}"/>
+          <p:cNvPr id="6" name="Picture 5" descr="A pixelated image of a beach&#10;&#10;AI-generated content may be incorrect.">
+            <a:extLst>
+              <a:ext uri="{FF2B5EF4-FFF2-40B4-BE49-F238E27FC236}">
+                <a16:creationId xmlns:a16="http://schemas.microsoft.com/office/drawing/2014/main" id="{6C12D686-8E35-0274-488A-0915C7EFBD90}"/>
               </a:ext>
             </a:extLst>
           </p:cNvPr>
           <p:cNvPicPr>
-            <a:picLocks noChangeAspect="1" noChangeArrowheads="1"/>
+            <a:picLocks noChangeAspect="1"/>
           </p:cNvPicPr>
           <p:nvPr/>
         </p:nvPicPr>
         <p:blipFill>
-          <a:blip r:embed="rId3">
-            <a:extLst>
-              <a:ext uri="{28A0092B-C50C-407E-A947-70E740481C1C}">
-                <a14:useLocalDpi xmlns:a14="http://schemas.microsoft.com/office/drawing/2010/main" val="0"/>
-              </a:ext>
-            </a:extLst>
-          </a:blip>
+          <a:blip r:embed="rId3"/>
           <a:stretch>
             <a:fillRect/>
           </a:stretch>
         </p:blipFill>
-        <p:spPr bwMode="auto">
+        <p:spPr>
           <a:xfrm>
-            <a:off x="8038661" y="3924824"/>
-            <a:ext cx="3588640" cy="2395417"/>
+            <a:off x="6307785" y="2433233"/>
+            <a:ext cx="5454088" cy="4059641"/>
           </a:xfrm>
           <a:prstGeom prst="rect">
             <a:avLst/>
           </a:prstGeom>
-          <a:noFill/>
-          <a:extLst>
-            <a:ext uri="{909E8E84-426E-40DD-AFC4-6F175D3DCCD1}">
-              <a14:hiddenFill xmlns:a14="http://schemas.microsoft.com/office/drawing/2010/main">
-                <a:solidFill>
-                  <a:srgbClr val="FFFFFF"/>
-                </a:solidFill>
-              </a14:hiddenFill>
-            </a:ext>
-          </a:extLst>
         </p:spPr>
       </p:pic>
-      <p:sp>
-        <p:nvSpPr>
-          <p:cNvPr id="3089" name="Rectangle 3088">
-            <a:extLst>
-              <a:ext uri="{FF2B5EF4-FFF2-40B4-BE49-F238E27FC236}">
-                <a16:creationId xmlns:a16="http://schemas.microsoft.com/office/drawing/2014/main" id="{80B30ED8-273E-4C07-8568-2FE5CC5C483D}"/>
-              </a:ext>
-              <a:ext uri="{C183D7F6-B498-43B3-948B-1728B52AA6E4}">
-                <adec:decorative xmlns:adec="http://schemas.microsoft.com/office/drawing/2017/decorative" val="1"/>
-              </a:ext>
-            </a:extLst>
-          </p:cNvPr>
-          <p:cNvSpPr>
-            <a:spLocks noGrp="1" noRot="1" noChangeAspect="1" noMove="1" noResize="1" noEditPoints="1" noAdjustHandles="1" noChangeArrowheads="1" noChangeShapeType="1" noTextEdit="1"/>
-          </p:cNvSpPr>
-          <p:nvPr>
-            <p:extLst>
-              <p:ext uri="{386F3935-93C4-4BCD-93E2-E3B085C9AB24}">
-                <p16:designElem xmlns:p16="http://schemas.microsoft.com/office/powerpoint/2015/main" val="1"/>
-              </p:ext>
-            </p:extLst>
-          </p:nvPr>
-        </p:nvSpPr>
+      <p:pic>
+        <p:nvPicPr>
+          <p:cNvPr id="8" name="Picture 7" descr="A black and yellow background&#10;&#10;AI-generated content may be incorrect.">
+            <a:extLst>
+              <a:ext uri="{FF2B5EF4-FFF2-40B4-BE49-F238E27FC236}">
+                <a16:creationId xmlns:a16="http://schemas.microsoft.com/office/drawing/2014/main" id="{DEFBE2AB-647E-76C6-8A98-963465BCF09D}"/>
+              </a:ext>
+            </a:extLst>
+          </p:cNvPr>
+          <p:cNvPicPr>
+            <a:picLocks noChangeAspect="1"/>
+          </p:cNvPicPr>
+          <p:nvPr/>
+        </p:nvPicPr>
+        <p:blipFill>
+          <a:blip r:embed="rId4"/>
+          <a:stretch>
+            <a:fillRect/>
+          </a:stretch>
+        </p:blipFill>
         <p:spPr>
           <a:xfrm>
-            <a:off x="7825071" y="3543213"/>
-            <a:ext cx="3996261" cy="3177496"/>
+            <a:off x="445623" y="2433234"/>
+            <a:ext cx="5454089" cy="4059640"/>
           </a:xfrm>
           <a:prstGeom prst="rect">
             <a:avLst/>
           </a:prstGeom>
-          <a:noFill/>
-          <a:ln w="12700">
-            <a:solidFill>
-              <a:schemeClr val="accent2"/>
-            </a:solidFill>
-          </a:ln>
         </p:spPr>
-        <p:style>
-          <a:lnRef idx="2">
-            <a:schemeClr val="accent1">
-              <a:shade val="50000"/>
-            </a:schemeClr>
-          </a:lnRef>
-          <a:fillRef idx="1">
-            <a:schemeClr val="accent1"/>
-          </a:fillRef>
-          <a:effectRef idx="0">
-            <a:schemeClr val="accent1"/>
-          </a:effectRef>
-          <a:fontRef idx="minor">
-            <a:schemeClr val="lt1"/>
-          </a:fontRef>
-        </p:style>
-        <p:txBody>
-          <a:bodyPr rtlCol="0" anchor="ctr"/>
-          <a:lstStyle/>
-          <a:p>
-            <a:pPr algn="ctr"/>
-            <a:endParaRPr lang="en-US"/>
-          </a:p>
-        </p:txBody>
-      </p:sp>
-      <p:sp>
-        <p:nvSpPr>
-          <p:cNvPr id="2" name="Title 1">
-            <a:extLst>
-              <a:ext uri="{FF2B5EF4-FFF2-40B4-BE49-F238E27FC236}">
-                <a16:creationId xmlns:a16="http://schemas.microsoft.com/office/drawing/2014/main" id="{C8846B36-4FE8-971F-8F88-B3711EBED9DB}"/>
-              </a:ext>
-            </a:extLst>
-          </p:cNvPr>
-          <p:cNvSpPr>
-            <a:spLocks noGrp="1"/>
-          </p:cNvSpPr>
-          <p:nvPr>
-            <p:ph type="title"/>
-          </p:nvPr>
-        </p:nvSpPr>
-        <p:spPr>
-          <a:xfrm>
-            <a:off x="715490" y="5208814"/>
-            <a:ext cx="5565844" cy="937230"/>
-          </a:xfrm>
-        </p:spPr>
-        <p:txBody>
-          <a:bodyPr vert="horz" lIns="91440" tIns="45720" rIns="91440" bIns="45720" rtlCol="0" anchor="b">
-            <a:normAutofit fontScale="90000"/>
-          </a:bodyPr>
-          <a:lstStyle/>
-          <a:p>
-            <a:r>
-              <a:rPr lang="en-US" sz="3600" dirty="0">
-                <a:solidFill>
-                  <a:schemeClr val="bg1"/>
-                </a:solidFill>
-              </a:rPr>
-              <a:t>1. Rabbits multiply.</a:t>
-            </a:r>
-            <a:br>
-              <a:rPr lang="en-US" sz="3600" dirty="0">
-                <a:solidFill>
-                  <a:schemeClr val="bg1"/>
-                </a:solidFill>
-              </a:rPr>
-            </a:br>
-            <a:r>
-              <a:rPr lang="en-US" sz="3600" dirty="0">
-                <a:solidFill>
-                  <a:schemeClr val="bg1"/>
-                </a:solidFill>
-              </a:rPr>
-              <a:t>2. Fox feed on rabbits.</a:t>
-            </a:r>
-          </a:p>
-        </p:txBody>
-      </p:sp>
+      </p:pic>
     </p:spTree>
     <p:extLst>
       <p:ext uri="{BB962C8B-B14F-4D97-AF65-F5344CB8AC3E}">
-        <p14:creationId xmlns:p14="http://schemas.microsoft.com/office/powerpoint/2010/main" val="2780557047"/>
+        <p14:creationId xmlns:p14="http://schemas.microsoft.com/office/powerpoint/2010/main" val="3792893783"/>
       </p:ext>
     </p:extLst>
   </p:cSld>
@@ -10568,420 +6839,176 @@
           <a:chExt cx="0" cy="0"/>
         </a:xfrm>
       </p:grpSpPr>
-      <mc:AlternateContent xmlns:mc="http://schemas.openxmlformats.org/markup-compatibility/2006">
-        <mc:Choice xmlns:a14="http://schemas.microsoft.com/office/drawing/2010/main" Requires="a14">
-          <p:sp>
-            <p:nvSpPr>
-              <p:cNvPr id="9" name="TextBox 8">
-                <a:extLst>
-                  <a:ext uri="{FF2B5EF4-FFF2-40B4-BE49-F238E27FC236}">
-                    <a16:creationId xmlns:a16="http://schemas.microsoft.com/office/drawing/2014/main" id="{C0805BDD-20B7-2F6D-8EB2-C54DF25DB667}"/>
-                  </a:ext>
-                </a:extLst>
-              </p:cNvPr>
-              <p:cNvSpPr txBox="1"/>
-              <p:nvPr/>
-            </p:nvSpPr>
-            <p:spPr>
-              <a:xfrm>
-                <a:off x="4237290" y="2081975"/>
-                <a:ext cx="5558351" cy="769441"/>
-              </a:xfrm>
-              <a:prstGeom prst="rect">
-                <a:avLst/>
-              </a:prstGeom>
-              <a:noFill/>
-            </p:spPr>
-            <p:txBody>
-              <a:bodyPr wrap="square" rtlCol="0">
-                <a:spAutoFit/>
-              </a:bodyPr>
-              <a:lstStyle/>
-              <a:p>
-                <a:r>
-                  <a:rPr lang="en-US" sz="4400" dirty="0"/>
-                  <a:t>=   </a:t>
-                </a:r>
-                <a14:m>
-                  <m:oMath xmlns:m="http://schemas.openxmlformats.org/officeDocument/2006/math">
-                    <m:r>
-                      <a:rPr lang="en-US" sz="4400" b="0" i="1" smtClean="0">
-                        <a:latin typeface="Cambria Math" panose="02040503050406030204" pitchFamily="18" charset="0"/>
-                      </a:rPr>
-                      <m:t>𝑅</m:t>
-                    </m:r>
-                    <m:r>
-                      <a:rPr lang="en-US" sz="4400" b="0" i="1" smtClean="0">
-                        <a:latin typeface="Cambria Math" panose="02040503050406030204" pitchFamily="18" charset="0"/>
-                      </a:rPr>
-                      <m:t> + </m:t>
-                    </m:r>
-                    <m:sSub>
-                      <m:sSubPr>
-                        <m:ctrlPr>
-                          <a:rPr lang="en-US" sz="4400" b="0" i="1" smtClean="0">
-                            <a:latin typeface="Cambria Math" panose="02040503050406030204" pitchFamily="18" charset="0"/>
-                          </a:rPr>
-                        </m:ctrlPr>
-                      </m:sSubPr>
-                      <m:e>
-                        <m:r>
-                          <a:rPr lang="en-US" sz="4400" b="0" i="1" smtClean="0">
-                            <a:latin typeface="Cambria Math" panose="02040503050406030204" pitchFamily="18" charset="0"/>
-                          </a:rPr>
-                          <m:t>𝑔</m:t>
-                        </m:r>
-                      </m:e>
-                      <m:sub>
-                        <m:r>
-                          <a:rPr lang="en-US" sz="4400" b="0" i="1" smtClean="0">
-                            <a:latin typeface="Cambria Math" panose="02040503050406030204" pitchFamily="18" charset="0"/>
-                          </a:rPr>
-                          <m:t>1</m:t>
-                        </m:r>
-                      </m:sub>
-                    </m:sSub>
-                    <m:r>
-                      <a:rPr lang="en-US" sz="4400" b="0" i="1" smtClean="0">
-                        <a:latin typeface="Cambria Math" panose="02040503050406030204" pitchFamily="18" charset="0"/>
-                      </a:rPr>
-                      <m:t>𝑅</m:t>
-                    </m:r>
-                    <m:r>
-                      <a:rPr lang="en-US" sz="4400" b="0" i="1" smtClean="0">
-                        <a:latin typeface="Cambria Math" panose="02040503050406030204" pitchFamily="18" charset="0"/>
-                      </a:rPr>
-                      <m:t> − </m:t>
-                    </m:r>
-                    <m:sSub>
-                      <m:sSubPr>
-                        <m:ctrlPr>
-                          <a:rPr lang="en-US" sz="4400" b="0" i="1" smtClean="0">
-                            <a:latin typeface="Cambria Math" panose="02040503050406030204" pitchFamily="18" charset="0"/>
-                          </a:rPr>
-                        </m:ctrlPr>
-                      </m:sSubPr>
-                      <m:e>
-                        <m:r>
-                          <a:rPr lang="en-US" sz="4400" b="0" i="1" smtClean="0">
-                            <a:latin typeface="Cambria Math" panose="02040503050406030204" pitchFamily="18" charset="0"/>
-                          </a:rPr>
-                          <m:t>𝑑</m:t>
-                        </m:r>
-                      </m:e>
-                      <m:sub>
-                        <m:r>
-                          <a:rPr lang="en-US" sz="4400" b="0" i="1" smtClean="0">
-                            <a:latin typeface="Cambria Math" panose="02040503050406030204" pitchFamily="18" charset="0"/>
-                          </a:rPr>
-                          <m:t>1</m:t>
-                        </m:r>
-                      </m:sub>
-                    </m:sSub>
-                    <m:r>
-                      <a:rPr lang="en-US" sz="4400" b="0" i="1" smtClean="0">
-                        <a:latin typeface="Cambria Math" panose="02040503050406030204" pitchFamily="18" charset="0"/>
-                      </a:rPr>
-                      <m:t>𝑅𝐹</m:t>
-                    </m:r>
-                  </m:oMath>
-                </a14:m>
-                <a:endParaRPr lang="en-US" sz="4400" b="0" dirty="0"/>
-              </a:p>
-            </p:txBody>
-          </p:sp>
-        </mc:Choice>
-        <mc:Fallback>
-          <p:sp>
-            <p:nvSpPr>
-              <p:cNvPr id="9" name="TextBox 8">
-                <a:extLst>
-                  <a:ext uri="{FF2B5EF4-FFF2-40B4-BE49-F238E27FC236}">
-                    <a16:creationId xmlns:a16="http://schemas.microsoft.com/office/drawing/2014/main" id="{C0805BDD-20B7-2F6D-8EB2-C54DF25DB667}"/>
-                  </a:ext>
-                </a:extLst>
-              </p:cNvPr>
-              <p:cNvSpPr txBox="1">
-                <a:spLocks noRot="1" noChangeAspect="1" noMove="1" noResize="1" noEditPoints="1" noAdjustHandles="1" noChangeArrowheads="1" noChangeShapeType="1" noTextEdit="1"/>
-              </p:cNvSpPr>
-              <p:nvPr/>
-            </p:nvSpPr>
-            <p:spPr>
-              <a:xfrm>
-                <a:off x="4237290" y="2081975"/>
-                <a:ext cx="5558351" cy="769441"/>
-              </a:xfrm>
-              <a:prstGeom prst="rect">
-                <a:avLst/>
-              </a:prstGeom>
-              <a:blipFill>
-                <a:blip r:embed="rId2"/>
-                <a:stretch>
-                  <a:fillRect l="-4556" t="-16393" b="-37705"/>
-                </a:stretch>
-              </a:blipFill>
-            </p:spPr>
-            <p:txBody>
-              <a:bodyPr/>
-              <a:lstStyle/>
-              <a:p>
-                <a:r>
-                  <a:rPr lang="en-US">
-                    <a:noFill/>
-                  </a:rPr>
-                  <a:t> </a:t>
-                </a:r>
-              </a:p>
-            </p:txBody>
-          </p:sp>
-        </mc:Fallback>
-      </mc:AlternateContent>
-      <mc:AlternateContent xmlns:mc="http://schemas.openxmlformats.org/markup-compatibility/2006">
-        <mc:Choice xmlns:a14="http://schemas.microsoft.com/office/drawing/2010/main" Requires="a14">
-          <p:sp>
-            <p:nvSpPr>
-              <p:cNvPr id="11" name="TextBox 10">
-                <a:extLst>
-                  <a:ext uri="{FF2B5EF4-FFF2-40B4-BE49-F238E27FC236}">
-                    <a16:creationId xmlns:a16="http://schemas.microsoft.com/office/drawing/2014/main" id="{DF3C6143-CCD2-D3BE-7DD1-6AA41FF393D1}"/>
-                  </a:ext>
-                </a:extLst>
-              </p:cNvPr>
-              <p:cNvSpPr txBox="1"/>
-              <p:nvPr/>
-            </p:nvSpPr>
-            <p:spPr>
-              <a:xfrm>
-                <a:off x="2291255" y="5745721"/>
-                <a:ext cx="476606" cy="369643"/>
-              </a:xfrm>
-              <a:prstGeom prst="rect">
-                <a:avLst/>
-              </a:prstGeom>
-              <a:noFill/>
-            </p:spPr>
-            <p:txBody>
-              <a:bodyPr wrap="none" rtlCol="0">
-                <a:spAutoFit/>
-              </a:bodyPr>
-              <a:lstStyle/>
-              <a:p>
-                <a14:m>
-                  <m:oMathPara xmlns:m="http://schemas.openxmlformats.org/officeDocument/2006/math">
-                    <m:oMathParaPr>
-                      <m:jc m:val="centerGroup"/>
-                    </m:oMathParaPr>
-                    <m:oMath xmlns:m="http://schemas.openxmlformats.org/officeDocument/2006/math">
-                      <m:sSub>
-                        <m:sSubPr>
-                          <m:ctrlPr>
-                            <a:rPr lang="en-US" sz="2000" b="0" i="1" smtClean="0">
-                              <a:latin typeface="Cambria Math" panose="02040503050406030204" pitchFamily="18" charset="0"/>
-                            </a:rPr>
-                          </m:ctrlPr>
-                        </m:sSubPr>
-                        <m:e>
-                          <m:r>
-                            <a:rPr lang="en-US" sz="2000" b="0" i="1" smtClean="0">
-                              <a:latin typeface="Cambria Math" panose="02040503050406030204" pitchFamily="18" charset="0"/>
-                            </a:rPr>
-                            <m:t>𝑔</m:t>
-                          </m:r>
-                        </m:e>
-                        <m:sub>
-                          <m:r>
-                            <a:rPr lang="en-US" sz="2000" b="0" i="1" smtClean="0">
-                              <a:latin typeface="Cambria Math" panose="02040503050406030204" pitchFamily="18" charset="0"/>
-                            </a:rPr>
-                            <m:t>1</m:t>
-                          </m:r>
-                        </m:sub>
-                      </m:sSub>
-                      <m:r>
-                        <a:rPr lang="en-US" sz="2000" b="0" i="1" smtClean="0">
-                          <a:latin typeface="Cambria Math" panose="02040503050406030204" pitchFamily="18" charset="0"/>
-                        </a:rPr>
-                        <m:t>:</m:t>
-                      </m:r>
-                    </m:oMath>
-                  </m:oMathPara>
-                </a14:m>
-                <a:endParaRPr lang="en-US" sz="2000" dirty="0"/>
-              </a:p>
-            </p:txBody>
-          </p:sp>
-        </mc:Choice>
-        <mc:Fallback>
-          <p:sp>
-            <p:nvSpPr>
-              <p:cNvPr id="11" name="TextBox 10">
-                <a:extLst>
-                  <a:ext uri="{FF2B5EF4-FFF2-40B4-BE49-F238E27FC236}">
-                    <a16:creationId xmlns:a16="http://schemas.microsoft.com/office/drawing/2014/main" id="{DF3C6143-CCD2-D3BE-7DD1-6AA41FF393D1}"/>
-                  </a:ext>
-                </a:extLst>
-              </p:cNvPr>
-              <p:cNvSpPr txBox="1">
-                <a:spLocks noRot="1" noChangeAspect="1" noMove="1" noResize="1" noEditPoints="1" noAdjustHandles="1" noChangeArrowheads="1" noChangeShapeType="1" noTextEdit="1"/>
-              </p:cNvSpPr>
-              <p:nvPr/>
-            </p:nvSpPr>
-            <p:spPr>
-              <a:xfrm>
-                <a:off x="2291255" y="5745721"/>
-                <a:ext cx="476606" cy="369643"/>
-              </a:xfrm>
-              <a:prstGeom prst="rect">
-                <a:avLst/>
-              </a:prstGeom>
-              <a:blipFill>
-                <a:blip r:embed="rId3"/>
-                <a:stretch>
-                  <a:fillRect b="-16667"/>
-                </a:stretch>
-              </a:blipFill>
-            </p:spPr>
-            <p:txBody>
-              <a:bodyPr/>
-              <a:lstStyle/>
-              <a:p>
-                <a:r>
-                  <a:rPr lang="en-US">
-                    <a:noFill/>
-                  </a:rPr>
-                  <a:t> </a:t>
-                </a:r>
-              </a:p>
-            </p:txBody>
-          </p:sp>
-        </mc:Fallback>
-      </mc:AlternateContent>
-      <mc:AlternateContent xmlns:mc="http://schemas.openxmlformats.org/markup-compatibility/2006">
-        <mc:Choice xmlns:a14="http://schemas.microsoft.com/office/drawing/2010/main" Requires="a14">
-          <p:sp>
-            <p:nvSpPr>
-              <p:cNvPr id="13" name="TextBox 12">
-                <a:extLst>
-                  <a:ext uri="{FF2B5EF4-FFF2-40B4-BE49-F238E27FC236}">
-                    <a16:creationId xmlns:a16="http://schemas.microsoft.com/office/drawing/2014/main" id="{554B10DC-B6E5-27C8-E03F-DF22F8F46A4A}"/>
-                  </a:ext>
-                </a:extLst>
-              </p:cNvPr>
-              <p:cNvSpPr txBox="1"/>
-              <p:nvPr/>
-            </p:nvSpPr>
-            <p:spPr>
-              <a:xfrm>
-                <a:off x="2291255" y="6163235"/>
-                <a:ext cx="481620" cy="369643"/>
-              </a:xfrm>
-              <a:prstGeom prst="rect">
-                <a:avLst/>
-              </a:prstGeom>
-              <a:noFill/>
-            </p:spPr>
-            <p:txBody>
-              <a:bodyPr wrap="none" rtlCol="0">
-                <a:spAutoFit/>
-              </a:bodyPr>
-              <a:lstStyle/>
-              <a:p>
-                <a14:m>
-                  <m:oMathPara xmlns:m="http://schemas.openxmlformats.org/officeDocument/2006/math">
-                    <m:oMathParaPr>
-                      <m:jc m:val="centerGroup"/>
-                    </m:oMathParaPr>
-                    <m:oMath xmlns:m="http://schemas.openxmlformats.org/officeDocument/2006/math">
-                      <m:sSub>
-                        <m:sSubPr>
-                          <m:ctrlPr>
-                            <a:rPr lang="en-US" sz="2000" b="0" i="1" smtClean="0">
-                              <a:latin typeface="Cambria Math" panose="02040503050406030204" pitchFamily="18" charset="0"/>
-                            </a:rPr>
-                          </m:ctrlPr>
-                        </m:sSubPr>
-                        <m:e>
-                          <m:r>
-                            <a:rPr lang="en-US" sz="2000" b="0" i="1" smtClean="0">
-                              <a:latin typeface="Cambria Math" panose="02040503050406030204" pitchFamily="18" charset="0"/>
-                            </a:rPr>
-                            <m:t>𝑔</m:t>
-                          </m:r>
-                        </m:e>
-                        <m:sub>
-                          <m:r>
-                            <a:rPr lang="en-US" sz="2000" b="0" i="1" smtClean="0">
-                              <a:latin typeface="Cambria Math" panose="02040503050406030204" pitchFamily="18" charset="0"/>
-                            </a:rPr>
-                            <m:t>2</m:t>
-                          </m:r>
-                        </m:sub>
-                      </m:sSub>
-                      <m:r>
-                        <a:rPr lang="en-US" sz="2000" b="0" i="1" smtClean="0">
-                          <a:latin typeface="Cambria Math" panose="02040503050406030204" pitchFamily="18" charset="0"/>
-                        </a:rPr>
-                        <m:t>:</m:t>
-                      </m:r>
-                    </m:oMath>
-                  </m:oMathPara>
-                </a14:m>
-                <a:endParaRPr lang="en-US" sz="2000" dirty="0"/>
-              </a:p>
-            </p:txBody>
-          </p:sp>
-        </mc:Choice>
-        <mc:Fallback>
-          <p:sp>
-            <p:nvSpPr>
-              <p:cNvPr id="13" name="TextBox 12">
-                <a:extLst>
-                  <a:ext uri="{FF2B5EF4-FFF2-40B4-BE49-F238E27FC236}">
-                    <a16:creationId xmlns:a16="http://schemas.microsoft.com/office/drawing/2014/main" id="{554B10DC-B6E5-27C8-E03F-DF22F8F46A4A}"/>
-                  </a:ext>
-                </a:extLst>
-              </p:cNvPr>
-              <p:cNvSpPr txBox="1">
-                <a:spLocks noRot="1" noChangeAspect="1" noMove="1" noResize="1" noEditPoints="1" noAdjustHandles="1" noChangeArrowheads="1" noChangeShapeType="1" noTextEdit="1"/>
-              </p:cNvSpPr>
-              <p:nvPr/>
-            </p:nvSpPr>
-            <p:spPr>
-              <a:xfrm>
-                <a:off x="2291255" y="6163235"/>
-                <a:ext cx="481620" cy="369643"/>
-              </a:xfrm>
-              <a:prstGeom prst="rect">
-                <a:avLst/>
-              </a:prstGeom>
-              <a:blipFill>
-                <a:blip r:embed="rId4"/>
-                <a:stretch>
-                  <a:fillRect b="-16667"/>
-                </a:stretch>
-              </a:blipFill>
-            </p:spPr>
-            <p:txBody>
-              <a:bodyPr/>
-              <a:lstStyle/>
-              <a:p>
-                <a:r>
-                  <a:rPr lang="en-US">
-                    <a:noFill/>
-                  </a:rPr>
-                  <a:t> </a:t>
-                </a:r>
-              </a:p>
-            </p:txBody>
-          </p:sp>
-        </mc:Fallback>
-      </mc:AlternateContent>
-      <p:sp>
-        <p:nvSpPr>
-          <p:cNvPr id="16" name="TextBox 15">
-            <a:extLst>
-              <a:ext uri="{FF2B5EF4-FFF2-40B4-BE49-F238E27FC236}">
-                <a16:creationId xmlns:a16="http://schemas.microsoft.com/office/drawing/2014/main" id="{54E66330-13DE-BBAC-0A6C-1963A6447FBC}"/>
+      <p:pic>
+        <p:nvPicPr>
+          <p:cNvPr id="3" name="Picture 2" descr="graphic shows a cartoon of a cell dividing.">
+            <a:extLst>
+              <a:ext uri="{FF2B5EF4-FFF2-40B4-BE49-F238E27FC236}">
+                <a16:creationId xmlns:a16="http://schemas.microsoft.com/office/drawing/2014/main" id="{C0A380ED-BFAD-5DD2-C3E3-C0B54141E9A1}"/>
+              </a:ext>
+            </a:extLst>
+          </p:cNvPr>
+          <p:cNvPicPr>
+            <a:picLocks noChangeAspect="1"/>
+          </p:cNvPicPr>
+          <p:nvPr/>
+        </p:nvPicPr>
+        <p:blipFill>
+          <a:blip r:embed="rId2"/>
+          <a:stretch>
+            <a:fillRect/>
+          </a:stretch>
+        </p:blipFill>
+        <p:spPr>
+          <a:xfrm>
+            <a:off x="2209800" y="685879"/>
+            <a:ext cx="7772400" cy="4895248"/>
+          </a:xfrm>
+          <a:prstGeom prst="rect">
+            <a:avLst/>
+          </a:prstGeom>
+        </p:spPr>
+      </p:pic>
+      <p:pic>
+        <p:nvPicPr>
+          <p:cNvPr id="6" name="Picture 5">
+            <a:extLst>
+              <a:ext uri="{FF2B5EF4-FFF2-40B4-BE49-F238E27FC236}">
+                <a16:creationId xmlns:a16="http://schemas.microsoft.com/office/drawing/2014/main" id="{852BD599-E5E7-F42C-D523-2B3058DFF8DF}"/>
+              </a:ext>
+            </a:extLst>
+          </p:cNvPr>
+          <p:cNvPicPr>
+            <a:picLocks noChangeAspect="1"/>
+          </p:cNvPicPr>
+          <p:nvPr/>
+        </p:nvPicPr>
+        <p:blipFill>
+          <a:blip r:embed="rId3"/>
+          <a:stretch>
+            <a:fillRect/>
+          </a:stretch>
+        </p:blipFill>
+        <p:spPr>
+          <a:xfrm>
+            <a:off x="5130800" y="5836797"/>
+            <a:ext cx="7061200" cy="1041400"/>
+          </a:xfrm>
+          <a:prstGeom prst="rect">
+            <a:avLst/>
+          </a:prstGeom>
+        </p:spPr>
+      </p:pic>
+      <p:pic>
+        <p:nvPicPr>
+          <p:cNvPr id="8" name="Picture 7" descr="A screenshot of a computer&#10;&#10;AI-generated content may be incorrect.">
+            <a:extLst>
+              <a:ext uri="{FF2B5EF4-FFF2-40B4-BE49-F238E27FC236}">
+                <a16:creationId xmlns:a16="http://schemas.microsoft.com/office/drawing/2014/main" id="{5A749992-7549-1CDF-5195-09BB51CAF5E7}"/>
+              </a:ext>
+            </a:extLst>
+          </p:cNvPr>
+          <p:cNvPicPr>
+            <a:picLocks noChangeAspect="1"/>
+          </p:cNvPicPr>
+          <p:nvPr/>
+        </p:nvPicPr>
+        <p:blipFill>
+          <a:blip r:embed="rId4"/>
+          <a:srcRect b="63556"/>
+          <a:stretch>
+            <a:fillRect/>
+          </a:stretch>
+        </p:blipFill>
+        <p:spPr>
+          <a:xfrm>
+            <a:off x="5118099" y="0"/>
+            <a:ext cx="7073900" cy="1041400"/>
+          </a:xfrm>
+          <a:prstGeom prst="rect">
+            <a:avLst/>
+          </a:prstGeom>
+        </p:spPr>
+      </p:pic>
+      <p:pic>
+        <p:nvPicPr>
+          <p:cNvPr id="10" name="Picture 9" descr="A close-up of a list of names&#10;&#10;AI-generated content may be incorrect.">
+            <a:extLst>
+              <a:ext uri="{FF2B5EF4-FFF2-40B4-BE49-F238E27FC236}">
+                <a16:creationId xmlns:a16="http://schemas.microsoft.com/office/drawing/2014/main" id="{556F34C1-973F-D971-A2C0-B7B4920BD328}"/>
+              </a:ext>
+            </a:extLst>
+          </p:cNvPr>
+          <p:cNvPicPr>
+            <a:picLocks noChangeAspect="1"/>
+          </p:cNvPicPr>
+          <p:nvPr/>
+        </p:nvPicPr>
+        <p:blipFill>
+          <a:blip r:embed="rId5"/>
+          <a:stretch>
+            <a:fillRect/>
+          </a:stretch>
+        </p:blipFill>
+        <p:spPr>
+          <a:xfrm>
+            <a:off x="8431077" y="1061597"/>
+            <a:ext cx="3760922" cy="840278"/>
+          </a:xfrm>
+          <a:prstGeom prst="rect">
+            <a:avLst/>
+          </a:prstGeom>
+        </p:spPr>
+      </p:pic>
+      <p:sp>
+        <p:nvSpPr>
+          <p:cNvPr id="11" name="Title 1">
+            <a:extLst>
+              <a:ext uri="{FF2B5EF4-FFF2-40B4-BE49-F238E27FC236}">
+                <a16:creationId xmlns:a16="http://schemas.microsoft.com/office/drawing/2014/main" id="{653CA636-013D-35F6-EE1C-6B1E1C721163}"/>
+              </a:ext>
+            </a:extLst>
+          </p:cNvPr>
+          <p:cNvSpPr>
+            <a:spLocks noGrp="1"/>
+          </p:cNvSpPr>
+          <p:nvPr>
+            <p:ph type="title"/>
+          </p:nvPr>
+        </p:nvSpPr>
+        <p:spPr>
+          <a:xfrm>
+            <a:off x="1" y="1"/>
+            <a:ext cx="3533614" cy="2014779"/>
+          </a:xfrm>
+        </p:spPr>
+        <p:txBody>
+          <a:bodyPr>
+            <a:normAutofit/>
+          </a:bodyPr>
+          <a:lstStyle/>
+          <a:p>
+            <a:r>
+              <a:rPr lang="en-US" dirty="0"/>
+              <a:t>How can we model </a:t>
+            </a:r>
+            <a:r>
+              <a:rPr lang="en-US" i="1" dirty="0"/>
+              <a:t>everything</a:t>
+            </a:r>
+            <a:r>
+              <a:rPr lang="en-US" dirty="0"/>
+              <a:t>?</a:t>
+            </a:r>
+          </a:p>
+        </p:txBody>
+      </p:sp>
+      <p:sp>
+        <p:nvSpPr>
+          <p:cNvPr id="12" name="TextBox 11">
+            <a:extLst>
+              <a:ext uri="{FF2B5EF4-FFF2-40B4-BE49-F238E27FC236}">
+                <a16:creationId xmlns:a16="http://schemas.microsoft.com/office/drawing/2014/main" id="{78822060-F725-9715-3734-27D242155C15}"/>
               </a:ext>
             </a:extLst>
           </p:cNvPr>
@@ -10990,8 +7017,8 @@
         </p:nvSpPr>
         <p:spPr>
           <a:xfrm>
-            <a:off x="2882107" y="5787823"/>
-            <a:ext cx="1961520" cy="341209"/>
+            <a:off x="-80563" y="6253195"/>
+            <a:ext cx="5211363" cy="369332"/>
           </a:xfrm>
           <a:prstGeom prst="rect">
             <a:avLst/>
@@ -11005,18 +7032,45 @@
           <a:lstStyle/>
           <a:p>
             <a:r>
-              <a:rPr lang="en-US" dirty="0"/>
-              <a:t>Growth rate of rabbits</a:t>
-            </a:r>
-          </a:p>
-        </p:txBody>
-      </p:sp>
-      <p:sp>
-        <p:nvSpPr>
-          <p:cNvPr id="17" name="TextBox 16">
-            <a:extLst>
-              <a:ext uri="{FF2B5EF4-FFF2-40B4-BE49-F238E27FC236}">
-                <a16:creationId xmlns:a16="http://schemas.microsoft.com/office/drawing/2014/main" id="{A2F7E5E7-0F21-6B8A-AD71-06BA9F8FC83C}"/>
+              <a:rPr lang="en-US" dirty="0">
+                <a:hlinkClick r:id="rId6"/>
+              </a:rPr>
+              <a:t>https://</a:t>
+            </a:r>
+            <a:r>
+              <a:rPr lang="en-US" dirty="0" err="1">
+                <a:hlinkClick r:id="rId6"/>
+              </a:rPr>
+              <a:t>www.youtube.com</a:t>
+            </a:r>
+            <a:r>
+              <a:rPr lang="en-US" dirty="0">
+                <a:hlinkClick r:id="rId6"/>
+              </a:rPr>
+              <a:t>/</a:t>
+            </a:r>
+            <a:r>
+              <a:rPr lang="en-US" dirty="0" err="1">
+                <a:hlinkClick r:id="rId6"/>
+              </a:rPr>
+              <a:t>watch?v</a:t>
+            </a:r>
+            <a:r>
+              <a:rPr lang="en-US" dirty="0">
+                <a:hlinkClick r:id="rId6"/>
+              </a:rPr>
+              <a:t>=EQ2ywYhYs5Y</a:t>
+            </a:r>
+            <a:endParaRPr lang="en-US" dirty="0"/>
+          </a:p>
+        </p:txBody>
+      </p:sp>
+      <p:sp>
+        <p:nvSpPr>
+          <p:cNvPr id="2" name="TextBox 1">
+            <a:extLst>
+              <a:ext uri="{FF2B5EF4-FFF2-40B4-BE49-F238E27FC236}">
+                <a16:creationId xmlns:a16="http://schemas.microsoft.com/office/drawing/2014/main" id="{EFC2738C-28F1-01F6-73D7-B8C0F1455531}"/>
               </a:ext>
             </a:extLst>
           </p:cNvPr>
@@ -11025,8 +7079,8 @@
         </p:nvSpPr>
         <p:spPr>
           <a:xfrm>
-            <a:off x="2882107" y="6195397"/>
-            <a:ext cx="1816452" cy="341209"/>
+            <a:off x="-69246" y="6508865"/>
+            <a:ext cx="5188728" cy="369332"/>
           </a:xfrm>
           <a:prstGeom prst="rect">
             <a:avLst/>
@@ -11040,434 +7094,30 @@
           <a:lstStyle/>
           <a:p>
             <a:r>
-              <a:rPr lang="en-US" dirty="0"/>
-              <a:t>Growth rate of foxes</a:t>
-            </a:r>
-          </a:p>
-        </p:txBody>
-      </p:sp>
-      <p:sp>
-        <p:nvSpPr>
-          <p:cNvPr id="22" name="TextBox 21">
-            <a:extLst>
-              <a:ext uri="{FF2B5EF4-FFF2-40B4-BE49-F238E27FC236}">
-                <a16:creationId xmlns:a16="http://schemas.microsoft.com/office/drawing/2014/main" id="{9999D3B9-3B4F-5E7A-C7EF-9663CF9412E6}"/>
-              </a:ext>
-            </a:extLst>
-          </p:cNvPr>
-          <p:cNvSpPr txBox="1"/>
-          <p:nvPr/>
-        </p:nvSpPr>
-        <p:spPr>
-          <a:xfrm>
-            <a:off x="1404515" y="2124348"/>
-            <a:ext cx="2098098" cy="646331"/>
-          </a:xfrm>
-          <a:prstGeom prst="rect">
-            <a:avLst/>
-          </a:prstGeom>
-          <a:noFill/>
-        </p:spPr>
-        <p:txBody>
-          <a:bodyPr wrap="square" rtlCol="0">
-            <a:spAutoFit/>
-          </a:bodyPr>
-          <a:lstStyle/>
-          <a:p>
-            <a:r>
-              <a:rPr lang="en-US" dirty="0"/>
-              <a:t>Rabbit pop. in</a:t>
-            </a:r>
-          </a:p>
-          <a:p>
-            <a:r>
-              <a:rPr lang="en-US" dirty="0"/>
-              <a:t>next generation</a:t>
-            </a:r>
-          </a:p>
-        </p:txBody>
-      </p:sp>
-      <p:sp>
-        <p:nvSpPr>
-          <p:cNvPr id="24" name="Title 1">
-            <a:extLst>
-              <a:ext uri="{FF2B5EF4-FFF2-40B4-BE49-F238E27FC236}">
-                <a16:creationId xmlns:a16="http://schemas.microsoft.com/office/drawing/2014/main" id="{44761F10-2810-1E1F-033B-B3423178B69A}"/>
-              </a:ext>
-            </a:extLst>
-          </p:cNvPr>
-          <p:cNvSpPr>
-            <a:spLocks noGrp="1"/>
-          </p:cNvSpPr>
-          <p:nvPr>
-            <p:ph type="title"/>
-          </p:nvPr>
-        </p:nvSpPr>
-        <p:spPr>
-          <a:xfrm>
-            <a:off x="838200" y="365125"/>
-            <a:ext cx="10515600" cy="1325563"/>
-          </a:xfrm>
-        </p:spPr>
-        <p:txBody>
-          <a:bodyPr/>
-          <a:lstStyle/>
-          <a:p>
-            <a:r>
-              <a:rPr lang="en-US" dirty="0"/>
-              <a:t>Modeling the Rabbit-Fox interactions</a:t>
-            </a:r>
-          </a:p>
-        </p:txBody>
-      </p:sp>
-      <p:sp>
-        <p:nvSpPr>
-          <p:cNvPr id="25" name="TextBox 24">
-            <a:extLst>
-              <a:ext uri="{FF2B5EF4-FFF2-40B4-BE49-F238E27FC236}">
-                <a16:creationId xmlns:a16="http://schemas.microsoft.com/office/drawing/2014/main" id="{6830B1AE-F0DE-CEC9-5DA3-411CCFA766CF}"/>
-              </a:ext>
-            </a:extLst>
-          </p:cNvPr>
-          <p:cNvSpPr txBox="1"/>
-          <p:nvPr/>
-        </p:nvSpPr>
-        <p:spPr>
-          <a:xfrm>
-            <a:off x="5812221" y="3090113"/>
-            <a:ext cx="1565172" cy="369332"/>
-          </a:xfrm>
-          <a:prstGeom prst="rect">
-            <a:avLst/>
-          </a:prstGeom>
-          <a:noFill/>
-        </p:spPr>
-        <p:txBody>
-          <a:bodyPr wrap="none" rtlCol="0">
-            <a:spAutoFit/>
-          </a:bodyPr>
-          <a:lstStyle/>
-          <a:p>
-            <a:r>
-              <a:rPr lang="en-US" dirty="0"/>
-              <a:t>Rabbit growth</a:t>
-            </a:r>
-          </a:p>
-        </p:txBody>
-      </p:sp>
-      <p:sp>
-        <p:nvSpPr>
-          <p:cNvPr id="26" name="TextBox 25">
-            <a:extLst>
-              <a:ext uri="{FF2B5EF4-FFF2-40B4-BE49-F238E27FC236}">
-                <a16:creationId xmlns:a16="http://schemas.microsoft.com/office/drawing/2014/main" id="{04A43354-5EB5-D7F4-7B51-290A6809A55B}"/>
-              </a:ext>
-            </a:extLst>
-          </p:cNvPr>
-          <p:cNvSpPr txBox="1"/>
-          <p:nvPr/>
-        </p:nvSpPr>
-        <p:spPr>
-          <a:xfrm>
-            <a:off x="7939204" y="3095630"/>
-            <a:ext cx="1459951" cy="369332"/>
-          </a:xfrm>
-          <a:prstGeom prst="rect">
-            <a:avLst/>
-          </a:prstGeom>
-          <a:noFill/>
-        </p:spPr>
-        <p:txBody>
-          <a:bodyPr wrap="none" rtlCol="0">
-            <a:spAutoFit/>
-          </a:bodyPr>
-          <a:lstStyle/>
-          <a:p>
-            <a:r>
-              <a:rPr lang="en-US" dirty="0"/>
-              <a:t>Rabbit death</a:t>
-            </a:r>
-          </a:p>
-        </p:txBody>
-      </p:sp>
-      <p:sp>
-        <p:nvSpPr>
-          <p:cNvPr id="31" name="Rectangle 30">
-            <a:extLst>
-              <a:ext uri="{FF2B5EF4-FFF2-40B4-BE49-F238E27FC236}">
-                <a16:creationId xmlns:a16="http://schemas.microsoft.com/office/drawing/2014/main" id="{36408CC1-37D8-E4BB-5394-29CC08842FDC}"/>
-              </a:ext>
-            </a:extLst>
-          </p:cNvPr>
-          <p:cNvSpPr/>
-          <p:nvPr/>
-        </p:nvSpPr>
-        <p:spPr>
-          <a:xfrm>
-            <a:off x="5576419" y="1870840"/>
-            <a:ext cx="1806910" cy="1849821"/>
-          </a:xfrm>
-          <a:prstGeom prst="rect">
-            <a:avLst/>
-          </a:prstGeom>
-          <a:solidFill>
-            <a:schemeClr val="bg1"/>
-          </a:solidFill>
-          <a:ln>
-            <a:noFill/>
-          </a:ln>
-        </p:spPr>
-        <p:style>
-          <a:lnRef idx="2">
-            <a:schemeClr val="accent1">
-              <a:shade val="15000"/>
-            </a:schemeClr>
-          </a:lnRef>
-          <a:fillRef idx="1">
-            <a:schemeClr val="accent1"/>
-          </a:fillRef>
-          <a:effectRef idx="0">
-            <a:schemeClr val="accent1"/>
-          </a:effectRef>
-          <a:fontRef idx="minor">
-            <a:schemeClr val="lt1"/>
-          </a:fontRef>
-        </p:style>
-        <p:txBody>
-          <a:bodyPr rtlCol="0" anchor="ctr"/>
-          <a:lstStyle/>
-          <a:p>
-            <a:pPr algn="ctr"/>
-            <a:endParaRPr lang="en-US"/>
-          </a:p>
-        </p:txBody>
-      </p:sp>
-      <p:sp>
-        <p:nvSpPr>
-          <p:cNvPr id="32" name="Rectangle 31">
-            <a:extLst>
-              <a:ext uri="{FF2B5EF4-FFF2-40B4-BE49-F238E27FC236}">
-                <a16:creationId xmlns:a16="http://schemas.microsoft.com/office/drawing/2014/main" id="{2CE9730B-E938-E2F0-4FC0-120E6C6CC470}"/>
-              </a:ext>
-            </a:extLst>
-          </p:cNvPr>
-          <p:cNvSpPr/>
-          <p:nvPr/>
-        </p:nvSpPr>
-        <p:spPr>
-          <a:xfrm>
-            <a:off x="7467599" y="1870840"/>
-            <a:ext cx="2328041" cy="1849821"/>
-          </a:xfrm>
-          <a:prstGeom prst="rect">
-            <a:avLst/>
-          </a:prstGeom>
-          <a:solidFill>
-            <a:schemeClr val="bg1"/>
-          </a:solidFill>
-          <a:ln>
-            <a:noFill/>
-          </a:ln>
-        </p:spPr>
-        <p:style>
-          <a:lnRef idx="2">
-            <a:schemeClr val="accent1">
-              <a:shade val="15000"/>
-            </a:schemeClr>
-          </a:lnRef>
-          <a:fillRef idx="1">
-            <a:schemeClr val="accent1"/>
-          </a:fillRef>
-          <a:effectRef idx="0">
-            <a:schemeClr val="accent1"/>
-          </a:effectRef>
-          <a:fontRef idx="minor">
-            <a:schemeClr val="lt1"/>
-          </a:fontRef>
-        </p:style>
-        <p:txBody>
-          <a:bodyPr rtlCol="0" anchor="ctr"/>
-          <a:lstStyle/>
-          <a:p>
-            <a:pPr algn="ctr"/>
-            <a:endParaRPr lang="en-US"/>
-          </a:p>
-        </p:txBody>
-      </p:sp>
-      <p:sp>
-        <p:nvSpPr>
-          <p:cNvPr id="33" name="TextBox 32">
-            <a:extLst>
-              <a:ext uri="{FF2B5EF4-FFF2-40B4-BE49-F238E27FC236}">
-                <a16:creationId xmlns:a16="http://schemas.microsoft.com/office/drawing/2014/main" id="{1A23D81A-9175-D815-E3BE-70EF75DD8239}"/>
-              </a:ext>
-            </a:extLst>
-          </p:cNvPr>
-          <p:cNvSpPr txBox="1"/>
-          <p:nvPr/>
-        </p:nvSpPr>
-        <p:spPr>
-          <a:xfrm>
-            <a:off x="4628659" y="3111954"/>
-            <a:ext cx="947760" cy="369332"/>
-          </a:xfrm>
-          <a:prstGeom prst="rect">
-            <a:avLst/>
-          </a:prstGeom>
-          <a:noFill/>
-        </p:spPr>
-        <p:txBody>
-          <a:bodyPr wrap="none" rtlCol="0">
-            <a:spAutoFit/>
-          </a:bodyPr>
-          <a:lstStyle/>
-          <a:p>
-            <a:r>
-              <a:rPr lang="en-US" dirty="0"/>
-              <a:t>Current</a:t>
-            </a:r>
+              <a:rPr lang="en-US" dirty="0">
+                <a:hlinkClick r:id="rId7"/>
+              </a:rPr>
+              <a:t>https://www.youtube.com/watch?v=9JhVKu4GEA8</a:t>
+            </a:r>
+            <a:endParaRPr lang="en-US" dirty="0"/>
           </a:p>
         </p:txBody>
       </p:sp>
     </p:spTree>
     <p:extLst>
       <p:ext uri="{BB962C8B-B14F-4D97-AF65-F5344CB8AC3E}">
-        <p14:creationId xmlns:p14="http://schemas.microsoft.com/office/powerpoint/2010/main" val="3685043916"/>
+        <p14:creationId xmlns:p14="http://schemas.microsoft.com/office/powerpoint/2010/main" val="1739295925"/>
       </p:ext>
     </p:extLst>
   </p:cSld>
   <p:clrMapOvr>
     <a:masterClrMapping/>
   </p:clrMapOvr>
-  <p:timing>
-    <p:tnLst>
-      <p:par>
-        <p:cTn id="1" dur="indefinite" restart="never" nodeType="tmRoot">
-          <p:childTnLst>
-            <p:seq concurrent="1" nextAc="seek">
-              <p:cTn id="2" dur="indefinite" nodeType="mainSeq">
-                <p:childTnLst>
-                  <p:par>
-                    <p:cTn id="3" fill="hold">
-                      <p:stCondLst>
-                        <p:cond delay="indefinite"/>
-                      </p:stCondLst>
-                      <p:childTnLst>
-                        <p:par>
-                          <p:cTn id="4" fill="hold">
-                            <p:stCondLst>
-                              <p:cond delay="0"/>
-                            </p:stCondLst>
-                            <p:childTnLst>
-                              <p:par>
-                                <p:cTn id="5" presetID="1" presetClass="exit" presetSubtype="0" fill="hold" grpId="0" nodeType="clickEffect">
-                                  <p:stCondLst>
-                                    <p:cond delay="0"/>
-                                  </p:stCondLst>
-                                  <p:childTnLst>
-                                    <p:set>
-                                      <p:cBhvr>
-                                        <p:cTn id="6" dur="1" fill="hold">
-                                          <p:stCondLst>
-                                            <p:cond delay="0"/>
-                                          </p:stCondLst>
-                                        </p:cTn>
-                                        <p:tgtEl>
-                                          <p:spTgt spid="31"/>
-                                        </p:tgtEl>
-                                        <p:attrNameLst>
-                                          <p:attrName>style.visibility</p:attrName>
-                                        </p:attrNameLst>
-                                      </p:cBhvr>
-                                      <p:to>
-                                        <p:strVal val="hidden"/>
-                                      </p:to>
-                                    </p:set>
-                                  </p:childTnLst>
-                                </p:cTn>
-                              </p:par>
-                            </p:childTnLst>
-                          </p:cTn>
-                        </p:par>
-                      </p:childTnLst>
-                    </p:cTn>
-                  </p:par>
-                  <p:par>
-                    <p:cTn id="7" fill="hold">
-                      <p:stCondLst>
-                        <p:cond delay="indefinite"/>
-                      </p:stCondLst>
-                      <p:childTnLst>
-                        <p:par>
-                          <p:cTn id="8" fill="hold">
-                            <p:stCondLst>
-                              <p:cond delay="0"/>
-                            </p:stCondLst>
-                            <p:childTnLst>
-                              <p:par>
-                                <p:cTn id="9" presetID="1" presetClass="exit" presetSubtype="0" fill="hold" grpId="0" nodeType="clickEffect">
-                                  <p:stCondLst>
-                                    <p:cond delay="0"/>
-                                  </p:stCondLst>
-                                  <p:childTnLst>
-                                    <p:set>
-                                      <p:cBhvr>
-                                        <p:cTn id="10" dur="1" fill="hold">
-                                          <p:stCondLst>
-                                            <p:cond delay="0"/>
-                                          </p:stCondLst>
-                                        </p:cTn>
-                                        <p:tgtEl>
-                                          <p:spTgt spid="32"/>
-                                        </p:tgtEl>
-                                        <p:attrNameLst>
-                                          <p:attrName>style.visibility</p:attrName>
-                                        </p:attrNameLst>
-                                      </p:cBhvr>
-                                      <p:to>
-                                        <p:strVal val="hidden"/>
-                                      </p:to>
-                                    </p:set>
-                                  </p:childTnLst>
-                                </p:cTn>
-                              </p:par>
-                            </p:childTnLst>
-                          </p:cTn>
-                        </p:par>
-                      </p:childTnLst>
-                    </p:cTn>
-                  </p:par>
-                </p:childTnLst>
-              </p:cTn>
-              <p:prevCondLst>
-                <p:cond evt="onPrev" delay="0">
-                  <p:tgtEl>
-                    <p:sldTgt/>
-                  </p:tgtEl>
-                </p:cond>
-              </p:prevCondLst>
-              <p:nextCondLst>
-                <p:cond evt="onNext" delay="0">
-                  <p:tgtEl>
-                    <p:sldTgt/>
-                  </p:tgtEl>
-                </p:cond>
-              </p:nextCondLst>
-            </p:seq>
-          </p:childTnLst>
-        </p:cTn>
-      </p:par>
-    </p:tnLst>
-    <p:bldLst>
-      <p:bldP spid="31" grpId="0" animBg="1"/>
-      <p:bldP spid="32" grpId="0" animBg="1"/>
-    </p:bldLst>
-  </p:timing>
 </p:sld>
 </file>
 
 <file path=ppt/theme/theme1.xml><?xml version="1.0" encoding="utf-8"?>
-<a:theme xmlns:a="http://schemas.openxmlformats.org/drawingml/2006/main" name="office theme">
+<a:theme xmlns:a="http://schemas.openxmlformats.org/drawingml/2006/main" name="Office Theme">
   <a:themeElements>
     <a:clrScheme name="Office">
       <a:dk1>
@@ -11507,14 +7157,14 @@
         <a:srgbClr val="96607D"/>
       </a:folHlink>
     </a:clrScheme>
-    <a:fontScheme name="Office Theme">
+    <a:fontScheme name="Office">
       <a:majorFont>
-        <a:latin typeface="Aptos Display" panose="020F0302020204030204"/>
+        <a:latin typeface="Aptos Display" panose="02110004020202020204"/>
         <a:ea typeface=""/>
         <a:cs typeface=""/>
-        <a:font script="Jpan" typeface="ＭＳ Ｐゴシック"/>
+        <a:font script="Jpan" typeface="游ゴシック Light"/>
         <a:font script="Hang" typeface="맑은 고딕"/>
-        <a:font script="Hans" typeface="宋体"/>
+        <a:font script="Hans" typeface="等线 Light"/>
         <a:font script="Hant" typeface="新細明體"/>
         <a:font script="Arab" typeface="Times New Roman"/>
         <a:font script="Hebr" typeface="Times New Roman"/>
@@ -11542,14 +7192,31 @@
         <a:font script="Viet" typeface="Times New Roman"/>
         <a:font script="Uigh" typeface="Microsoft Uighur"/>
         <a:font script="Geor" typeface="Sylfaen"/>
+        <a:font script="Armn" typeface="Arial"/>
+        <a:font script="Bugi" typeface="Leelawadee UI"/>
+        <a:font script="Bopo" typeface="Microsoft JhengHei"/>
+        <a:font script="Java" typeface="Javanese Text"/>
+        <a:font script="Lisu" typeface="Segoe UI"/>
+        <a:font script="Mymr" typeface="Myanmar Text"/>
+        <a:font script="Nkoo" typeface="Ebrima"/>
+        <a:font script="Olck" typeface="Nirmala UI"/>
+        <a:font script="Osma" typeface="Ebrima"/>
+        <a:font script="Phag" typeface="Phagspa"/>
+        <a:font script="Syrn" typeface="Estrangelo Edessa"/>
+        <a:font script="Syrj" typeface="Estrangelo Edessa"/>
+        <a:font script="Syre" typeface="Estrangelo Edessa"/>
+        <a:font script="Sora" typeface="Nirmala UI"/>
+        <a:font script="Tale" typeface="Microsoft Tai Le"/>
+        <a:font script="Talu" typeface="Microsoft New Tai Lue"/>
+        <a:font script="Tfng" typeface="Ebrima"/>
       </a:majorFont>
       <a:minorFont>
-        <a:latin typeface="Aptos" panose="020B0004020202020204"/>
+        <a:latin typeface="Aptos" panose="02110004020202020204"/>
         <a:ea typeface=""/>
         <a:cs typeface=""/>
-        <a:font script="Jpan" typeface="ＭＳ Ｐゴシック"/>
+        <a:font script="Jpan" typeface="游ゴシック"/>
         <a:font script="Hang" typeface="맑은 고딕"/>
-        <a:font script="Hans" typeface="宋体"/>
+        <a:font script="Hans" typeface="等线"/>
         <a:font script="Hant" typeface="新細明體"/>
         <a:font script="Arab" typeface="Arial"/>
         <a:font script="Hebr" typeface="Arial"/>
@@ -11577,9 +7244,26 @@
         <a:font script="Viet" typeface="Arial"/>
         <a:font script="Uigh" typeface="Microsoft Uighur"/>
         <a:font script="Geor" typeface="Sylfaen"/>
+        <a:font script="Armn" typeface="Arial"/>
+        <a:font script="Bugi" typeface="Leelawadee UI"/>
+        <a:font script="Bopo" typeface="Microsoft JhengHei"/>
+        <a:font script="Java" typeface="Javanese Text"/>
+        <a:font script="Lisu" typeface="Segoe UI"/>
+        <a:font script="Mymr" typeface="Myanmar Text"/>
+        <a:font script="Nkoo" typeface="Ebrima"/>
+        <a:font script="Olck" typeface="Nirmala UI"/>
+        <a:font script="Osma" typeface="Ebrima"/>
+        <a:font script="Phag" typeface="Phagspa"/>
+        <a:font script="Syrn" typeface="Estrangelo Edessa"/>
+        <a:font script="Syrj" typeface="Estrangelo Edessa"/>
+        <a:font script="Syre" typeface="Estrangelo Edessa"/>
+        <a:font script="Sora" typeface="Nirmala UI"/>
+        <a:font script="Tale" typeface="Microsoft Tai Le"/>
+        <a:font script="Talu" typeface="Microsoft New Tai Lue"/>
+        <a:font script="Tfng" typeface="Ebrima"/>
       </a:minorFont>
     </a:fontScheme>
-    <a:fmtScheme name="Office Theme">
+    <a:fmtScheme name="Office">
       <a:fillStyleLst>
         <a:solidFill>
           <a:schemeClr val="phClr"/>
